--- a/docs/slides/Week12.pptx
+++ b/docs/slides/Week12.pptx
@@ -198,7 +198,7 @@
 <file path=ppt/revisionInfo.xml><?xml version="1.0" encoding="utf-8"?>
 <p1510:revInfo xmlns:a="http://schemas.openxmlformats.org/drawingml/2006/main" xmlns:r="http://schemas.openxmlformats.org/officeDocument/2006/relationships" xmlns:p1510="http://schemas.microsoft.com/office/powerpoint/2015/10/main">
   <p1510:revLst>
-    <p1510:client id="{A30510A2-62EC-40DC-AB2C-65C341A967ED}" v="2" dt="2025-01-07T07:39:25.332"/>
+    <p1510:client id="{8E85CC96-32C8-4C8A-B07A-DFEB87A92E06}" v="46" dt="2026-04-07T03:58:13.628"/>
   </p1510:revLst>
 </p1510:revInfo>
 </file>
@@ -206,2564 +206,283 @@
 <file path=ppt/changesInfos/changesInfo1.xml><?xml version="1.0" encoding="utf-8"?>
 <pc:chgInfo xmlns:a="http://schemas.openxmlformats.org/drawingml/2006/main" xmlns:r="http://schemas.openxmlformats.org/officeDocument/2006/relationships" xmlns:ac="http://schemas.microsoft.com/office/drawing/2013/main/command" xmlns:pc="http://schemas.microsoft.com/office/powerpoint/2013/main/command">
   <pc:docChgLst>
-    <pc:chgData name="Zhao Jin" userId="cd05a825-544c-438a-9ba1-08e63db50b47" providerId="ADAL" clId="{3342749F-A4A3-4CC6-8E89-A279285BF1FF}"/>
-    <pc:docChg chg="undo custSel addSld delSld modSld sldOrd">
-      <pc:chgData name="Zhao Jin" userId="cd05a825-544c-438a-9ba1-08e63db50b47" providerId="ADAL" clId="{3342749F-A4A3-4CC6-8E89-A279285BF1FF}" dt="2021-01-25T08:18:19.440" v="5414" actId="20577"/>
+    <pc:chgData name="Zhao Jin" userId="cd05a825-544c-438a-9ba1-08e63db50b47" providerId="ADAL" clId="{5DF3A229-1965-414E-AF54-F4C37AC7DF68}"/>
+    <pc:docChg chg="undo custSel modSld">
+      <pc:chgData name="Zhao Jin" userId="cd05a825-544c-438a-9ba1-08e63db50b47" providerId="ADAL" clId="{5DF3A229-1965-414E-AF54-F4C37AC7DF68}" dt="2026-04-07T03:58:13.628" v="412"/>
       <pc:docMkLst>
         <pc:docMk/>
       </pc:docMkLst>
       <pc:sldChg chg="modSp mod">
-        <pc:chgData name="Zhao Jin" userId="cd05a825-544c-438a-9ba1-08e63db50b47" providerId="ADAL" clId="{3342749F-A4A3-4CC6-8E89-A279285BF1FF}" dt="2021-01-21T13:07:41.474" v="4692" actId="20577"/>
-        <pc:sldMkLst>
-          <pc:docMk/>
-          <pc:sldMk cId="2438607696" sldId="468"/>
-        </pc:sldMkLst>
-      </pc:sldChg>
-      <pc:sldChg chg="addSp delSp modSp add mod ord delAnim modAnim">
-        <pc:chgData name="Zhao Jin" userId="cd05a825-544c-438a-9ba1-08e63db50b47" providerId="ADAL" clId="{3342749F-A4A3-4CC6-8E89-A279285BF1FF}" dt="2021-01-21T14:37:58.440" v="5166" actId="1076"/>
-        <pc:sldMkLst>
-          <pc:docMk/>
-          <pc:sldMk cId="1311126165" sldId="485"/>
-        </pc:sldMkLst>
-      </pc:sldChg>
-      <pc:sldChg chg="del">
-        <pc:chgData name="Zhao Jin" userId="cd05a825-544c-438a-9ba1-08e63db50b47" providerId="ADAL" clId="{3342749F-A4A3-4CC6-8E89-A279285BF1FF}" dt="2021-01-21T11:55:17.003" v="1356" actId="47"/>
-        <pc:sldMkLst>
-          <pc:docMk/>
-          <pc:sldMk cId="1691474746" sldId="509"/>
-        </pc:sldMkLst>
-      </pc:sldChg>
-      <pc:sldChg chg="del">
-        <pc:chgData name="Zhao Jin" userId="cd05a825-544c-438a-9ba1-08e63db50b47" providerId="ADAL" clId="{3342749F-A4A3-4CC6-8E89-A279285BF1FF}" dt="2021-01-21T12:46:24.776" v="3775" actId="47"/>
-        <pc:sldMkLst>
-          <pc:docMk/>
-          <pc:sldMk cId="3813801240" sldId="511"/>
-        </pc:sldMkLst>
-      </pc:sldChg>
-      <pc:sldChg chg="del">
-        <pc:chgData name="Zhao Jin" userId="cd05a825-544c-438a-9ba1-08e63db50b47" providerId="ADAL" clId="{3342749F-A4A3-4CC6-8E89-A279285BF1FF}" dt="2021-01-21T12:46:24.776" v="3775" actId="47"/>
-        <pc:sldMkLst>
-          <pc:docMk/>
-          <pc:sldMk cId="39845570" sldId="522"/>
-        </pc:sldMkLst>
-      </pc:sldChg>
-      <pc:sldChg chg="del">
-        <pc:chgData name="Zhao Jin" userId="cd05a825-544c-438a-9ba1-08e63db50b47" providerId="ADAL" clId="{3342749F-A4A3-4CC6-8E89-A279285BF1FF}" dt="2021-01-21T12:46:24.776" v="3775" actId="47"/>
-        <pc:sldMkLst>
-          <pc:docMk/>
-          <pc:sldMk cId="2544506794" sldId="525"/>
-        </pc:sldMkLst>
-      </pc:sldChg>
-      <pc:sldChg chg="del">
-        <pc:chgData name="Zhao Jin" userId="cd05a825-544c-438a-9ba1-08e63db50b47" providerId="ADAL" clId="{3342749F-A4A3-4CC6-8E89-A279285BF1FF}" dt="2021-01-21T12:34:31.848" v="3107" actId="47"/>
-        <pc:sldMkLst>
-          <pc:docMk/>
-          <pc:sldMk cId="1799330761" sldId="528"/>
-        </pc:sldMkLst>
-      </pc:sldChg>
-      <pc:sldChg chg="del">
-        <pc:chgData name="Zhao Jin" userId="cd05a825-544c-438a-9ba1-08e63db50b47" providerId="ADAL" clId="{3342749F-A4A3-4CC6-8E89-A279285BF1FF}" dt="2021-01-21T11:55:17.946" v="1357" actId="47"/>
-        <pc:sldMkLst>
-          <pc:docMk/>
-          <pc:sldMk cId="436156561" sldId="530"/>
-        </pc:sldMkLst>
-      </pc:sldChg>
-      <pc:sldChg chg="addSp delSp modSp mod delAnim modAnim">
-        <pc:chgData name="Zhao Jin" userId="cd05a825-544c-438a-9ba1-08e63db50b47" providerId="ADAL" clId="{3342749F-A4A3-4CC6-8E89-A279285BF1FF}" dt="2021-01-21T13:07:20.308" v="4636" actId="478"/>
-        <pc:sldMkLst>
-          <pc:docMk/>
-          <pc:sldMk cId="681224785" sldId="531"/>
-        </pc:sldMkLst>
-      </pc:sldChg>
-      <pc:sldChg chg="del">
-        <pc:chgData name="Zhao Jin" userId="cd05a825-544c-438a-9ba1-08e63db50b47" providerId="ADAL" clId="{3342749F-A4A3-4CC6-8E89-A279285BF1FF}" dt="2021-01-21T11:55:18.413" v="1358" actId="47"/>
-        <pc:sldMkLst>
-          <pc:docMk/>
-          <pc:sldMk cId="3275268416" sldId="532"/>
-        </pc:sldMkLst>
-      </pc:sldChg>
-      <pc:sldChg chg="del">
-        <pc:chgData name="Zhao Jin" userId="cd05a825-544c-438a-9ba1-08e63db50b47" providerId="ADAL" clId="{3342749F-A4A3-4CC6-8E89-A279285BF1FF}" dt="2021-01-21T12:46:24.776" v="3775" actId="47"/>
-        <pc:sldMkLst>
-          <pc:docMk/>
-          <pc:sldMk cId="4265878996" sldId="534"/>
-        </pc:sldMkLst>
-      </pc:sldChg>
-      <pc:sldChg chg="del">
-        <pc:chgData name="Zhao Jin" userId="cd05a825-544c-438a-9ba1-08e63db50b47" providerId="ADAL" clId="{3342749F-A4A3-4CC6-8E89-A279285BF1FF}" dt="2021-01-21T12:46:24.776" v="3775" actId="47"/>
-        <pc:sldMkLst>
-          <pc:docMk/>
-          <pc:sldMk cId="1582525615" sldId="535"/>
-        </pc:sldMkLst>
-      </pc:sldChg>
-      <pc:sldChg chg="del">
-        <pc:chgData name="Zhao Jin" userId="cd05a825-544c-438a-9ba1-08e63db50b47" providerId="ADAL" clId="{3342749F-A4A3-4CC6-8E89-A279285BF1FF}" dt="2021-01-21T12:46:24.776" v="3775" actId="47"/>
-        <pc:sldMkLst>
-          <pc:docMk/>
-          <pc:sldMk cId="1344427664" sldId="537"/>
-        </pc:sldMkLst>
-      </pc:sldChg>
-      <pc:sldChg chg="del">
-        <pc:chgData name="Zhao Jin" userId="cd05a825-544c-438a-9ba1-08e63db50b47" providerId="ADAL" clId="{3342749F-A4A3-4CC6-8E89-A279285BF1FF}" dt="2021-01-21T12:46:24.776" v="3775" actId="47"/>
-        <pc:sldMkLst>
-          <pc:docMk/>
-          <pc:sldMk cId="2851665547" sldId="538"/>
-        </pc:sldMkLst>
-      </pc:sldChg>
-      <pc:sldChg chg="del">
-        <pc:chgData name="Zhao Jin" userId="cd05a825-544c-438a-9ba1-08e63db50b47" providerId="ADAL" clId="{3342749F-A4A3-4CC6-8E89-A279285BF1FF}" dt="2021-01-21T12:46:24.776" v="3775" actId="47"/>
-        <pc:sldMkLst>
-          <pc:docMk/>
-          <pc:sldMk cId="1293966413" sldId="539"/>
-        </pc:sldMkLst>
-      </pc:sldChg>
-      <pc:sldChg chg="del">
-        <pc:chgData name="Zhao Jin" userId="cd05a825-544c-438a-9ba1-08e63db50b47" providerId="ADAL" clId="{3342749F-A4A3-4CC6-8E89-A279285BF1FF}" dt="2021-01-21T12:46:24.776" v="3775" actId="47"/>
-        <pc:sldMkLst>
-          <pc:docMk/>
-          <pc:sldMk cId="3008340486" sldId="540"/>
-        </pc:sldMkLst>
-      </pc:sldChg>
-      <pc:sldChg chg="del">
-        <pc:chgData name="Zhao Jin" userId="cd05a825-544c-438a-9ba1-08e63db50b47" providerId="ADAL" clId="{3342749F-A4A3-4CC6-8E89-A279285BF1FF}" dt="2021-01-21T12:46:24.776" v="3775" actId="47"/>
-        <pc:sldMkLst>
-          <pc:docMk/>
-          <pc:sldMk cId="3466905673" sldId="541"/>
-        </pc:sldMkLst>
-      </pc:sldChg>
-      <pc:sldChg chg="del">
-        <pc:chgData name="Zhao Jin" userId="cd05a825-544c-438a-9ba1-08e63db50b47" providerId="ADAL" clId="{3342749F-A4A3-4CC6-8E89-A279285BF1FF}" dt="2021-01-21T12:46:24.776" v="3775" actId="47"/>
-        <pc:sldMkLst>
-          <pc:docMk/>
-          <pc:sldMk cId="3028826392" sldId="542"/>
-        </pc:sldMkLst>
-      </pc:sldChg>
-      <pc:sldChg chg="del">
-        <pc:chgData name="Zhao Jin" userId="cd05a825-544c-438a-9ba1-08e63db50b47" providerId="ADAL" clId="{3342749F-A4A3-4CC6-8E89-A279285BF1FF}" dt="2021-01-21T12:46:24.776" v="3775" actId="47"/>
-        <pc:sldMkLst>
-          <pc:docMk/>
-          <pc:sldMk cId="2442193536" sldId="543"/>
-        </pc:sldMkLst>
-      </pc:sldChg>
-      <pc:sldChg chg="del">
-        <pc:chgData name="Zhao Jin" userId="cd05a825-544c-438a-9ba1-08e63db50b47" providerId="ADAL" clId="{3342749F-A4A3-4CC6-8E89-A279285BF1FF}" dt="2021-01-21T12:46:24.776" v="3775" actId="47"/>
-        <pc:sldMkLst>
-          <pc:docMk/>
-          <pc:sldMk cId="3813214823" sldId="544"/>
-        </pc:sldMkLst>
-      </pc:sldChg>
-      <pc:sldChg chg="del">
-        <pc:chgData name="Zhao Jin" userId="cd05a825-544c-438a-9ba1-08e63db50b47" providerId="ADAL" clId="{3342749F-A4A3-4CC6-8E89-A279285BF1FF}" dt="2021-01-21T12:46:24.776" v="3775" actId="47"/>
-        <pc:sldMkLst>
-          <pc:docMk/>
-          <pc:sldMk cId="3246666524" sldId="545"/>
-        </pc:sldMkLst>
-      </pc:sldChg>
-      <pc:sldChg chg="addSp delSp modSp mod addAnim delAnim modAnim">
-        <pc:chgData name="Zhao Jin" userId="cd05a825-544c-438a-9ba1-08e63db50b47" providerId="ADAL" clId="{3342749F-A4A3-4CC6-8E89-A279285BF1FF}" dt="2021-01-25T05:04:08.003" v="5348" actId="20577"/>
-        <pc:sldMkLst>
-          <pc:docMk/>
-          <pc:sldMk cId="901453530" sldId="546"/>
-        </pc:sldMkLst>
-      </pc:sldChg>
-      <pc:sldChg chg="addSp delSp modSp add mod delAnim modAnim">
-        <pc:chgData name="Zhao Jin" userId="cd05a825-544c-438a-9ba1-08e63db50b47" providerId="ADAL" clId="{3342749F-A4A3-4CC6-8E89-A279285BF1FF}" dt="2021-01-21T12:36:01.034" v="3240" actId="20577"/>
-        <pc:sldMkLst>
-          <pc:docMk/>
-          <pc:sldMk cId="884841463" sldId="547"/>
-        </pc:sldMkLst>
-      </pc:sldChg>
-      <pc:sldChg chg="delSp modSp add mod ord">
-        <pc:chgData name="Zhao Jin" userId="cd05a825-544c-438a-9ba1-08e63db50b47" providerId="ADAL" clId="{3342749F-A4A3-4CC6-8E89-A279285BF1FF}" dt="2021-01-21T12:38:32.362" v="3394" actId="13926"/>
-        <pc:sldMkLst>
-          <pc:docMk/>
-          <pc:sldMk cId="1617257579" sldId="548"/>
-        </pc:sldMkLst>
-      </pc:sldChg>
-      <pc:sldChg chg="add del">
-        <pc:chgData name="Zhao Jin" userId="cd05a825-544c-438a-9ba1-08e63db50b47" providerId="ADAL" clId="{3342749F-A4A3-4CC6-8E89-A279285BF1FF}" dt="2021-01-21T11:57:31.154" v="1403"/>
-        <pc:sldMkLst>
-          <pc:docMk/>
-          <pc:sldMk cId="2581467069" sldId="549"/>
-        </pc:sldMkLst>
-      </pc:sldChg>
-      <pc:sldChg chg="addSp delSp modSp add mod ord modAnim">
-        <pc:chgData name="Zhao Jin" userId="cd05a825-544c-438a-9ba1-08e63db50b47" providerId="ADAL" clId="{3342749F-A4A3-4CC6-8E89-A279285BF1FF}" dt="2021-01-25T08:18:19.440" v="5414" actId="20577"/>
-        <pc:sldMkLst>
-          <pc:docMk/>
-          <pc:sldMk cId="3394924879" sldId="549"/>
-        </pc:sldMkLst>
-      </pc:sldChg>
-      <pc:sldChg chg="add del">
-        <pc:chgData name="Zhao Jin" userId="cd05a825-544c-438a-9ba1-08e63db50b47" providerId="ADAL" clId="{3342749F-A4A3-4CC6-8E89-A279285BF1FF}" dt="2021-01-21T12:37:58.528" v="3388"/>
-        <pc:sldMkLst>
-          <pc:docMk/>
-          <pc:sldMk cId="710474135" sldId="550"/>
-        </pc:sldMkLst>
-      </pc:sldChg>
-      <pc:sldChg chg="addSp delSp modSp add mod delAnim modAnim">
-        <pc:chgData name="Zhao Jin" userId="cd05a825-544c-438a-9ba1-08e63db50b47" providerId="ADAL" clId="{3342749F-A4A3-4CC6-8E89-A279285BF1FF}" dt="2021-01-21T13:53:36.950" v="5126" actId="1076"/>
-        <pc:sldMkLst>
-          <pc:docMk/>
-          <pc:sldMk cId="784668950" sldId="550"/>
-        </pc:sldMkLst>
-      </pc:sldChg>
-      <pc:sldChg chg="delSp modSp add del mod">
-        <pc:chgData name="Zhao Jin" userId="cd05a825-544c-438a-9ba1-08e63db50b47" providerId="ADAL" clId="{3342749F-A4A3-4CC6-8E89-A279285BF1FF}" dt="2021-01-21T12:21:46.946" v="2377" actId="47"/>
-        <pc:sldMkLst>
-          <pc:docMk/>
-          <pc:sldMk cId="3613962527" sldId="550"/>
-        </pc:sldMkLst>
-      </pc:sldChg>
-      <pc:sldChg chg="add del">
-        <pc:chgData name="Zhao Jin" userId="cd05a825-544c-438a-9ba1-08e63db50b47" providerId="ADAL" clId="{3342749F-A4A3-4CC6-8E89-A279285BF1FF}" dt="2021-01-21T12:24:02.157" v="2423"/>
-        <pc:sldMkLst>
-          <pc:docMk/>
-          <pc:sldMk cId="3794641356" sldId="550"/>
-        </pc:sldMkLst>
-      </pc:sldChg>
-    </pc:docChg>
-  </pc:docChgLst>
-  <pc:docChgLst>
-    <pc:chgData name="Zhao Jin" userId="cd05a825-544c-438a-9ba1-08e63db50b47" providerId="ADAL" clId="{BBE9D547-4B31-704D-9080-47B1CA4D9124}"/>
-    <pc:docChg chg="modSld">
-      <pc:chgData name="Zhao Jin" userId="cd05a825-544c-438a-9ba1-08e63db50b47" providerId="ADAL" clId="{BBE9D547-4B31-704D-9080-47B1CA4D9124}" dt="2021-01-18T05:40:31.767" v="29" actId="114"/>
-      <pc:docMkLst>
-        <pc:docMk/>
-      </pc:docMkLst>
-      <pc:sldChg chg="modSp modAnim">
-        <pc:chgData name="Zhao Jin" userId="cd05a825-544c-438a-9ba1-08e63db50b47" providerId="ADAL" clId="{BBE9D547-4B31-704D-9080-47B1CA4D9124}" dt="2021-01-18T05:39:25.523" v="25"/>
-        <pc:sldMkLst>
-          <pc:docMk/>
-          <pc:sldMk cId="4265878996" sldId="534"/>
-        </pc:sldMkLst>
-      </pc:sldChg>
-      <pc:sldChg chg="modSp">
-        <pc:chgData name="Zhao Jin" userId="cd05a825-544c-438a-9ba1-08e63db50b47" providerId="ADAL" clId="{BBE9D547-4B31-704D-9080-47B1CA4D9124}" dt="2021-01-18T05:40:31.767" v="29" actId="114"/>
-        <pc:sldMkLst>
-          <pc:docMk/>
-          <pc:sldMk cId="2851665547" sldId="538"/>
-        </pc:sldMkLst>
-      </pc:sldChg>
-    </pc:docChg>
-  </pc:docChgLst>
-  <pc:docChgLst>
-    <pc:chgData name="Zhao Jin" userId="cd05a825-544c-438a-9ba1-08e63db50b47" providerId="ADAL" clId="{28AEA613-C2D1-4884-898F-364599B60A84}"/>
-    <pc:docChg chg="undo custSel addSld delSld modSld sldOrd">
-      <pc:chgData name="Zhao Jin" userId="cd05a825-544c-438a-9ba1-08e63db50b47" providerId="ADAL" clId="{28AEA613-C2D1-4884-898F-364599B60A84}" dt="2021-03-08T05:35:17.057" v="4597" actId="1076"/>
-      <pc:docMkLst>
-        <pc:docMk/>
-      </pc:docMkLst>
-      <pc:sldChg chg="modSp mod">
-        <pc:chgData name="Zhao Jin" userId="cd05a825-544c-438a-9ba1-08e63db50b47" providerId="ADAL" clId="{28AEA613-C2D1-4884-898F-364599B60A84}" dt="2021-03-08T05:14:40.845" v="4350" actId="20577"/>
-        <pc:sldMkLst>
-          <pc:docMk/>
-          <pc:sldMk cId="2438607696" sldId="468"/>
-        </pc:sldMkLst>
-      </pc:sldChg>
-      <pc:sldChg chg="modSp mod">
-        <pc:chgData name="Zhao Jin" userId="cd05a825-544c-438a-9ba1-08e63db50b47" providerId="ADAL" clId="{28AEA613-C2D1-4884-898F-364599B60A84}" dt="2021-03-02T10:06:02.574" v="4181" actId="20577"/>
+        <pc:chgData name="Zhao Jin" userId="cd05a825-544c-438a-9ba1-08e63db50b47" providerId="ADAL" clId="{5DF3A229-1965-414E-AF54-F4C37AC7DF68}" dt="2026-04-06T07:22:48.848" v="407" actId="20577"/>
         <pc:sldMkLst>
           <pc:docMk/>
           <pc:sldMk cId="1067695719" sldId="526"/>
         </pc:sldMkLst>
+        <pc:spChg chg="mod">
+          <ac:chgData name="Zhao Jin" userId="cd05a825-544c-438a-9ba1-08e63db50b47" providerId="ADAL" clId="{5DF3A229-1965-414E-AF54-F4C37AC7DF68}" dt="2026-04-06T07:22:48.848" v="407" actId="20577"/>
+          <ac:spMkLst>
+            <pc:docMk/>
+            <pc:sldMk cId="1067695719" sldId="526"/>
+            <ac:spMk id="13" creationId="{00000000-0000-0000-0000-000000000000}"/>
+          </ac:spMkLst>
+        </pc:spChg>
       </pc:sldChg>
-      <pc:sldChg chg="del">
-        <pc:chgData name="Zhao Jin" userId="cd05a825-544c-438a-9ba1-08e63db50b47" providerId="ADAL" clId="{28AEA613-C2D1-4884-898F-364599B60A84}" dt="2021-03-02T06:42:03.057" v="96" actId="47"/>
+      <pc:sldChg chg="modSp mod">
+        <pc:chgData name="Zhao Jin" userId="cd05a825-544c-438a-9ba1-08e63db50b47" providerId="ADAL" clId="{5DF3A229-1965-414E-AF54-F4C37AC7DF68}" dt="2026-04-06T07:09:58.302" v="306" actId="20577"/>
         <pc:sldMkLst>
           <pc:docMk/>
           <pc:sldMk cId="2573090601" sldId="546"/>
         </pc:sldMkLst>
+        <pc:spChg chg="mod">
+          <ac:chgData name="Zhao Jin" userId="cd05a825-544c-438a-9ba1-08e63db50b47" providerId="ADAL" clId="{5DF3A229-1965-414E-AF54-F4C37AC7DF68}" dt="2026-04-06T07:09:58.302" v="306" actId="20577"/>
+          <ac:spMkLst>
+            <pc:docMk/>
+            <pc:sldMk cId="2573090601" sldId="546"/>
+            <ac:spMk id="8" creationId="{00000000-0000-0000-0000-000000000000}"/>
+          </ac:spMkLst>
+        </pc:spChg>
+        <pc:spChg chg="mod">
+          <ac:chgData name="Zhao Jin" userId="cd05a825-544c-438a-9ba1-08e63db50b47" providerId="ADAL" clId="{5DF3A229-1965-414E-AF54-F4C37AC7DF68}" dt="2026-04-06T07:09:55.884" v="304" actId="20577"/>
+          <ac:spMkLst>
+            <pc:docMk/>
+            <pc:sldMk cId="2573090601" sldId="546"/>
+            <ac:spMk id="14338" creationId="{00000000-0000-0000-0000-000000000000}"/>
+          </ac:spMkLst>
+        </pc:spChg>
       </pc:sldChg>
-      <pc:sldChg chg="addSp delSp modSp mod ord delAnim modAnim">
-        <pc:chgData name="Zhao Jin" userId="cd05a825-544c-438a-9ba1-08e63db50b47" providerId="ADAL" clId="{28AEA613-C2D1-4884-898F-364599B60A84}" dt="2021-03-08T05:32:40.765" v="4519" actId="20577"/>
+      <pc:sldChg chg="modAnim">
+        <pc:chgData name="Zhao Jin" userId="cd05a825-544c-438a-9ba1-08e63db50b47" providerId="ADAL" clId="{5DF3A229-1965-414E-AF54-F4C37AC7DF68}" dt="2026-04-06T07:20:55.882" v="382"/>
         <pc:sldMkLst>
           <pc:docMk/>
-          <pc:sldMk cId="1427618944" sldId="553"/>
+          <pc:sldMk cId="1565163798" sldId="575"/>
         </pc:sldMkLst>
       </pc:sldChg>
-      <pc:sldChg chg="addSp delSp modSp del mod delAnim modAnim">
-        <pc:chgData name="Zhao Jin" userId="cd05a825-544c-438a-9ba1-08e63db50b47" providerId="ADAL" clId="{28AEA613-C2D1-4884-898F-364599B60A84}" dt="2021-03-02T09:52:23.858" v="3320" actId="47"/>
+      <pc:sldChg chg="addAnim delAnim modAnim">
+        <pc:chgData name="Zhao Jin" userId="cd05a825-544c-438a-9ba1-08e63db50b47" providerId="ADAL" clId="{5DF3A229-1965-414E-AF54-F4C37AC7DF68}" dt="2026-04-07T03:58:13.628" v="412"/>
         <pc:sldMkLst>
           <pc:docMk/>
-          <pc:sldMk cId="1094276337" sldId="601"/>
+          <pc:sldMk cId="2550500962" sldId="592"/>
         </pc:sldMkLst>
       </pc:sldChg>
-      <pc:sldChg chg="addSp delSp modSp del">
-        <pc:chgData name="Zhao Jin" userId="cd05a825-544c-438a-9ba1-08e63db50b47" providerId="ADAL" clId="{28AEA613-C2D1-4884-898F-364599B60A84}" dt="2021-03-02T09:47:25.458" v="3246" actId="47"/>
-        <pc:sldMkLst>
-          <pc:docMk/>
-          <pc:sldMk cId="1542002799" sldId="602"/>
-        </pc:sldMkLst>
-      </pc:sldChg>
-      <pc:sldChg chg="del">
-        <pc:chgData name="Zhao Jin" userId="cd05a825-544c-438a-9ba1-08e63db50b47" providerId="ADAL" clId="{28AEA613-C2D1-4884-898F-364599B60A84}" dt="2021-03-02T09:47:26.371" v="3247" actId="47"/>
-        <pc:sldMkLst>
-          <pc:docMk/>
-          <pc:sldMk cId="830535321" sldId="603"/>
-        </pc:sldMkLst>
-      </pc:sldChg>
-      <pc:sldChg chg="delSp modSp add mod">
-        <pc:chgData name="Zhao Jin" userId="cd05a825-544c-438a-9ba1-08e63db50b47" providerId="ADAL" clId="{28AEA613-C2D1-4884-898F-364599B60A84}" dt="2021-03-02T10:06:59.744" v="4184" actId="207"/>
+      <pc:sldChg chg="modAnim">
+        <pc:chgData name="Zhao Jin" userId="cd05a825-544c-438a-9ba1-08e63db50b47" providerId="ADAL" clId="{5DF3A229-1965-414E-AF54-F4C37AC7DF68}" dt="2026-04-06T07:17:25.441" v="367"/>
         <pc:sldMkLst>
           <pc:docMk/>
           <pc:sldMk cId="1813128722" sldId="617"/>
         </pc:sldMkLst>
       </pc:sldChg>
-      <pc:sldChg chg="delSp modSp add mod">
-        <pc:chgData name="Zhao Jin" userId="cd05a825-544c-438a-9ba1-08e63db50b47" providerId="ADAL" clId="{28AEA613-C2D1-4884-898F-364599B60A84}" dt="2021-03-02T10:06:37.605" v="4183"/>
+      <pc:sldChg chg="modSp mod addAnim delAnim modAnim">
+        <pc:chgData name="Zhao Jin" userId="cd05a825-544c-438a-9ba1-08e63db50b47" providerId="ADAL" clId="{5DF3A229-1965-414E-AF54-F4C37AC7DF68}" dt="2026-04-06T07:18:45.883" v="377"/>
         <pc:sldMkLst>
           <pc:docMk/>
           <pc:sldMk cId="3454948446" sldId="636"/>
         </pc:sldMkLst>
+        <pc:spChg chg="mod">
+          <ac:chgData name="Zhao Jin" userId="cd05a825-544c-438a-9ba1-08e63db50b47" providerId="ADAL" clId="{5DF3A229-1965-414E-AF54-F4C37AC7DF68}" dt="2026-04-06T07:18:26.254" v="371" actId="1076"/>
+          <ac:spMkLst>
+            <pc:docMk/>
+            <pc:sldMk cId="3454948446" sldId="636"/>
+            <ac:spMk id="222" creationId="{689FCCC1-5F77-4501-A120-F099E35B5B85}"/>
+          </ac:spMkLst>
+        </pc:spChg>
+        <pc:spChg chg="mod">
+          <ac:chgData name="Zhao Jin" userId="cd05a825-544c-438a-9ba1-08e63db50b47" providerId="ADAL" clId="{5DF3A229-1965-414E-AF54-F4C37AC7DF68}" dt="2026-04-06T07:18:26.254" v="371" actId="1076"/>
+          <ac:spMkLst>
+            <pc:docMk/>
+            <pc:sldMk cId="3454948446" sldId="636"/>
+            <ac:spMk id="223" creationId="{4E57D16C-F289-4E02-9D67-4F8DB43103CA}"/>
+          </ac:spMkLst>
+        </pc:spChg>
+        <pc:spChg chg="mod">
+          <ac:chgData name="Zhao Jin" userId="cd05a825-544c-438a-9ba1-08e63db50b47" providerId="ADAL" clId="{5DF3A229-1965-414E-AF54-F4C37AC7DF68}" dt="2026-04-06T07:18:26.254" v="371" actId="1076"/>
+          <ac:spMkLst>
+            <pc:docMk/>
+            <pc:sldMk cId="3454948446" sldId="636"/>
+            <ac:spMk id="226" creationId="{52D9BBE1-5AF6-4A31-9E91-B62ED0344FDD}"/>
+          </ac:spMkLst>
+        </pc:spChg>
+        <pc:spChg chg="mod">
+          <ac:chgData name="Zhao Jin" userId="cd05a825-544c-438a-9ba1-08e63db50b47" providerId="ADAL" clId="{5DF3A229-1965-414E-AF54-F4C37AC7DF68}" dt="2026-04-06T07:18:26.254" v="371" actId="1076"/>
+          <ac:spMkLst>
+            <pc:docMk/>
+            <pc:sldMk cId="3454948446" sldId="636"/>
+            <ac:spMk id="227" creationId="{0EC8393C-BB83-44E9-B35D-1D94A63B3E35}"/>
+          </ac:spMkLst>
+        </pc:spChg>
       </pc:sldChg>
-      <pc:sldChg chg="addSp delSp modSp add mod delAnim modAnim">
-        <pc:chgData name="Zhao Jin" userId="cd05a825-544c-438a-9ba1-08e63db50b47" providerId="ADAL" clId="{28AEA613-C2D1-4884-898F-364599B60A84}" dt="2021-03-08T05:33:23.196" v="4520" actId="404"/>
-        <pc:sldMkLst>
-          <pc:docMk/>
-          <pc:sldMk cId="3737971943" sldId="637"/>
-        </pc:sldMkLst>
-      </pc:sldChg>
-      <pc:sldChg chg="addSp modSp add del mod modAnim">
-        <pc:chgData name="Zhao Jin" userId="cd05a825-544c-438a-9ba1-08e63db50b47" providerId="ADAL" clId="{28AEA613-C2D1-4884-898F-364599B60A84}" dt="2021-03-08T05:16:40.496" v="4351" actId="47"/>
-        <pc:sldMkLst>
-          <pc:docMk/>
-          <pc:sldMk cId="628751711" sldId="638"/>
-        </pc:sldMkLst>
-      </pc:sldChg>
-      <pc:sldChg chg="delSp modSp add mod delAnim">
-        <pc:chgData name="Zhao Jin" userId="cd05a825-544c-438a-9ba1-08e63db50b47" providerId="ADAL" clId="{28AEA613-C2D1-4884-898F-364599B60A84}" dt="2021-03-02T09:13:30.902" v="1808" actId="20577"/>
-        <pc:sldMkLst>
-          <pc:docMk/>
-          <pc:sldMk cId="1179750071" sldId="639"/>
-        </pc:sldMkLst>
-      </pc:sldChg>
-      <pc:sldChg chg="addSp delSp modSp add mod">
-        <pc:chgData name="Zhao Jin" userId="cd05a825-544c-438a-9ba1-08e63db50b47" providerId="ADAL" clId="{28AEA613-C2D1-4884-898F-364599B60A84}" dt="2021-03-08T05:33:30.840" v="4522" actId="313"/>
-        <pc:sldMkLst>
-          <pc:docMk/>
-          <pc:sldMk cId="3462301147" sldId="640"/>
-        </pc:sldMkLst>
-      </pc:sldChg>
-      <pc:sldChg chg="addSp delSp modSp add mod modAnim">
-        <pc:chgData name="Zhao Jin" userId="cd05a825-544c-438a-9ba1-08e63db50b47" providerId="ADAL" clId="{28AEA613-C2D1-4884-898F-364599B60A84}" dt="2021-03-08T05:35:17.057" v="4597" actId="1076"/>
-        <pc:sldMkLst>
-          <pc:docMk/>
-          <pc:sldMk cId="723901272" sldId="641"/>
-        </pc:sldMkLst>
-      </pc:sldChg>
-      <pc:sldChg chg="addSp delSp modSp add mod addAnim delAnim modAnim">
-        <pc:chgData name="Zhao Jin" userId="cd05a825-544c-438a-9ba1-08e63db50b47" providerId="ADAL" clId="{28AEA613-C2D1-4884-898F-364599B60A84}" dt="2021-03-02T10:05:04.981" v="4149" actId="20577"/>
-        <pc:sldMkLst>
-          <pc:docMk/>
-          <pc:sldMk cId="4089006062" sldId="642"/>
-        </pc:sldMkLst>
-      </pc:sldChg>
-      <pc:sldChg chg="addSp delSp modSp add mod modAnim">
-        <pc:chgData name="Zhao Jin" userId="cd05a825-544c-438a-9ba1-08e63db50b47" providerId="ADAL" clId="{28AEA613-C2D1-4884-898F-364599B60A84}" dt="2021-03-02T10:07:54.387" v="4210"/>
-        <pc:sldMkLst>
-          <pc:docMk/>
-          <pc:sldMk cId="1514327557" sldId="643"/>
-        </pc:sldMkLst>
-      </pc:sldChg>
-    </pc:docChg>
-  </pc:docChgLst>
-  <pc:docChgLst>
-    <pc:chgData name="Zhao Jin" userId="cd05a825-544c-438a-9ba1-08e63db50b47" providerId="ADAL" clId="{CD38D953-E846-244A-835A-192CE52710D4}"/>
-    <pc:docChg chg="undo custSel addSld delSld modSld">
-      <pc:chgData name="Zhao Jin" userId="cd05a825-544c-438a-9ba1-08e63db50b47" providerId="ADAL" clId="{CD38D953-E846-244A-835A-192CE52710D4}" dt="2021-01-25T03:26:17.801" v="482" actId="20577"/>
-      <pc:docMkLst>
-        <pc:docMk/>
-      </pc:docMkLst>
-      <pc:sldChg chg="modSp addAnim delAnim modAnim">
-        <pc:chgData name="Zhao Jin" userId="cd05a825-544c-438a-9ba1-08e63db50b47" providerId="ADAL" clId="{CD38D953-E846-244A-835A-192CE52710D4}" dt="2021-01-25T03:18:14.928" v="172"/>
-        <pc:sldMkLst>
-          <pc:docMk/>
-          <pc:sldMk cId="1311126165" sldId="485"/>
-        </pc:sldMkLst>
-      </pc:sldChg>
-      <pc:sldChg chg="modSp">
-        <pc:chgData name="Zhao Jin" userId="cd05a825-544c-438a-9ba1-08e63db50b47" providerId="ADAL" clId="{CD38D953-E846-244A-835A-192CE52710D4}" dt="2021-01-25T03:08:51.440" v="84" actId="20577"/>
-        <pc:sldMkLst>
-          <pc:docMk/>
-          <pc:sldMk cId="901453530" sldId="546"/>
-        </pc:sldMkLst>
-      </pc:sldChg>
-      <pc:sldChg chg="modSp">
-        <pc:chgData name="Zhao Jin" userId="cd05a825-544c-438a-9ba1-08e63db50b47" providerId="ADAL" clId="{CD38D953-E846-244A-835A-192CE52710D4}" dt="2021-01-25T03:11:48.514" v="112" actId="207"/>
-        <pc:sldMkLst>
-          <pc:docMk/>
-          <pc:sldMk cId="884841463" sldId="547"/>
-        </pc:sldMkLst>
-      </pc:sldChg>
-      <pc:sldChg chg="modSp">
-        <pc:chgData name="Zhao Jin" userId="cd05a825-544c-438a-9ba1-08e63db50b47" providerId="ADAL" clId="{CD38D953-E846-244A-835A-192CE52710D4}" dt="2021-01-25T03:10:55.270" v="107" actId="20577"/>
-        <pc:sldMkLst>
-          <pc:docMk/>
-          <pc:sldMk cId="1617257579" sldId="548"/>
-        </pc:sldMkLst>
-      </pc:sldChg>
-      <pc:sldChg chg="addSp delSp modSp delAnim modAnim">
-        <pc:chgData name="Zhao Jin" userId="cd05a825-544c-438a-9ba1-08e63db50b47" providerId="ADAL" clId="{CD38D953-E846-244A-835A-192CE52710D4}" dt="2021-01-25T03:24:05.008" v="382"/>
-        <pc:sldMkLst>
-          <pc:docMk/>
-          <pc:sldMk cId="3394924879" sldId="549"/>
-        </pc:sldMkLst>
-      </pc:sldChg>
-      <pc:sldChg chg="addSp delSp modSp addAnim delAnim modAnim">
-        <pc:chgData name="Zhao Jin" userId="cd05a825-544c-438a-9ba1-08e63db50b47" providerId="ADAL" clId="{CD38D953-E846-244A-835A-192CE52710D4}" dt="2021-01-25T03:26:17.801" v="482" actId="20577"/>
-        <pc:sldMkLst>
-          <pc:docMk/>
-          <pc:sldMk cId="784668950" sldId="550"/>
-        </pc:sldMkLst>
-      </pc:sldChg>
-      <pc:sldChg chg="addSp delSp modSp add del addAnim delAnim">
-        <pc:chgData name="Zhao Jin" userId="cd05a825-544c-438a-9ba1-08e63db50b47" providerId="ADAL" clId="{CD38D953-E846-244A-835A-192CE52710D4}" dt="2021-01-25T03:08:44.385" v="80" actId="2696"/>
-        <pc:sldMkLst>
-          <pc:docMk/>
-          <pc:sldMk cId="335305844" sldId="551"/>
-        </pc:sldMkLst>
-      </pc:sldChg>
-    </pc:docChg>
-  </pc:docChgLst>
-  <pc:docChgLst>
-    <pc:chgData name="dcszjin@nus.edu.sg" userId="cd05a825-544c-438a-9ba1-08e63db50b47" providerId="ADAL" clId="{9951FBC0-0DB4-4E89-AD15-8BA171954228}"/>
-    <pc:docChg chg="custSel modSld modMainMaster">
-      <pc:chgData name="dcszjin@nus.edu.sg" userId="cd05a825-544c-438a-9ba1-08e63db50b47" providerId="ADAL" clId="{9951FBC0-0DB4-4E89-AD15-8BA171954228}" dt="2021-03-01T07:03:49.103" v="65" actId="20577"/>
-      <pc:docMkLst>
-        <pc:docMk/>
-      </pc:docMkLst>
-      <pc:sldChg chg="modSp mod">
-        <pc:chgData name="dcszjin@nus.edu.sg" userId="cd05a825-544c-438a-9ba1-08e63db50b47" providerId="ADAL" clId="{9951FBC0-0DB4-4E89-AD15-8BA171954228}" dt="2021-03-01T07:03:04.415" v="61" actId="20577"/>
-        <pc:sldMkLst>
-          <pc:docMk/>
-          <pc:sldMk cId="0" sldId="256"/>
-        </pc:sldMkLst>
-      </pc:sldChg>
-      <pc:sldChg chg="modSp">
-        <pc:chgData name="dcszjin@nus.edu.sg" userId="cd05a825-544c-438a-9ba1-08e63db50b47" providerId="ADAL" clId="{9951FBC0-0DB4-4E89-AD15-8BA171954228}" dt="2021-03-01T07:03:15.979" v="62"/>
-        <pc:sldMkLst>
-          <pc:docMk/>
-          <pc:sldMk cId="2438607696" sldId="468"/>
-        </pc:sldMkLst>
-      </pc:sldChg>
-      <pc:sldChg chg="modSp">
-        <pc:chgData name="dcszjin@nus.edu.sg" userId="cd05a825-544c-438a-9ba1-08e63db50b47" providerId="ADAL" clId="{9951FBC0-0DB4-4E89-AD15-8BA171954228}" dt="2021-03-01T07:03:15.979" v="62"/>
-        <pc:sldMkLst>
-          <pc:docMk/>
-          <pc:sldMk cId="1067695719" sldId="526"/>
-        </pc:sldMkLst>
-      </pc:sldChg>
-      <pc:sldChg chg="delSp modSp mod">
-        <pc:chgData name="dcszjin@nus.edu.sg" userId="cd05a825-544c-438a-9ba1-08e63db50b47" providerId="ADAL" clId="{9951FBC0-0DB4-4E89-AD15-8BA171954228}" dt="2021-03-01T07:03:18.318" v="63" actId="478"/>
-        <pc:sldMkLst>
-          <pc:docMk/>
-          <pc:sldMk cId="2573090601" sldId="546"/>
-        </pc:sldMkLst>
-      </pc:sldChg>
-      <pc:sldChg chg="modSp">
-        <pc:chgData name="dcszjin@nus.edu.sg" userId="cd05a825-544c-438a-9ba1-08e63db50b47" providerId="ADAL" clId="{9951FBC0-0DB4-4E89-AD15-8BA171954228}" dt="2021-03-01T07:03:15.979" v="62"/>
-        <pc:sldMkLst>
-          <pc:docMk/>
-          <pc:sldMk cId="1427618944" sldId="553"/>
-        </pc:sldMkLst>
-      </pc:sldChg>
-      <pc:sldChg chg="modSp">
-        <pc:chgData name="dcszjin@nus.edu.sg" userId="cd05a825-544c-438a-9ba1-08e63db50b47" providerId="ADAL" clId="{9951FBC0-0DB4-4E89-AD15-8BA171954228}" dt="2021-03-01T07:03:15.979" v="62"/>
-        <pc:sldMkLst>
-          <pc:docMk/>
-          <pc:sldMk cId="1094276337" sldId="601"/>
-        </pc:sldMkLst>
-      </pc:sldChg>
-      <pc:sldChg chg="modSp mod">
-        <pc:chgData name="dcszjin@nus.edu.sg" userId="cd05a825-544c-438a-9ba1-08e63db50b47" providerId="ADAL" clId="{9951FBC0-0DB4-4E89-AD15-8BA171954228}" dt="2021-03-01T07:03:49.103" v="65" actId="20577"/>
-        <pc:sldMkLst>
-          <pc:docMk/>
-          <pc:sldMk cId="1542002799" sldId="602"/>
-        </pc:sldMkLst>
-      </pc:sldChg>
-      <pc:sldChg chg="modSp">
-        <pc:chgData name="dcszjin@nus.edu.sg" userId="cd05a825-544c-438a-9ba1-08e63db50b47" providerId="ADAL" clId="{9951FBC0-0DB4-4E89-AD15-8BA171954228}" dt="2021-03-01T07:03:15.979" v="62"/>
-        <pc:sldMkLst>
-          <pc:docMk/>
-          <pc:sldMk cId="830535321" sldId="603"/>
-        </pc:sldMkLst>
-      </pc:sldChg>
-      <pc:sldMasterChg chg="modSp modSldLayout">
-        <pc:chgData name="dcszjin@nus.edu.sg" userId="cd05a825-544c-438a-9ba1-08e63db50b47" providerId="ADAL" clId="{9951FBC0-0DB4-4E89-AD15-8BA171954228}" dt="2021-03-01T07:03:15.979" v="62"/>
-        <pc:sldMasterMkLst>
-          <pc:docMk/>
-          <pc:sldMasterMk cId="0" sldId="2147485087"/>
-        </pc:sldMasterMkLst>
-        <pc:sldLayoutChg chg="modSp">
-          <pc:chgData name="dcszjin@nus.edu.sg" userId="cd05a825-544c-438a-9ba1-08e63db50b47" providerId="ADAL" clId="{9951FBC0-0DB4-4E89-AD15-8BA171954228}" dt="2021-03-01T07:03:15.979" v="62"/>
-          <pc:sldLayoutMkLst>
-            <pc:docMk/>
-            <pc:sldMasterMk cId="0" sldId="2147485087"/>
-            <pc:sldLayoutMk cId="0" sldId="2147485088"/>
-          </pc:sldLayoutMkLst>
-        </pc:sldLayoutChg>
-        <pc:sldLayoutChg chg="modSp">
-          <pc:chgData name="dcszjin@nus.edu.sg" userId="cd05a825-544c-438a-9ba1-08e63db50b47" providerId="ADAL" clId="{9951FBC0-0DB4-4E89-AD15-8BA171954228}" dt="2021-03-01T07:03:15.979" v="62"/>
-          <pc:sldLayoutMkLst>
-            <pc:docMk/>
-            <pc:sldMasterMk cId="0" sldId="2147485087"/>
-            <pc:sldLayoutMk cId="0" sldId="2147485089"/>
-          </pc:sldLayoutMkLst>
-        </pc:sldLayoutChg>
-        <pc:sldLayoutChg chg="modSp">
-          <pc:chgData name="dcszjin@nus.edu.sg" userId="cd05a825-544c-438a-9ba1-08e63db50b47" providerId="ADAL" clId="{9951FBC0-0DB4-4E89-AD15-8BA171954228}" dt="2021-03-01T07:03:15.979" v="62"/>
-          <pc:sldLayoutMkLst>
-            <pc:docMk/>
-            <pc:sldMasterMk cId="0" sldId="2147485087"/>
-            <pc:sldLayoutMk cId="0" sldId="2147485090"/>
-          </pc:sldLayoutMkLst>
-        </pc:sldLayoutChg>
-        <pc:sldLayoutChg chg="modSp">
-          <pc:chgData name="dcszjin@nus.edu.sg" userId="cd05a825-544c-438a-9ba1-08e63db50b47" providerId="ADAL" clId="{9951FBC0-0DB4-4E89-AD15-8BA171954228}" dt="2021-03-01T07:03:15.979" v="62"/>
-          <pc:sldLayoutMkLst>
-            <pc:docMk/>
-            <pc:sldMasterMk cId="0" sldId="2147485087"/>
-            <pc:sldLayoutMk cId="0" sldId="2147485091"/>
-          </pc:sldLayoutMkLst>
-        </pc:sldLayoutChg>
-        <pc:sldLayoutChg chg="modSp">
-          <pc:chgData name="dcszjin@nus.edu.sg" userId="cd05a825-544c-438a-9ba1-08e63db50b47" providerId="ADAL" clId="{9951FBC0-0DB4-4E89-AD15-8BA171954228}" dt="2021-03-01T07:03:15.979" v="62"/>
-          <pc:sldLayoutMkLst>
-            <pc:docMk/>
-            <pc:sldMasterMk cId="0" sldId="2147485087"/>
-            <pc:sldLayoutMk cId="0" sldId="2147485092"/>
-          </pc:sldLayoutMkLst>
-        </pc:sldLayoutChg>
-        <pc:sldLayoutChg chg="modSp">
-          <pc:chgData name="dcszjin@nus.edu.sg" userId="cd05a825-544c-438a-9ba1-08e63db50b47" providerId="ADAL" clId="{9951FBC0-0DB4-4E89-AD15-8BA171954228}" dt="2021-03-01T07:03:15.979" v="62"/>
-          <pc:sldLayoutMkLst>
-            <pc:docMk/>
-            <pc:sldMasterMk cId="0" sldId="2147485087"/>
-            <pc:sldLayoutMk cId="0" sldId="2147485093"/>
-          </pc:sldLayoutMkLst>
-        </pc:sldLayoutChg>
-        <pc:sldLayoutChg chg="modSp">
-          <pc:chgData name="dcszjin@nus.edu.sg" userId="cd05a825-544c-438a-9ba1-08e63db50b47" providerId="ADAL" clId="{9951FBC0-0DB4-4E89-AD15-8BA171954228}" dt="2021-03-01T07:03:15.979" v="62"/>
-          <pc:sldLayoutMkLst>
-            <pc:docMk/>
-            <pc:sldMasterMk cId="0" sldId="2147485087"/>
-            <pc:sldLayoutMk cId="0" sldId="2147485094"/>
-          </pc:sldLayoutMkLst>
-        </pc:sldLayoutChg>
-        <pc:sldLayoutChg chg="modSp">
-          <pc:chgData name="dcszjin@nus.edu.sg" userId="cd05a825-544c-438a-9ba1-08e63db50b47" providerId="ADAL" clId="{9951FBC0-0DB4-4E89-AD15-8BA171954228}" dt="2021-03-01T07:03:15.979" v="62"/>
-          <pc:sldLayoutMkLst>
-            <pc:docMk/>
-            <pc:sldMasterMk cId="0" sldId="2147485087"/>
-            <pc:sldLayoutMk cId="0" sldId="2147485095"/>
-          </pc:sldLayoutMkLst>
-        </pc:sldLayoutChg>
-        <pc:sldLayoutChg chg="modSp">
-          <pc:chgData name="dcszjin@nus.edu.sg" userId="cd05a825-544c-438a-9ba1-08e63db50b47" providerId="ADAL" clId="{9951FBC0-0DB4-4E89-AD15-8BA171954228}" dt="2021-03-01T07:03:15.979" v="62"/>
-          <pc:sldLayoutMkLst>
-            <pc:docMk/>
-            <pc:sldMasterMk cId="0" sldId="2147485087"/>
-            <pc:sldLayoutMk cId="0" sldId="2147485096"/>
-          </pc:sldLayoutMkLst>
-        </pc:sldLayoutChg>
-        <pc:sldLayoutChg chg="modSp">
-          <pc:chgData name="dcszjin@nus.edu.sg" userId="cd05a825-544c-438a-9ba1-08e63db50b47" providerId="ADAL" clId="{9951FBC0-0DB4-4E89-AD15-8BA171954228}" dt="2021-03-01T07:03:15.979" v="62"/>
-          <pc:sldLayoutMkLst>
-            <pc:docMk/>
-            <pc:sldMasterMk cId="0" sldId="2147485087"/>
-            <pc:sldLayoutMk cId="0" sldId="2147485097"/>
-          </pc:sldLayoutMkLst>
-        </pc:sldLayoutChg>
-        <pc:sldLayoutChg chg="modSp">
-          <pc:chgData name="dcszjin@nus.edu.sg" userId="cd05a825-544c-438a-9ba1-08e63db50b47" providerId="ADAL" clId="{9951FBC0-0DB4-4E89-AD15-8BA171954228}" dt="2021-03-01T07:03:15.979" v="62"/>
-          <pc:sldLayoutMkLst>
-            <pc:docMk/>
-            <pc:sldMasterMk cId="0" sldId="2147485087"/>
-            <pc:sldLayoutMk cId="0" sldId="2147485098"/>
-          </pc:sldLayoutMkLst>
-        </pc:sldLayoutChg>
-      </pc:sldMasterChg>
-    </pc:docChg>
-  </pc:docChgLst>
-  <pc:docChgLst>
-    <pc:chgData name="Zhao Jin" userId="cd05a825-544c-438a-9ba1-08e63db50b47" providerId="ADAL" clId="{DB6E2C17-2DA2-4EB7-9C82-77E34FD3BBEF}"/>
-    <pc:docChg chg="modSld">
-      <pc:chgData name="Zhao Jin" userId="cd05a825-544c-438a-9ba1-08e63db50b47" providerId="ADAL" clId="{DB6E2C17-2DA2-4EB7-9C82-77E34FD3BBEF}" dt="2024-04-09T01:35:18.359" v="127" actId="692"/>
-      <pc:docMkLst>
-        <pc:docMk/>
-      </pc:docMkLst>
-      <pc:sldChg chg="modSp mod">
-        <pc:chgData name="Zhao Jin" userId="cd05a825-544c-438a-9ba1-08e63db50b47" providerId="ADAL" clId="{DB6E2C17-2DA2-4EB7-9C82-77E34FD3BBEF}" dt="2024-04-09T01:33:22.194" v="117" actId="20577"/>
-        <pc:sldMkLst>
-          <pc:docMk/>
-          <pc:sldMk cId="0" sldId="256"/>
-        </pc:sldMkLst>
-      </pc:sldChg>
-      <pc:sldChg chg="modSp mod">
-        <pc:chgData name="Zhao Jin" userId="cd05a825-544c-438a-9ba1-08e63db50b47" providerId="ADAL" clId="{DB6E2C17-2DA2-4EB7-9C82-77E34FD3BBEF}" dt="2024-04-09T01:33:33.843" v="119"/>
-        <pc:sldMkLst>
-          <pc:docMk/>
-          <pc:sldMk cId="2438607696" sldId="468"/>
-        </pc:sldMkLst>
-      </pc:sldChg>
-      <pc:sldChg chg="modSp">
-        <pc:chgData name="Zhao Jin" userId="cd05a825-544c-438a-9ba1-08e63db50b47" providerId="ADAL" clId="{DB6E2C17-2DA2-4EB7-9C82-77E34FD3BBEF}" dt="2024-04-09T01:33:33.843" v="119"/>
-        <pc:sldMkLst>
-          <pc:docMk/>
-          <pc:sldMk cId="2573090601" sldId="546"/>
-        </pc:sldMkLst>
-      </pc:sldChg>
-      <pc:sldChg chg="modSp">
-        <pc:chgData name="Zhao Jin" userId="cd05a825-544c-438a-9ba1-08e63db50b47" providerId="ADAL" clId="{DB6E2C17-2DA2-4EB7-9C82-77E34FD3BBEF}" dt="2024-04-09T01:33:33.843" v="119"/>
-        <pc:sldMkLst>
-          <pc:docMk/>
-          <pc:sldMk cId="2047881934" sldId="582"/>
-        </pc:sldMkLst>
-      </pc:sldChg>
-      <pc:sldChg chg="modSp">
-        <pc:chgData name="Zhao Jin" userId="cd05a825-544c-438a-9ba1-08e63db50b47" providerId="ADAL" clId="{DB6E2C17-2DA2-4EB7-9C82-77E34FD3BBEF}" dt="2024-04-09T01:33:33.843" v="119"/>
-        <pc:sldMkLst>
-          <pc:docMk/>
-          <pc:sldMk cId="635849530" sldId="644"/>
-        </pc:sldMkLst>
-      </pc:sldChg>
-      <pc:sldChg chg="modSp mod">
-        <pc:chgData name="Zhao Jin" userId="cd05a825-544c-438a-9ba1-08e63db50b47" providerId="ADAL" clId="{DB6E2C17-2DA2-4EB7-9C82-77E34FD3BBEF}" dt="2024-04-09T01:33:33.843" v="119"/>
+      <pc:sldChg chg="addSp modSp mod modAnim">
+        <pc:chgData name="Zhao Jin" userId="cd05a825-544c-438a-9ba1-08e63db50b47" providerId="ADAL" clId="{5DF3A229-1965-414E-AF54-F4C37AC7DF68}" dt="2026-04-07T03:57:55.930" v="411"/>
         <pc:sldMkLst>
           <pc:docMk/>
           <pc:sldMk cId="1716205057" sldId="645"/>
         </pc:sldMkLst>
+        <pc:spChg chg="add mod">
+          <ac:chgData name="Zhao Jin" userId="cd05a825-544c-438a-9ba1-08e63db50b47" providerId="ADAL" clId="{5DF3A229-1965-414E-AF54-F4C37AC7DF68}" dt="2026-04-06T07:07:10.224" v="3" actId="1076"/>
+          <ac:spMkLst>
+            <pc:docMk/>
+            <pc:sldMk cId="1716205057" sldId="645"/>
+            <ac:spMk id="3" creationId="{DEFAE54C-FDA9-2BD9-5772-6CD3F50FD409}"/>
+          </ac:spMkLst>
+        </pc:spChg>
+        <pc:spChg chg="mod">
+          <ac:chgData name="Zhao Jin" userId="cd05a825-544c-438a-9ba1-08e63db50b47" providerId="ADAL" clId="{5DF3A229-1965-414E-AF54-F4C37AC7DF68}" dt="2026-04-06T07:10:10.582" v="312" actId="6549"/>
+          <ac:spMkLst>
+            <pc:docMk/>
+            <pc:sldMk cId="1716205057" sldId="645"/>
+            <ac:spMk id="18" creationId="{00000000-0000-0000-0000-000000000000}"/>
+          </ac:spMkLst>
+        </pc:spChg>
+        <pc:spChg chg="mod">
+          <ac:chgData name="Zhao Jin" userId="cd05a825-544c-438a-9ba1-08e63db50b47" providerId="ADAL" clId="{5DF3A229-1965-414E-AF54-F4C37AC7DF68}" dt="2026-04-06T07:07:07.251" v="2" actId="1076"/>
+          <ac:spMkLst>
+            <pc:docMk/>
+            <pc:sldMk cId="1716205057" sldId="645"/>
+            <ac:spMk id="19" creationId="{00000000-0000-0000-0000-000000000000}"/>
+          </ac:spMkLst>
+        </pc:spChg>
+        <pc:spChg chg="mod">
+          <ac:chgData name="Zhao Jin" userId="cd05a825-544c-438a-9ba1-08e63db50b47" providerId="ADAL" clId="{5DF3A229-1965-414E-AF54-F4C37AC7DF68}" dt="2026-04-06T07:10:03.791" v="308" actId="20577"/>
+          <ac:spMkLst>
+            <pc:docMk/>
+            <pc:sldMk cId="1716205057" sldId="645"/>
+            <ac:spMk id="14338" creationId="{00000000-0000-0000-0000-000000000000}"/>
+          </ac:spMkLst>
+        </pc:spChg>
       </pc:sldChg>
-      <pc:sldChg chg="modSp">
-        <pc:chgData name="Zhao Jin" userId="cd05a825-544c-438a-9ba1-08e63db50b47" providerId="ADAL" clId="{DB6E2C17-2DA2-4EB7-9C82-77E34FD3BBEF}" dt="2024-04-09T01:33:33.843" v="119"/>
+      <pc:sldChg chg="addSp delSp modSp mod">
+        <pc:chgData name="Zhao Jin" userId="cd05a825-544c-438a-9ba1-08e63db50b47" providerId="ADAL" clId="{5DF3A229-1965-414E-AF54-F4C37AC7DF68}" dt="2026-04-06T07:10:37.062" v="337" actId="14100"/>
         <pc:sldMkLst>
           <pc:docMk/>
           <pc:sldMk cId="1832708629" sldId="646"/>
         </pc:sldMkLst>
+        <pc:spChg chg="add del">
+          <ac:chgData name="Zhao Jin" userId="cd05a825-544c-438a-9ba1-08e63db50b47" providerId="ADAL" clId="{5DF3A229-1965-414E-AF54-F4C37AC7DF68}" dt="2026-04-06T07:09:20.561" v="239" actId="22"/>
+          <ac:spMkLst>
+            <pc:docMk/>
+            <pc:sldMk cId="1832708629" sldId="646"/>
+            <ac:spMk id="4" creationId="{656327AD-57FA-9216-E441-24F33515EC4C}"/>
+          </ac:spMkLst>
+        </pc:spChg>
+        <pc:spChg chg="add mod">
+          <ac:chgData name="Zhao Jin" userId="cd05a825-544c-438a-9ba1-08e63db50b47" providerId="ADAL" clId="{5DF3A229-1965-414E-AF54-F4C37AC7DF68}" dt="2026-04-06T07:10:37.062" v="337" actId="14100"/>
+          <ac:spMkLst>
+            <pc:docMk/>
+            <pc:sldMk cId="1832708629" sldId="646"/>
+            <ac:spMk id="5" creationId="{CF63EDAB-F53D-A2B2-C39C-D2D189321E3A}"/>
+          </ac:spMkLst>
+        </pc:spChg>
+        <pc:spChg chg="add mod">
+          <ac:chgData name="Zhao Jin" userId="cd05a825-544c-438a-9ba1-08e63db50b47" providerId="ADAL" clId="{5DF3A229-1965-414E-AF54-F4C37AC7DF68}" dt="2026-04-06T07:09:36.325" v="245"/>
+          <ac:spMkLst>
+            <pc:docMk/>
+            <pc:sldMk cId="1832708629" sldId="646"/>
+            <ac:spMk id="6" creationId="{81A8EB5E-C919-ACBE-4695-FE222FACC519}"/>
+          </ac:spMkLst>
+        </pc:spChg>
+        <pc:spChg chg="mod">
+          <ac:chgData name="Zhao Jin" userId="cd05a825-544c-438a-9ba1-08e63db50b47" providerId="ADAL" clId="{5DF3A229-1965-414E-AF54-F4C37AC7DF68}" dt="2026-04-06T07:09:26.911" v="241" actId="20577"/>
+          <ac:spMkLst>
+            <pc:docMk/>
+            <pc:sldMk cId="1832708629" sldId="646"/>
+            <ac:spMk id="11" creationId="{00000000-0000-0000-0000-000000000000}"/>
+          </ac:spMkLst>
+        </pc:spChg>
+        <pc:spChg chg="del mod">
+          <ac:chgData name="Zhao Jin" userId="cd05a825-544c-438a-9ba1-08e63db50b47" providerId="ADAL" clId="{5DF3A229-1965-414E-AF54-F4C37AC7DF68}" dt="2026-04-06T07:07:23.848" v="43" actId="478"/>
+          <ac:spMkLst>
+            <pc:docMk/>
+            <pc:sldMk cId="1832708629" sldId="646"/>
+            <ac:spMk id="13" creationId="{00000000-0000-0000-0000-000000000000}"/>
+          </ac:spMkLst>
+        </pc:spChg>
+        <pc:spChg chg="mod">
+          <ac:chgData name="Zhao Jin" userId="cd05a825-544c-438a-9ba1-08e63db50b47" providerId="ADAL" clId="{5DF3A229-1965-414E-AF54-F4C37AC7DF68}" dt="2026-04-06T07:09:32.248" v="243" actId="1076"/>
+          <ac:spMkLst>
+            <pc:docMk/>
+            <pc:sldMk cId="1832708629" sldId="646"/>
+            <ac:spMk id="14" creationId="{8C3CC3B0-3002-463B-8DF4-93843E69377B}"/>
+          </ac:spMkLst>
+        </pc:spChg>
+        <pc:spChg chg="del">
+          <ac:chgData name="Zhao Jin" userId="cd05a825-544c-438a-9ba1-08e63db50b47" providerId="ADAL" clId="{5DF3A229-1965-414E-AF54-F4C37AC7DF68}" dt="2026-04-06T07:07:14.837" v="4" actId="478"/>
+          <ac:spMkLst>
+            <pc:docMk/>
+            <pc:sldMk cId="1832708629" sldId="646"/>
+            <ac:spMk id="17" creationId="{00000000-0000-0000-0000-000000000000}"/>
+          </ac:spMkLst>
+        </pc:spChg>
+        <pc:spChg chg="del">
+          <ac:chgData name="Zhao Jin" userId="cd05a825-544c-438a-9ba1-08e63db50b47" providerId="ADAL" clId="{5DF3A229-1965-414E-AF54-F4C37AC7DF68}" dt="2026-04-06T07:07:14.837" v="4" actId="478"/>
+          <ac:spMkLst>
+            <pc:docMk/>
+            <pc:sldMk cId="1832708629" sldId="646"/>
+            <ac:spMk id="20" creationId="{00000000-0000-0000-0000-000000000000}"/>
+          </ac:spMkLst>
+        </pc:spChg>
       </pc:sldChg>
-      <pc:sldChg chg="modSp">
-        <pc:chgData name="Zhao Jin" userId="cd05a825-544c-438a-9ba1-08e63db50b47" providerId="ADAL" clId="{DB6E2C17-2DA2-4EB7-9C82-77E34FD3BBEF}" dt="2024-04-09T01:33:33.843" v="119"/>
+      <pc:sldChg chg="addAnim delAnim modAnim">
+        <pc:chgData name="Zhao Jin" userId="cd05a825-544c-438a-9ba1-08e63db50b47" providerId="ADAL" clId="{5DF3A229-1965-414E-AF54-F4C37AC7DF68}" dt="2026-04-06T07:11:40.405" v="341"/>
         <pc:sldMkLst>
           <pc:docMk/>
           <pc:sldMk cId="2677643591" sldId="647"/>
         </pc:sldMkLst>
       </pc:sldChg>
-      <pc:sldChg chg="addSp modSp mod">
-        <pc:chgData name="Zhao Jin" userId="cd05a825-544c-438a-9ba1-08e63db50b47" providerId="ADAL" clId="{DB6E2C17-2DA2-4EB7-9C82-77E34FD3BBEF}" dt="2024-04-09T01:35:18.359" v="127" actId="692"/>
+      <pc:sldChg chg="addAnim delAnim modAnim">
+        <pc:chgData name="Zhao Jin" userId="cd05a825-544c-438a-9ba1-08e63db50b47" providerId="ADAL" clId="{5DF3A229-1965-414E-AF54-F4C37AC7DF68}" dt="2026-04-06T07:14:09.634" v="363"/>
         <pc:sldMkLst>
           <pc:docMk/>
           <pc:sldMk cId="2524073575" sldId="648"/>
         </pc:sldMkLst>
       </pc:sldChg>
-      <pc:sldChg chg="modSp">
-        <pc:chgData name="Zhao Jin" userId="cd05a825-544c-438a-9ba1-08e63db50b47" providerId="ADAL" clId="{DB6E2C17-2DA2-4EB7-9C82-77E34FD3BBEF}" dt="2024-04-09T01:33:33.843" v="119"/>
-        <pc:sldMkLst>
-          <pc:docMk/>
-          <pc:sldMk cId="846190340" sldId="649"/>
-        </pc:sldMkLst>
-      </pc:sldChg>
-      <pc:sldChg chg="modSp">
-        <pc:chgData name="Zhao Jin" userId="cd05a825-544c-438a-9ba1-08e63db50b47" providerId="ADAL" clId="{DB6E2C17-2DA2-4EB7-9C82-77E34FD3BBEF}" dt="2024-04-09T01:33:33.843" v="119"/>
+      <pc:sldChg chg="addSp delSp modSp mod modAnim">
+        <pc:chgData name="Zhao Jin" userId="cd05a825-544c-438a-9ba1-08e63db50b47" providerId="ADAL" clId="{5DF3A229-1965-414E-AF54-F4C37AC7DF68}" dt="2026-04-06T07:27:12.931" v="409"/>
         <pc:sldMkLst>
           <pc:docMk/>
           <pc:sldMk cId="997017972" sldId="650"/>
         </pc:sldMkLst>
-      </pc:sldChg>
-    </pc:docChg>
-  </pc:docChgLst>
-  <pc:docChgLst>
-    <pc:chgData name="Zhao Jin" userId="cd05a825-544c-438a-9ba1-08e63db50b47" providerId="ADAL" clId="{D53322D6-2819-4222-8003-AC9A10AD4F27}"/>
-    <pc:docChg chg="modSld">
-      <pc:chgData name="Zhao Jin" userId="cd05a825-544c-438a-9ba1-08e63db50b47" providerId="ADAL" clId="{D53322D6-2819-4222-8003-AC9A10AD4F27}" dt="2024-01-31T05:42:59.813" v="0"/>
-      <pc:docMkLst>
-        <pc:docMk/>
-      </pc:docMkLst>
-      <pc:sldChg chg="addSp modSp">
-        <pc:chgData name="Zhao Jin" userId="cd05a825-544c-438a-9ba1-08e63db50b47" providerId="ADAL" clId="{D53322D6-2819-4222-8003-AC9A10AD4F27}" dt="2024-01-31T05:42:59.813" v="0"/>
-        <pc:sldMkLst>
-          <pc:docMk/>
-          <pc:sldMk cId="0" sldId="256"/>
-        </pc:sldMkLst>
-      </pc:sldChg>
-    </pc:docChg>
-  </pc:docChgLst>
-  <pc:docChgLst>
-    <pc:chgData name="Zhao Jin" userId="cd05a825-544c-438a-9ba1-08e63db50b47" providerId="ADAL" clId="{B1F7CFED-A664-443A-A173-5DFC1A50598C}"/>
-    <pc:docChg chg="undo custSel addSld delSld modSld sldOrd">
-      <pc:chgData name="Zhao Jin" userId="cd05a825-544c-438a-9ba1-08e63db50b47" providerId="ADAL" clId="{B1F7CFED-A664-443A-A173-5DFC1A50598C}" dt="2021-01-27T11:27:42.250" v="3304" actId="20577"/>
-      <pc:docMkLst>
-        <pc:docMk/>
-      </pc:docMkLst>
-      <pc:sldChg chg="modSp mod">
-        <pc:chgData name="Zhao Jin" userId="cd05a825-544c-438a-9ba1-08e63db50b47" providerId="ADAL" clId="{B1F7CFED-A664-443A-A173-5DFC1A50598C}" dt="2021-01-27T08:47:23.481" v="3299" actId="20577"/>
-        <pc:sldMkLst>
-          <pc:docMk/>
-          <pc:sldMk cId="2438607696" sldId="468"/>
-        </pc:sldMkLst>
-      </pc:sldChg>
-      <pc:sldChg chg="del">
-        <pc:chgData name="Zhao Jin" userId="cd05a825-544c-438a-9ba1-08e63db50b47" providerId="ADAL" clId="{B1F7CFED-A664-443A-A173-5DFC1A50598C}" dt="2021-01-27T07:50:44.942" v="2858" actId="47"/>
-        <pc:sldMkLst>
-          <pc:docMk/>
-          <pc:sldMk cId="1311126165" sldId="485"/>
-        </pc:sldMkLst>
-      </pc:sldChg>
-      <pc:sldChg chg="delSp modSp mod">
-        <pc:chgData name="Zhao Jin" userId="cd05a825-544c-438a-9ba1-08e63db50b47" providerId="ADAL" clId="{B1F7CFED-A664-443A-A173-5DFC1A50598C}" dt="2021-01-27T08:43:28.344" v="3236"/>
-        <pc:sldMkLst>
-          <pc:docMk/>
-          <pc:sldMk cId="3792232794" sldId="504"/>
-        </pc:sldMkLst>
-      </pc:sldChg>
-      <pc:sldChg chg="del">
-        <pc:chgData name="Zhao Jin" userId="cd05a825-544c-438a-9ba1-08e63db50b47" providerId="ADAL" clId="{B1F7CFED-A664-443A-A173-5DFC1A50598C}" dt="2021-01-27T07:50:44.942" v="2858" actId="47"/>
-        <pc:sldMkLst>
-          <pc:docMk/>
-          <pc:sldMk cId="681224785" sldId="531"/>
-        </pc:sldMkLst>
-      </pc:sldChg>
-      <pc:sldChg chg="addSp delSp modSp add del mod modAnim">
-        <pc:chgData name="Zhao Jin" userId="cd05a825-544c-438a-9ba1-08e63db50b47" providerId="ADAL" clId="{B1F7CFED-A664-443A-A173-5DFC1A50598C}" dt="2021-01-27T07:44:47.950" v="2625" actId="2696"/>
-        <pc:sldMkLst>
-          <pc:docMk/>
-          <pc:sldMk cId="375427509" sldId="545"/>
-        </pc:sldMkLst>
-      </pc:sldChg>
-      <pc:sldChg chg="addSp delSp modSp add del mod delAnim modAnim">
-        <pc:chgData name="Zhao Jin" userId="cd05a825-544c-438a-9ba1-08e63db50b47" providerId="ADAL" clId="{B1F7CFED-A664-443A-A173-5DFC1A50598C}" dt="2021-01-27T07:38:37.769" v="2178" actId="2696"/>
-        <pc:sldMkLst>
-          <pc:docMk/>
-          <pc:sldMk cId="1899776498" sldId="545"/>
-        </pc:sldMkLst>
-      </pc:sldChg>
-      <pc:sldChg chg="addSp delSp modSp add del mod delAnim modAnim">
-        <pc:chgData name="Zhao Jin" userId="cd05a825-544c-438a-9ba1-08e63db50b47" providerId="ADAL" clId="{B1F7CFED-A664-443A-A173-5DFC1A50598C}" dt="2021-01-27T08:38:52.330" v="2929" actId="2696"/>
-        <pc:sldMkLst>
-          <pc:docMk/>
-          <pc:sldMk cId="3702084380" sldId="545"/>
-        </pc:sldMkLst>
-      </pc:sldChg>
-      <pc:sldChg chg="modSp add mod">
-        <pc:chgData name="Zhao Jin" userId="cd05a825-544c-438a-9ba1-08e63db50b47" providerId="ADAL" clId="{B1F7CFED-A664-443A-A173-5DFC1A50598C}" dt="2021-01-27T11:27:42.250" v="3304" actId="20577"/>
-        <pc:sldMkLst>
-          <pc:docMk/>
-          <pc:sldMk cId="4228901100" sldId="545"/>
-        </pc:sldMkLst>
-      </pc:sldChg>
-      <pc:sldChg chg="delSp modSp mod">
-        <pc:chgData name="Zhao Jin" userId="cd05a825-544c-438a-9ba1-08e63db50b47" providerId="ADAL" clId="{B1F7CFED-A664-443A-A173-5DFC1A50598C}" dt="2021-01-27T08:43:28.344" v="3236"/>
-        <pc:sldMkLst>
-          <pc:docMk/>
-          <pc:sldMk cId="4225956616" sldId="546"/>
-        </pc:sldMkLst>
-      </pc:sldChg>
-      <pc:sldChg chg="addSp delSp modSp mod">
-        <pc:chgData name="Zhao Jin" userId="cd05a825-544c-438a-9ba1-08e63db50b47" providerId="ADAL" clId="{B1F7CFED-A664-443A-A173-5DFC1A50598C}" dt="2021-01-27T07:01:43.927" v="726" actId="207"/>
-        <pc:sldMkLst>
-          <pc:docMk/>
-          <pc:sldMk cId="1617257579" sldId="548"/>
-        </pc:sldMkLst>
-      </pc:sldChg>
-      <pc:sldChg chg="del">
-        <pc:chgData name="Zhao Jin" userId="cd05a825-544c-438a-9ba1-08e63db50b47" providerId="ADAL" clId="{B1F7CFED-A664-443A-A173-5DFC1A50598C}" dt="2021-01-27T07:50:44.942" v="2858" actId="47"/>
-        <pc:sldMkLst>
-          <pc:docMk/>
-          <pc:sldMk cId="3394924879" sldId="549"/>
-        </pc:sldMkLst>
-      </pc:sldChg>
-      <pc:sldChg chg="del">
-        <pc:chgData name="Zhao Jin" userId="cd05a825-544c-438a-9ba1-08e63db50b47" providerId="ADAL" clId="{B1F7CFED-A664-443A-A173-5DFC1A50598C}" dt="2021-01-27T07:50:44.942" v="2858" actId="47"/>
-        <pc:sldMkLst>
-          <pc:docMk/>
-          <pc:sldMk cId="784668950" sldId="550"/>
-        </pc:sldMkLst>
-      </pc:sldChg>
-      <pc:sldChg chg="delSp modSp mod">
-        <pc:chgData name="Zhao Jin" userId="cd05a825-544c-438a-9ba1-08e63db50b47" providerId="ADAL" clId="{B1F7CFED-A664-443A-A173-5DFC1A50598C}" dt="2021-01-27T08:43:28.344" v="3236"/>
-        <pc:sldMkLst>
-          <pc:docMk/>
-          <pc:sldMk cId="3422194935" sldId="552"/>
-        </pc:sldMkLst>
-      </pc:sldChg>
-      <pc:sldChg chg="delSp modSp mod">
-        <pc:chgData name="Zhao Jin" userId="cd05a825-544c-438a-9ba1-08e63db50b47" providerId="ADAL" clId="{B1F7CFED-A664-443A-A173-5DFC1A50598C}" dt="2021-01-27T08:43:28.344" v="3236"/>
-        <pc:sldMkLst>
-          <pc:docMk/>
-          <pc:sldMk cId="1427618944" sldId="553"/>
-        </pc:sldMkLst>
-      </pc:sldChg>
-      <pc:sldChg chg="delSp modSp mod">
-        <pc:chgData name="Zhao Jin" userId="cd05a825-544c-438a-9ba1-08e63db50b47" providerId="ADAL" clId="{B1F7CFED-A664-443A-A173-5DFC1A50598C}" dt="2021-01-27T08:43:28.344" v="3236"/>
-        <pc:sldMkLst>
-          <pc:docMk/>
-          <pc:sldMk cId="1659983766" sldId="554"/>
-        </pc:sldMkLst>
-      </pc:sldChg>
-      <pc:sldChg chg="addSp delSp modSp mod">
-        <pc:chgData name="Zhao Jin" userId="cd05a825-544c-438a-9ba1-08e63db50b47" providerId="ADAL" clId="{B1F7CFED-A664-443A-A173-5DFC1A50598C}" dt="2021-01-27T08:43:28.344" v="3236"/>
-        <pc:sldMkLst>
-          <pc:docMk/>
-          <pc:sldMk cId="1268238251" sldId="555"/>
-        </pc:sldMkLst>
-      </pc:sldChg>
-      <pc:sldChg chg="addSp delSp modSp add mod ord">
-        <pc:chgData name="Zhao Jin" userId="cd05a825-544c-438a-9ba1-08e63db50b47" providerId="ADAL" clId="{B1F7CFED-A664-443A-A173-5DFC1A50598C}" dt="2021-01-27T07:08:25.449" v="1116" actId="207"/>
-        <pc:sldMkLst>
-          <pc:docMk/>
-          <pc:sldMk cId="3990513599" sldId="556"/>
-        </pc:sldMkLst>
-      </pc:sldChg>
-      <pc:sldChg chg="modSp add mod">
-        <pc:chgData name="Zhao Jin" userId="cd05a825-544c-438a-9ba1-08e63db50b47" providerId="ADAL" clId="{B1F7CFED-A664-443A-A173-5DFC1A50598C}" dt="2021-01-27T07:10:49.029" v="1165" actId="1038"/>
-        <pc:sldMkLst>
-          <pc:docMk/>
-          <pc:sldMk cId="788021743" sldId="557"/>
-        </pc:sldMkLst>
-      </pc:sldChg>
-      <pc:sldChg chg="addSp delSp modSp add mod">
-        <pc:chgData name="Zhao Jin" userId="cd05a825-544c-438a-9ba1-08e63db50b47" providerId="ADAL" clId="{B1F7CFED-A664-443A-A173-5DFC1A50598C}" dt="2021-01-27T07:22:06.429" v="1447"/>
-        <pc:sldMkLst>
-          <pc:docMk/>
-          <pc:sldMk cId="686532275" sldId="558"/>
-        </pc:sldMkLst>
-      </pc:sldChg>
-      <pc:sldChg chg="delSp modSp add mod">
-        <pc:chgData name="Zhao Jin" userId="cd05a825-544c-438a-9ba1-08e63db50b47" providerId="ADAL" clId="{B1F7CFED-A664-443A-A173-5DFC1A50598C}" dt="2021-01-27T08:43:28.344" v="3236"/>
-        <pc:sldMkLst>
-          <pc:docMk/>
-          <pc:sldMk cId="182578491" sldId="559"/>
-        </pc:sldMkLst>
-      </pc:sldChg>
-      <pc:sldChg chg="add del">
-        <pc:chgData name="Zhao Jin" userId="cd05a825-544c-438a-9ba1-08e63db50b47" providerId="ADAL" clId="{B1F7CFED-A664-443A-A173-5DFC1A50598C}" dt="2021-01-27T07:13:34.600" v="1318" actId="47"/>
-        <pc:sldMkLst>
-          <pc:docMk/>
-          <pc:sldMk cId="730965808" sldId="559"/>
-        </pc:sldMkLst>
-      </pc:sldChg>
-      <pc:sldChg chg="addSp delSp modSp add del mod modAnim">
-        <pc:chgData name="Zhao Jin" userId="cd05a825-544c-438a-9ba1-08e63db50b47" providerId="ADAL" clId="{B1F7CFED-A664-443A-A173-5DFC1A50598C}" dt="2021-01-27T07:44:47.950" v="2625" actId="2696"/>
-        <pc:sldMkLst>
-          <pc:docMk/>
-          <pc:sldMk cId="2685445290" sldId="559"/>
-        </pc:sldMkLst>
-      </pc:sldChg>
-      <pc:sldChg chg="add del">
-        <pc:chgData name="Zhao Jin" userId="cd05a825-544c-438a-9ba1-08e63db50b47" providerId="ADAL" clId="{B1F7CFED-A664-443A-A173-5DFC1A50598C}" dt="2021-01-27T07:11:52.838" v="1191"/>
-        <pc:sldMkLst>
-          <pc:docMk/>
-          <pc:sldMk cId="3573907213" sldId="559"/>
-        </pc:sldMkLst>
-      </pc:sldChg>
-      <pc:sldChg chg="add del">
-        <pc:chgData name="Zhao Jin" userId="cd05a825-544c-438a-9ba1-08e63db50b47" providerId="ADAL" clId="{B1F7CFED-A664-443A-A173-5DFC1A50598C}" dt="2021-01-27T08:38:52.330" v="2929" actId="2696"/>
-        <pc:sldMkLst>
-          <pc:docMk/>
-          <pc:sldMk cId="3681791183" sldId="559"/>
-        </pc:sldMkLst>
-      </pc:sldChg>
-      <pc:sldChg chg="add del">
-        <pc:chgData name="Zhao Jin" userId="cd05a825-544c-438a-9ba1-08e63db50b47" providerId="ADAL" clId="{B1F7CFED-A664-443A-A173-5DFC1A50598C}" dt="2021-01-27T07:44:47.950" v="2625" actId="2696"/>
-        <pc:sldMkLst>
-          <pc:docMk/>
-          <pc:sldMk cId="705142466" sldId="560"/>
-        </pc:sldMkLst>
-      </pc:sldChg>
-      <pc:sldChg chg="delSp modSp add del mod">
-        <pc:chgData name="Zhao Jin" userId="cd05a825-544c-438a-9ba1-08e63db50b47" providerId="ADAL" clId="{B1F7CFED-A664-443A-A173-5DFC1A50598C}" dt="2021-01-27T11:27:21.918" v="3300" actId="47"/>
-        <pc:sldMkLst>
-          <pc:docMk/>
-          <pc:sldMk cId="2633024700" sldId="560"/>
-        </pc:sldMkLst>
-      </pc:sldChg>
-      <pc:sldChg chg="add del">
-        <pc:chgData name="Zhao Jin" userId="cd05a825-544c-438a-9ba1-08e63db50b47" providerId="ADAL" clId="{B1F7CFED-A664-443A-A173-5DFC1A50598C}" dt="2021-01-27T08:38:52.330" v="2929" actId="2696"/>
-        <pc:sldMkLst>
-          <pc:docMk/>
-          <pc:sldMk cId="3566869056" sldId="560"/>
-        </pc:sldMkLst>
-      </pc:sldChg>
-      <pc:sldChg chg="addSp delSp modSp add del mod">
-        <pc:chgData name="Zhao Jin" userId="cd05a825-544c-438a-9ba1-08e63db50b47" providerId="ADAL" clId="{B1F7CFED-A664-443A-A173-5DFC1A50598C}" dt="2021-01-27T07:49:21.777" v="2832" actId="47"/>
-        <pc:sldMkLst>
-          <pc:docMk/>
-          <pc:sldMk cId="3148407277" sldId="561"/>
-        </pc:sldMkLst>
-      </pc:sldChg>
-      <pc:sldChg chg="addSp delSp modSp add del mod">
-        <pc:chgData name="Zhao Jin" userId="cd05a825-544c-438a-9ba1-08e63db50b47" providerId="ADAL" clId="{B1F7CFED-A664-443A-A173-5DFC1A50598C}" dt="2021-01-27T08:38:52.330" v="2929" actId="2696"/>
-        <pc:sldMkLst>
-          <pc:docMk/>
-          <pc:sldMk cId="1212688123" sldId="562"/>
-        </pc:sldMkLst>
-      </pc:sldChg>
-      <pc:sldChg chg="modSp add mod">
-        <pc:chgData name="Zhao Jin" userId="cd05a825-544c-438a-9ba1-08e63db50b47" providerId="ADAL" clId="{B1F7CFED-A664-443A-A173-5DFC1A50598C}" dt="2021-01-27T11:27:39.570" v="3303" actId="20577"/>
-        <pc:sldMkLst>
-          <pc:docMk/>
-          <pc:sldMk cId="2739484572" sldId="562"/>
-        </pc:sldMkLst>
-      </pc:sldChg>
-      <pc:sldChg chg="add del">
-        <pc:chgData name="Zhao Jin" userId="cd05a825-544c-438a-9ba1-08e63db50b47" providerId="ADAL" clId="{B1F7CFED-A664-443A-A173-5DFC1A50598C}" dt="2021-01-27T07:47:00.213" v="2716"/>
-        <pc:sldMkLst>
-          <pc:docMk/>
-          <pc:sldMk cId="3295203065" sldId="562"/>
-        </pc:sldMkLst>
-      </pc:sldChg>
-      <pc:sldChg chg="addSp delSp modSp add del mod delAnim">
-        <pc:chgData name="Zhao Jin" userId="cd05a825-544c-438a-9ba1-08e63db50b47" providerId="ADAL" clId="{B1F7CFED-A664-443A-A173-5DFC1A50598C}" dt="2021-01-27T07:45:01.753" v="2627" actId="47"/>
-        <pc:sldMkLst>
-          <pc:docMk/>
-          <pc:sldMk cId="3302621336" sldId="572"/>
-        </pc:sldMkLst>
-      </pc:sldChg>
-      <pc:sldChg chg="add del">
-        <pc:chgData name="Zhao Jin" userId="cd05a825-544c-438a-9ba1-08e63db50b47" providerId="ADAL" clId="{B1F7CFED-A664-443A-A173-5DFC1A50598C}" dt="2021-01-27T07:28:38.512" v="1708"/>
-        <pc:sldMkLst>
-          <pc:docMk/>
-          <pc:sldMk cId="2030195840" sldId="573"/>
-        </pc:sldMkLst>
-      </pc:sldChg>
-      <pc:sldChg chg="add del">
-        <pc:chgData name="Zhao Jin" userId="cd05a825-544c-438a-9ba1-08e63db50b47" providerId="ADAL" clId="{B1F7CFED-A664-443A-A173-5DFC1A50598C}" dt="2021-01-27T07:23:10.496" v="1527" actId="47"/>
-        <pc:sldMkLst>
-          <pc:docMk/>
-          <pc:sldMk cId="3321788103" sldId="573"/>
-        </pc:sldMkLst>
-      </pc:sldChg>
-    </pc:docChg>
-  </pc:docChgLst>
-  <pc:docChgLst>
-    <pc:chgData name="Zhao Jin" userId="cd05a825-544c-438a-9ba1-08e63db50b47" providerId="ADAL" clId="{A30510A2-62EC-40DC-AB2C-65C341A967ED}"/>
-    <pc:docChg chg="addSld modSld modMainMaster">
-      <pc:chgData name="Zhao Jin" userId="cd05a825-544c-438a-9ba1-08e63db50b47" providerId="ADAL" clId="{A30510A2-62EC-40DC-AB2C-65C341A967ED}" dt="2025-01-07T07:39:25.332" v="1"/>
-      <pc:docMkLst>
-        <pc:docMk/>
-      </pc:docMkLst>
-      <pc:sldChg chg="modSp">
-        <pc:chgData name="Zhao Jin" userId="cd05a825-544c-438a-9ba1-08e63db50b47" providerId="ADAL" clId="{A30510A2-62EC-40DC-AB2C-65C341A967ED}" dt="2025-01-07T07:39:25.332" v="1"/>
-        <pc:sldMkLst>
-          <pc:docMk/>
-          <pc:sldMk cId="0" sldId="256"/>
-        </pc:sldMkLst>
-        <pc:spChg chg="mod">
-          <ac:chgData name="Zhao Jin" userId="cd05a825-544c-438a-9ba1-08e63db50b47" providerId="ADAL" clId="{A30510A2-62EC-40DC-AB2C-65C341A967ED}" dt="2025-01-07T07:39:25.332" v="1"/>
+        <pc:spChg chg="add del mod">
+          <ac:chgData name="Zhao Jin" userId="cd05a825-544c-438a-9ba1-08e63db50b47" providerId="ADAL" clId="{5DF3A229-1965-414E-AF54-F4C37AC7DF68}" dt="2026-04-06T07:17:11.208" v="366" actId="1036"/>
           <ac:spMkLst>
             <pc:docMk/>
-            <pc:sldMk cId="0" sldId="256"/>
-            <ac:spMk id="9" creationId="{00000000-0000-0000-0000-000000000000}"/>
+            <pc:sldMk cId="997017972" sldId="650"/>
+            <ac:spMk id="13" creationId="{50048137-8368-44B5-85DD-193F9405A05C}"/>
           </ac:spMkLst>
         </pc:spChg>
       </pc:sldChg>
-      <pc:sldChg chg="modSp add">
-        <pc:chgData name="Zhao Jin" userId="cd05a825-544c-438a-9ba1-08e63db50b47" providerId="ADAL" clId="{A30510A2-62EC-40DC-AB2C-65C341A967ED}" dt="2025-01-07T07:39:25.332" v="1"/>
-        <pc:sldMkLst>
-          <pc:docMk/>
-          <pc:sldMk cId="1067695719" sldId="526"/>
-        </pc:sldMkLst>
-        <pc:spChg chg="mod">
-          <ac:chgData name="Zhao Jin" userId="cd05a825-544c-438a-9ba1-08e63db50b47" providerId="ADAL" clId="{A30510A2-62EC-40DC-AB2C-65C341A967ED}" dt="2025-01-07T07:39:25.332" v="1"/>
-          <ac:spMkLst>
-            <pc:docMk/>
-            <pc:sldMk cId="1067695719" sldId="526"/>
-            <ac:spMk id="2" creationId="{253EA51F-77C2-4162-50FF-BC396B4AFC07}"/>
-          </ac:spMkLst>
-        </pc:spChg>
-      </pc:sldChg>
-      <pc:sldChg chg="modSp">
-        <pc:chgData name="Zhao Jin" userId="cd05a825-544c-438a-9ba1-08e63db50b47" providerId="ADAL" clId="{A30510A2-62EC-40DC-AB2C-65C341A967ED}" dt="2025-01-07T07:39:25.332" v="1"/>
-        <pc:sldMkLst>
-          <pc:docMk/>
-          <pc:sldMk cId="2573090601" sldId="546"/>
-        </pc:sldMkLst>
-        <pc:spChg chg="mod">
-          <ac:chgData name="Zhao Jin" userId="cd05a825-544c-438a-9ba1-08e63db50b47" providerId="ADAL" clId="{A30510A2-62EC-40DC-AB2C-65C341A967ED}" dt="2025-01-07T07:39:25.332" v="1"/>
-          <ac:spMkLst>
-            <pc:docMk/>
-            <pc:sldMk cId="2573090601" sldId="546"/>
-            <ac:spMk id="2" creationId="{D84F3DBF-5956-33CA-DD1A-1C86A1054CEF}"/>
-          </ac:spMkLst>
-        </pc:spChg>
-      </pc:sldChg>
-      <pc:sldChg chg="modSp add">
-        <pc:chgData name="Zhao Jin" userId="cd05a825-544c-438a-9ba1-08e63db50b47" providerId="ADAL" clId="{A30510A2-62EC-40DC-AB2C-65C341A967ED}" dt="2025-01-07T07:39:25.332" v="1"/>
-        <pc:sldMkLst>
-          <pc:docMk/>
-          <pc:sldMk cId="1565163798" sldId="575"/>
-        </pc:sldMkLst>
-        <pc:spChg chg="mod">
-          <ac:chgData name="Zhao Jin" userId="cd05a825-544c-438a-9ba1-08e63db50b47" providerId="ADAL" clId="{A30510A2-62EC-40DC-AB2C-65C341A967ED}" dt="2025-01-07T07:39:25.332" v="1"/>
-          <ac:spMkLst>
-            <pc:docMk/>
-            <pc:sldMk cId="1565163798" sldId="575"/>
-            <ac:spMk id="2" creationId="{2EAEB2E9-FA6C-2497-26FD-3B29CA04AE65}"/>
-          </ac:spMkLst>
-        </pc:spChg>
-      </pc:sldChg>
-      <pc:sldChg chg="modSp">
-        <pc:chgData name="Zhao Jin" userId="cd05a825-544c-438a-9ba1-08e63db50b47" providerId="ADAL" clId="{A30510A2-62EC-40DC-AB2C-65C341A967ED}" dt="2025-01-07T07:39:25.332" v="1"/>
-        <pc:sldMkLst>
-          <pc:docMk/>
-          <pc:sldMk cId="2047881934" sldId="582"/>
-        </pc:sldMkLst>
-        <pc:spChg chg="mod">
-          <ac:chgData name="Zhao Jin" userId="cd05a825-544c-438a-9ba1-08e63db50b47" providerId="ADAL" clId="{A30510A2-62EC-40DC-AB2C-65C341A967ED}" dt="2025-01-07T07:39:25.332" v="1"/>
-          <ac:spMkLst>
-            <pc:docMk/>
-            <pc:sldMk cId="2047881934" sldId="582"/>
-            <ac:spMk id="2" creationId="{7EF544DA-860D-4803-543C-B6661FA29782}"/>
-          </ac:spMkLst>
-        </pc:spChg>
-      </pc:sldChg>
-      <pc:sldChg chg="modSp add">
-        <pc:chgData name="Zhao Jin" userId="cd05a825-544c-438a-9ba1-08e63db50b47" providerId="ADAL" clId="{A30510A2-62EC-40DC-AB2C-65C341A967ED}" dt="2025-01-07T07:39:25.332" v="1"/>
-        <pc:sldMkLst>
-          <pc:docMk/>
-          <pc:sldMk cId="2550500962" sldId="592"/>
-        </pc:sldMkLst>
-        <pc:spChg chg="mod">
-          <ac:chgData name="Zhao Jin" userId="cd05a825-544c-438a-9ba1-08e63db50b47" providerId="ADAL" clId="{A30510A2-62EC-40DC-AB2C-65C341A967ED}" dt="2025-01-07T07:39:25.332" v="1"/>
-          <ac:spMkLst>
-            <pc:docMk/>
-            <pc:sldMk cId="2550500962" sldId="592"/>
-            <ac:spMk id="2" creationId="{510BC9E4-0487-962E-E2A3-7A2BBE924318}"/>
-          </ac:spMkLst>
-        </pc:spChg>
-      </pc:sldChg>
-      <pc:sldChg chg="modSp add">
-        <pc:chgData name="Zhao Jin" userId="cd05a825-544c-438a-9ba1-08e63db50b47" providerId="ADAL" clId="{A30510A2-62EC-40DC-AB2C-65C341A967ED}" dt="2025-01-07T07:39:25.332" v="1"/>
-        <pc:sldMkLst>
-          <pc:docMk/>
-          <pc:sldMk cId="1813128722" sldId="617"/>
-        </pc:sldMkLst>
-        <pc:spChg chg="mod">
-          <ac:chgData name="Zhao Jin" userId="cd05a825-544c-438a-9ba1-08e63db50b47" providerId="ADAL" clId="{A30510A2-62EC-40DC-AB2C-65C341A967ED}" dt="2025-01-07T07:39:25.332" v="1"/>
-          <ac:spMkLst>
-            <pc:docMk/>
-            <pc:sldMk cId="1813128722" sldId="617"/>
-            <ac:spMk id="2" creationId="{280DB94D-481E-B622-8B43-29F4D579F010}"/>
-          </ac:spMkLst>
-        </pc:spChg>
-      </pc:sldChg>
-      <pc:sldChg chg="modSp add">
-        <pc:chgData name="Zhao Jin" userId="cd05a825-544c-438a-9ba1-08e63db50b47" providerId="ADAL" clId="{A30510A2-62EC-40DC-AB2C-65C341A967ED}" dt="2025-01-07T07:39:25.332" v="1"/>
-        <pc:sldMkLst>
-          <pc:docMk/>
-          <pc:sldMk cId="3454948446" sldId="636"/>
-        </pc:sldMkLst>
-        <pc:spChg chg="mod">
-          <ac:chgData name="Zhao Jin" userId="cd05a825-544c-438a-9ba1-08e63db50b47" providerId="ADAL" clId="{A30510A2-62EC-40DC-AB2C-65C341A967ED}" dt="2025-01-07T07:39:25.332" v="1"/>
-          <ac:spMkLst>
-            <pc:docMk/>
-            <pc:sldMk cId="3454948446" sldId="636"/>
-            <ac:spMk id="2" creationId="{78E39781-5218-FFA6-DBD6-7713D966BD6A}"/>
-          </ac:spMkLst>
-        </pc:spChg>
-      </pc:sldChg>
-      <pc:sldChg chg="modSp">
-        <pc:chgData name="Zhao Jin" userId="cd05a825-544c-438a-9ba1-08e63db50b47" providerId="ADAL" clId="{A30510A2-62EC-40DC-AB2C-65C341A967ED}" dt="2025-01-07T07:39:25.332" v="1"/>
-        <pc:sldMkLst>
-          <pc:docMk/>
-          <pc:sldMk cId="635849530" sldId="644"/>
-        </pc:sldMkLst>
-        <pc:spChg chg="mod">
-          <ac:chgData name="Zhao Jin" userId="cd05a825-544c-438a-9ba1-08e63db50b47" providerId="ADAL" clId="{A30510A2-62EC-40DC-AB2C-65C341A967ED}" dt="2025-01-07T07:39:25.332" v="1"/>
-          <ac:spMkLst>
-            <pc:docMk/>
-            <pc:sldMk cId="635849530" sldId="644"/>
-            <ac:spMk id="2" creationId="{3A0904DA-C7EF-5E00-0D15-380C7182CA85}"/>
-          </ac:spMkLst>
-        </pc:spChg>
-      </pc:sldChg>
-      <pc:sldChg chg="modSp">
-        <pc:chgData name="Zhao Jin" userId="cd05a825-544c-438a-9ba1-08e63db50b47" providerId="ADAL" clId="{A30510A2-62EC-40DC-AB2C-65C341A967ED}" dt="2025-01-07T07:39:25.332" v="1"/>
-        <pc:sldMkLst>
-          <pc:docMk/>
-          <pc:sldMk cId="1716205057" sldId="645"/>
-        </pc:sldMkLst>
-        <pc:spChg chg="mod">
-          <ac:chgData name="Zhao Jin" userId="cd05a825-544c-438a-9ba1-08e63db50b47" providerId="ADAL" clId="{A30510A2-62EC-40DC-AB2C-65C341A967ED}" dt="2025-01-07T07:39:25.332" v="1"/>
-          <ac:spMkLst>
-            <pc:docMk/>
-            <pc:sldMk cId="1716205057" sldId="645"/>
-            <ac:spMk id="2" creationId="{CA1F0DDA-3B54-7E7A-7873-638FA1F0D692}"/>
-          </ac:spMkLst>
-        </pc:spChg>
-      </pc:sldChg>
-      <pc:sldChg chg="modSp">
-        <pc:chgData name="Zhao Jin" userId="cd05a825-544c-438a-9ba1-08e63db50b47" providerId="ADAL" clId="{A30510A2-62EC-40DC-AB2C-65C341A967ED}" dt="2025-01-07T07:39:25.332" v="1"/>
-        <pc:sldMkLst>
-          <pc:docMk/>
-          <pc:sldMk cId="1832708629" sldId="646"/>
-        </pc:sldMkLst>
-        <pc:spChg chg="mod">
-          <ac:chgData name="Zhao Jin" userId="cd05a825-544c-438a-9ba1-08e63db50b47" providerId="ADAL" clId="{A30510A2-62EC-40DC-AB2C-65C341A967ED}" dt="2025-01-07T07:39:25.332" v="1"/>
-          <ac:spMkLst>
-            <pc:docMk/>
-            <pc:sldMk cId="1832708629" sldId="646"/>
-            <ac:spMk id="2" creationId="{DF9D478A-7CFE-17DB-6DF6-0574C13B1F05}"/>
-          </ac:spMkLst>
-        </pc:spChg>
-      </pc:sldChg>
-      <pc:sldChg chg="modSp">
-        <pc:chgData name="Zhao Jin" userId="cd05a825-544c-438a-9ba1-08e63db50b47" providerId="ADAL" clId="{A30510A2-62EC-40DC-AB2C-65C341A967ED}" dt="2025-01-07T07:39:25.332" v="1"/>
-        <pc:sldMkLst>
-          <pc:docMk/>
-          <pc:sldMk cId="2677643591" sldId="647"/>
-        </pc:sldMkLst>
-        <pc:spChg chg="mod">
-          <ac:chgData name="Zhao Jin" userId="cd05a825-544c-438a-9ba1-08e63db50b47" providerId="ADAL" clId="{A30510A2-62EC-40DC-AB2C-65C341A967ED}" dt="2025-01-07T07:39:25.332" v="1"/>
-          <ac:spMkLst>
-            <pc:docMk/>
-            <pc:sldMk cId="2677643591" sldId="647"/>
-            <ac:spMk id="2" creationId="{464E4ACD-827E-1BD3-82BA-A2BD5825E5C7}"/>
-          </ac:spMkLst>
-        </pc:spChg>
-      </pc:sldChg>
-      <pc:sldChg chg="modSp">
-        <pc:chgData name="Zhao Jin" userId="cd05a825-544c-438a-9ba1-08e63db50b47" providerId="ADAL" clId="{A30510A2-62EC-40DC-AB2C-65C341A967ED}" dt="2025-01-07T07:39:25.332" v="1"/>
-        <pc:sldMkLst>
-          <pc:docMk/>
-          <pc:sldMk cId="2524073575" sldId="648"/>
-        </pc:sldMkLst>
-        <pc:spChg chg="mod">
-          <ac:chgData name="Zhao Jin" userId="cd05a825-544c-438a-9ba1-08e63db50b47" providerId="ADAL" clId="{A30510A2-62EC-40DC-AB2C-65C341A967ED}" dt="2025-01-07T07:39:25.332" v="1"/>
-          <ac:spMkLst>
-            <pc:docMk/>
-            <pc:sldMk cId="2524073575" sldId="648"/>
-            <ac:spMk id="2" creationId="{B1C21EEF-0612-42E1-1DA1-114C2283D682}"/>
-          </ac:spMkLst>
-        </pc:spChg>
-      </pc:sldChg>
-      <pc:sldChg chg="modSp">
-        <pc:chgData name="Zhao Jin" userId="cd05a825-544c-438a-9ba1-08e63db50b47" providerId="ADAL" clId="{A30510A2-62EC-40DC-AB2C-65C341A967ED}" dt="2025-01-07T07:39:25.332" v="1"/>
-        <pc:sldMkLst>
-          <pc:docMk/>
-          <pc:sldMk cId="846190340" sldId="649"/>
-        </pc:sldMkLst>
-        <pc:spChg chg="mod">
-          <ac:chgData name="Zhao Jin" userId="cd05a825-544c-438a-9ba1-08e63db50b47" providerId="ADAL" clId="{A30510A2-62EC-40DC-AB2C-65C341A967ED}" dt="2025-01-07T07:39:25.332" v="1"/>
-          <ac:spMkLst>
-            <pc:docMk/>
-            <pc:sldMk cId="846190340" sldId="649"/>
-            <ac:spMk id="2" creationId="{7EBA9232-FB87-0083-A6B4-5C40E820287E}"/>
-          </ac:spMkLst>
-        </pc:spChg>
-      </pc:sldChg>
-      <pc:sldChg chg="modSp">
-        <pc:chgData name="Zhao Jin" userId="cd05a825-544c-438a-9ba1-08e63db50b47" providerId="ADAL" clId="{A30510A2-62EC-40DC-AB2C-65C341A967ED}" dt="2025-01-07T07:39:25.332" v="1"/>
-        <pc:sldMkLst>
-          <pc:docMk/>
-          <pc:sldMk cId="997017972" sldId="650"/>
-        </pc:sldMkLst>
-        <pc:spChg chg="mod">
-          <ac:chgData name="Zhao Jin" userId="cd05a825-544c-438a-9ba1-08e63db50b47" providerId="ADAL" clId="{A30510A2-62EC-40DC-AB2C-65C341A967ED}" dt="2025-01-07T07:39:25.332" v="1"/>
-          <ac:spMkLst>
-            <pc:docMk/>
-            <pc:sldMk cId="997017972" sldId="650"/>
-            <ac:spMk id="3" creationId="{72111BEF-3BD0-586B-335B-193F6799524D}"/>
-          </ac:spMkLst>
-        </pc:spChg>
-      </pc:sldChg>
-      <pc:sldChg chg="add">
-        <pc:chgData name="Zhao Jin" userId="cd05a825-544c-438a-9ba1-08e63db50b47" providerId="ADAL" clId="{A30510A2-62EC-40DC-AB2C-65C341A967ED}" dt="2024-12-27T08:49:18.404" v="0"/>
-        <pc:sldMkLst>
-          <pc:docMk/>
-          <pc:sldMk cId="0" sldId="651"/>
-        </pc:sldMkLst>
-      </pc:sldChg>
-      <pc:sldChg chg="modSp add">
-        <pc:chgData name="Zhao Jin" userId="cd05a825-544c-438a-9ba1-08e63db50b47" providerId="ADAL" clId="{A30510A2-62EC-40DC-AB2C-65C341A967ED}" dt="2025-01-07T07:39:25.332" v="1"/>
-        <pc:sldMkLst>
-          <pc:docMk/>
-          <pc:sldMk cId="3747341290" sldId="652"/>
-        </pc:sldMkLst>
-        <pc:spChg chg="mod">
-          <ac:chgData name="Zhao Jin" userId="cd05a825-544c-438a-9ba1-08e63db50b47" providerId="ADAL" clId="{A30510A2-62EC-40DC-AB2C-65C341A967ED}" dt="2025-01-07T07:39:25.332" v="1"/>
-          <ac:spMkLst>
-            <pc:docMk/>
-            <pc:sldMk cId="3747341290" sldId="652"/>
-            <ac:spMk id="2" creationId="{75F83332-680A-6410-A874-44CF08855EB5}"/>
-          </ac:spMkLst>
-        </pc:spChg>
-      </pc:sldChg>
-      <pc:sldChg chg="modSp add">
-        <pc:chgData name="Zhao Jin" userId="cd05a825-544c-438a-9ba1-08e63db50b47" providerId="ADAL" clId="{A30510A2-62EC-40DC-AB2C-65C341A967ED}" dt="2025-01-07T07:39:25.332" v="1"/>
+      <pc:sldChg chg="modAnim">
+        <pc:chgData name="Zhao Jin" userId="cd05a825-544c-438a-9ba1-08e63db50b47" providerId="ADAL" clId="{5DF3A229-1965-414E-AF54-F4C37AC7DF68}" dt="2026-04-06T07:18:02.294" v="368"/>
         <pc:sldMkLst>
           <pc:docMk/>
           <pc:sldMk cId="234197343" sldId="653"/>
         </pc:sldMkLst>
-        <pc:spChg chg="mod">
-          <ac:chgData name="Zhao Jin" userId="cd05a825-544c-438a-9ba1-08e63db50b47" providerId="ADAL" clId="{A30510A2-62EC-40DC-AB2C-65C341A967ED}" dt="2025-01-07T07:39:25.332" v="1"/>
-          <ac:spMkLst>
-            <pc:docMk/>
-            <pc:sldMk cId="234197343" sldId="653"/>
-            <ac:spMk id="2" creationId="{DD0A4FE6-337B-0F09-4DEE-AAFD1CDB4796}"/>
-          </ac:spMkLst>
-        </pc:spChg>
       </pc:sldChg>
-      <pc:sldChg chg="modSp add">
-        <pc:chgData name="Zhao Jin" userId="cd05a825-544c-438a-9ba1-08e63db50b47" providerId="ADAL" clId="{A30510A2-62EC-40DC-AB2C-65C341A967ED}" dt="2025-01-07T07:39:25.332" v="1"/>
+      <pc:sldChg chg="modAnim">
+        <pc:chgData name="Zhao Jin" userId="cd05a825-544c-438a-9ba1-08e63db50b47" providerId="ADAL" clId="{5DF3A229-1965-414E-AF54-F4C37AC7DF68}" dt="2026-04-06T07:18:11.662" v="369"/>
         <pc:sldMkLst>
           <pc:docMk/>
           <pc:sldMk cId="81373691" sldId="654"/>
         </pc:sldMkLst>
-        <pc:spChg chg="mod">
-          <ac:chgData name="Zhao Jin" userId="cd05a825-544c-438a-9ba1-08e63db50b47" providerId="ADAL" clId="{A30510A2-62EC-40DC-AB2C-65C341A967ED}" dt="2025-01-07T07:39:25.332" v="1"/>
-          <ac:spMkLst>
-            <pc:docMk/>
-            <pc:sldMk cId="81373691" sldId="654"/>
-            <ac:spMk id="2" creationId="{0353E578-9E84-5143-F775-051F799625CB}"/>
-          </ac:spMkLst>
-        </pc:spChg>
       </pc:sldChg>
-      <pc:sldChg chg="modSp add">
-        <pc:chgData name="Zhao Jin" userId="cd05a825-544c-438a-9ba1-08e63db50b47" providerId="ADAL" clId="{A30510A2-62EC-40DC-AB2C-65C341A967ED}" dt="2025-01-07T07:39:25.332" v="1"/>
+      <pc:sldChg chg="modSp mod">
+        <pc:chgData name="Zhao Jin" userId="cd05a825-544c-438a-9ba1-08e63db50b47" providerId="ADAL" clId="{5DF3A229-1965-414E-AF54-F4C37AC7DF68}" dt="2026-04-06T07:44:25.115" v="410" actId="20577"/>
         <pc:sldMkLst>
           <pc:docMk/>
           <pc:sldMk cId="2051865563" sldId="655"/>
         </pc:sldMkLst>
         <pc:spChg chg="mod">
-          <ac:chgData name="Zhao Jin" userId="cd05a825-544c-438a-9ba1-08e63db50b47" providerId="ADAL" clId="{A30510A2-62EC-40DC-AB2C-65C341A967ED}" dt="2025-01-07T07:39:25.332" v="1"/>
+          <ac:chgData name="Zhao Jin" userId="cd05a825-544c-438a-9ba1-08e63db50b47" providerId="ADAL" clId="{5DF3A229-1965-414E-AF54-F4C37AC7DF68}" dt="2026-04-06T07:44:25.115" v="410" actId="20577"/>
           <ac:spMkLst>
             <pc:docMk/>
             <pc:sldMk cId="2051865563" sldId="655"/>
-            <ac:spMk id="2" creationId="{D1EA9DA8-A471-1213-33D0-78950DBFAD7D}"/>
+            <ac:spMk id="14338" creationId="{00000000-0000-0000-0000-000000000000}"/>
           </ac:spMkLst>
         </pc:spChg>
       </pc:sldChg>
-      <pc:sldChg chg="modSp add">
-        <pc:chgData name="Zhao Jin" userId="cd05a825-544c-438a-9ba1-08e63db50b47" providerId="ADAL" clId="{A30510A2-62EC-40DC-AB2C-65C341A967ED}" dt="2025-01-07T07:39:25.332" v="1"/>
-        <pc:sldMkLst>
-          <pc:docMk/>
-          <pc:sldMk cId="2015606488" sldId="656"/>
-        </pc:sldMkLst>
-        <pc:spChg chg="mod">
-          <ac:chgData name="Zhao Jin" userId="cd05a825-544c-438a-9ba1-08e63db50b47" providerId="ADAL" clId="{A30510A2-62EC-40DC-AB2C-65C341A967ED}" dt="2025-01-07T07:39:25.332" v="1"/>
-          <ac:spMkLst>
-            <pc:docMk/>
-            <pc:sldMk cId="2015606488" sldId="656"/>
-            <ac:spMk id="2" creationId="{75AB102D-DF30-7E04-2541-89827B902540}"/>
-          </ac:spMkLst>
-        </pc:spChg>
-      </pc:sldChg>
-      <pc:sldChg chg="modSp add">
-        <pc:chgData name="Zhao Jin" userId="cd05a825-544c-438a-9ba1-08e63db50b47" providerId="ADAL" clId="{A30510A2-62EC-40DC-AB2C-65C341A967ED}" dt="2025-01-07T07:39:25.332" v="1"/>
+      <pc:sldChg chg="addAnim delAnim modAnim">
+        <pc:chgData name="Zhao Jin" userId="cd05a825-544c-438a-9ba1-08e63db50b47" providerId="ADAL" clId="{5DF3A229-1965-414E-AF54-F4C37AC7DF68}" dt="2026-04-06T07:20:30.029" v="380"/>
         <pc:sldMkLst>
           <pc:docMk/>
           <pc:sldMk cId="4152505185" sldId="657"/>
-        </pc:sldMkLst>
-        <pc:spChg chg="mod">
-          <ac:chgData name="Zhao Jin" userId="cd05a825-544c-438a-9ba1-08e63db50b47" providerId="ADAL" clId="{A30510A2-62EC-40DC-AB2C-65C341A967ED}" dt="2025-01-07T07:39:25.332" v="1"/>
-          <ac:spMkLst>
-            <pc:docMk/>
-            <pc:sldMk cId="4152505185" sldId="657"/>
-            <ac:spMk id="2" creationId="{AEFA073E-4C51-00FA-6ED6-84C0E5D571AD}"/>
-          </ac:spMkLst>
-        </pc:spChg>
-      </pc:sldChg>
-      <pc:sldMasterChg chg="modSp modSldLayout">
-        <pc:chgData name="Zhao Jin" userId="cd05a825-544c-438a-9ba1-08e63db50b47" providerId="ADAL" clId="{A30510A2-62EC-40DC-AB2C-65C341A967ED}" dt="2025-01-07T07:39:25.332" v="1"/>
-        <pc:sldMasterMkLst>
-          <pc:docMk/>
-          <pc:sldMasterMk cId="0" sldId="2147485087"/>
-        </pc:sldMasterMkLst>
-        <pc:spChg chg="mod">
-          <ac:chgData name="Zhao Jin" userId="cd05a825-544c-438a-9ba1-08e63db50b47" providerId="ADAL" clId="{A30510A2-62EC-40DC-AB2C-65C341A967ED}" dt="2025-01-07T07:39:25.332" v="1"/>
-          <ac:spMkLst>
-            <pc:docMk/>
-            <pc:sldMasterMk cId="0" sldId="2147485087"/>
-            <ac:spMk id="5" creationId="{00000000-0000-0000-0000-000000000000}"/>
-          </ac:spMkLst>
-        </pc:spChg>
-        <pc:sldLayoutChg chg="modSp">
-          <pc:chgData name="Zhao Jin" userId="cd05a825-544c-438a-9ba1-08e63db50b47" providerId="ADAL" clId="{A30510A2-62EC-40DC-AB2C-65C341A967ED}" dt="2025-01-07T07:39:25.332" v="1"/>
-          <pc:sldLayoutMkLst>
-            <pc:docMk/>
-            <pc:sldMasterMk cId="0" sldId="2147485087"/>
-            <pc:sldLayoutMk cId="0" sldId="2147485088"/>
-          </pc:sldLayoutMkLst>
-          <pc:spChg chg="mod">
-            <ac:chgData name="Zhao Jin" userId="cd05a825-544c-438a-9ba1-08e63db50b47" providerId="ADAL" clId="{A30510A2-62EC-40DC-AB2C-65C341A967ED}" dt="2025-01-07T07:39:25.332" v="1"/>
-            <ac:spMkLst>
-              <pc:docMk/>
-              <pc:sldMasterMk cId="0" sldId="2147485087"/>
-              <pc:sldLayoutMk cId="0" sldId="2147485088"/>
-              <ac:spMk id="5" creationId="{00000000-0000-0000-0000-000000000000}"/>
-            </ac:spMkLst>
-          </pc:spChg>
-        </pc:sldLayoutChg>
-        <pc:sldLayoutChg chg="modSp">
-          <pc:chgData name="Zhao Jin" userId="cd05a825-544c-438a-9ba1-08e63db50b47" providerId="ADAL" clId="{A30510A2-62EC-40DC-AB2C-65C341A967ED}" dt="2025-01-07T07:39:25.332" v="1"/>
-          <pc:sldLayoutMkLst>
-            <pc:docMk/>
-            <pc:sldMasterMk cId="0" sldId="2147485087"/>
-            <pc:sldLayoutMk cId="0" sldId="2147485089"/>
-          </pc:sldLayoutMkLst>
-          <pc:spChg chg="mod">
-            <ac:chgData name="Zhao Jin" userId="cd05a825-544c-438a-9ba1-08e63db50b47" providerId="ADAL" clId="{A30510A2-62EC-40DC-AB2C-65C341A967ED}" dt="2025-01-07T07:39:25.332" v="1"/>
-            <ac:spMkLst>
-              <pc:docMk/>
-              <pc:sldMasterMk cId="0" sldId="2147485087"/>
-              <pc:sldLayoutMk cId="0" sldId="2147485089"/>
-              <ac:spMk id="5" creationId="{00000000-0000-0000-0000-000000000000}"/>
-            </ac:spMkLst>
-          </pc:spChg>
-        </pc:sldLayoutChg>
-        <pc:sldLayoutChg chg="modSp">
-          <pc:chgData name="Zhao Jin" userId="cd05a825-544c-438a-9ba1-08e63db50b47" providerId="ADAL" clId="{A30510A2-62EC-40DC-AB2C-65C341A967ED}" dt="2025-01-07T07:39:25.332" v="1"/>
-          <pc:sldLayoutMkLst>
-            <pc:docMk/>
-            <pc:sldMasterMk cId="0" sldId="2147485087"/>
-            <pc:sldLayoutMk cId="0" sldId="2147485090"/>
-          </pc:sldLayoutMkLst>
-          <pc:spChg chg="mod">
-            <ac:chgData name="Zhao Jin" userId="cd05a825-544c-438a-9ba1-08e63db50b47" providerId="ADAL" clId="{A30510A2-62EC-40DC-AB2C-65C341A967ED}" dt="2025-01-07T07:39:25.332" v="1"/>
-            <ac:spMkLst>
-              <pc:docMk/>
-              <pc:sldMasterMk cId="0" sldId="2147485087"/>
-              <pc:sldLayoutMk cId="0" sldId="2147485090"/>
-              <ac:spMk id="5" creationId="{00000000-0000-0000-0000-000000000000}"/>
-            </ac:spMkLst>
-          </pc:spChg>
-        </pc:sldLayoutChg>
-        <pc:sldLayoutChg chg="modSp">
-          <pc:chgData name="Zhao Jin" userId="cd05a825-544c-438a-9ba1-08e63db50b47" providerId="ADAL" clId="{A30510A2-62EC-40DC-AB2C-65C341A967ED}" dt="2025-01-07T07:39:25.332" v="1"/>
-          <pc:sldLayoutMkLst>
-            <pc:docMk/>
-            <pc:sldMasterMk cId="0" sldId="2147485087"/>
-            <pc:sldLayoutMk cId="0" sldId="2147485091"/>
-          </pc:sldLayoutMkLst>
-          <pc:spChg chg="mod">
-            <ac:chgData name="Zhao Jin" userId="cd05a825-544c-438a-9ba1-08e63db50b47" providerId="ADAL" clId="{A30510A2-62EC-40DC-AB2C-65C341A967ED}" dt="2025-01-07T07:39:25.332" v="1"/>
-            <ac:spMkLst>
-              <pc:docMk/>
-              <pc:sldMasterMk cId="0" sldId="2147485087"/>
-              <pc:sldLayoutMk cId="0" sldId="2147485091"/>
-              <ac:spMk id="6" creationId="{00000000-0000-0000-0000-000000000000}"/>
-            </ac:spMkLst>
-          </pc:spChg>
-        </pc:sldLayoutChg>
-        <pc:sldLayoutChg chg="modSp">
-          <pc:chgData name="Zhao Jin" userId="cd05a825-544c-438a-9ba1-08e63db50b47" providerId="ADAL" clId="{A30510A2-62EC-40DC-AB2C-65C341A967ED}" dt="2025-01-07T07:39:25.332" v="1"/>
-          <pc:sldLayoutMkLst>
-            <pc:docMk/>
-            <pc:sldMasterMk cId="0" sldId="2147485087"/>
-            <pc:sldLayoutMk cId="0" sldId="2147485092"/>
-          </pc:sldLayoutMkLst>
-          <pc:spChg chg="mod">
-            <ac:chgData name="Zhao Jin" userId="cd05a825-544c-438a-9ba1-08e63db50b47" providerId="ADAL" clId="{A30510A2-62EC-40DC-AB2C-65C341A967ED}" dt="2025-01-07T07:39:25.332" v="1"/>
-            <ac:spMkLst>
-              <pc:docMk/>
-              <pc:sldMasterMk cId="0" sldId="2147485087"/>
-              <pc:sldLayoutMk cId="0" sldId="2147485092"/>
-              <ac:spMk id="8" creationId="{00000000-0000-0000-0000-000000000000}"/>
-            </ac:spMkLst>
-          </pc:spChg>
-        </pc:sldLayoutChg>
-        <pc:sldLayoutChg chg="modSp">
-          <pc:chgData name="Zhao Jin" userId="cd05a825-544c-438a-9ba1-08e63db50b47" providerId="ADAL" clId="{A30510A2-62EC-40DC-AB2C-65C341A967ED}" dt="2025-01-07T07:39:25.332" v="1"/>
-          <pc:sldLayoutMkLst>
-            <pc:docMk/>
-            <pc:sldMasterMk cId="0" sldId="2147485087"/>
-            <pc:sldLayoutMk cId="0" sldId="2147485093"/>
-          </pc:sldLayoutMkLst>
-          <pc:spChg chg="mod">
-            <ac:chgData name="Zhao Jin" userId="cd05a825-544c-438a-9ba1-08e63db50b47" providerId="ADAL" clId="{A30510A2-62EC-40DC-AB2C-65C341A967ED}" dt="2025-01-07T07:39:25.332" v="1"/>
-            <ac:spMkLst>
-              <pc:docMk/>
-              <pc:sldMasterMk cId="0" sldId="2147485087"/>
-              <pc:sldLayoutMk cId="0" sldId="2147485093"/>
-              <ac:spMk id="4" creationId="{00000000-0000-0000-0000-000000000000}"/>
-            </ac:spMkLst>
-          </pc:spChg>
-        </pc:sldLayoutChg>
-        <pc:sldLayoutChg chg="modSp">
-          <pc:chgData name="Zhao Jin" userId="cd05a825-544c-438a-9ba1-08e63db50b47" providerId="ADAL" clId="{A30510A2-62EC-40DC-AB2C-65C341A967ED}" dt="2025-01-07T07:39:25.332" v="1"/>
-          <pc:sldLayoutMkLst>
-            <pc:docMk/>
-            <pc:sldMasterMk cId="0" sldId="2147485087"/>
-            <pc:sldLayoutMk cId="0" sldId="2147485094"/>
-          </pc:sldLayoutMkLst>
-          <pc:spChg chg="mod">
-            <ac:chgData name="Zhao Jin" userId="cd05a825-544c-438a-9ba1-08e63db50b47" providerId="ADAL" clId="{A30510A2-62EC-40DC-AB2C-65C341A967ED}" dt="2025-01-07T07:39:25.332" v="1"/>
-            <ac:spMkLst>
-              <pc:docMk/>
-              <pc:sldMasterMk cId="0" sldId="2147485087"/>
-              <pc:sldLayoutMk cId="0" sldId="2147485094"/>
-              <ac:spMk id="3" creationId="{00000000-0000-0000-0000-000000000000}"/>
-            </ac:spMkLst>
-          </pc:spChg>
-        </pc:sldLayoutChg>
-        <pc:sldLayoutChg chg="modSp">
-          <pc:chgData name="Zhao Jin" userId="cd05a825-544c-438a-9ba1-08e63db50b47" providerId="ADAL" clId="{A30510A2-62EC-40DC-AB2C-65C341A967ED}" dt="2025-01-07T07:39:25.332" v="1"/>
-          <pc:sldLayoutMkLst>
-            <pc:docMk/>
-            <pc:sldMasterMk cId="0" sldId="2147485087"/>
-            <pc:sldLayoutMk cId="0" sldId="2147485095"/>
-          </pc:sldLayoutMkLst>
-          <pc:spChg chg="mod">
-            <ac:chgData name="Zhao Jin" userId="cd05a825-544c-438a-9ba1-08e63db50b47" providerId="ADAL" clId="{A30510A2-62EC-40DC-AB2C-65C341A967ED}" dt="2025-01-07T07:39:25.332" v="1"/>
-            <ac:spMkLst>
-              <pc:docMk/>
-              <pc:sldMasterMk cId="0" sldId="2147485087"/>
-              <pc:sldLayoutMk cId="0" sldId="2147485095"/>
-              <ac:spMk id="6" creationId="{00000000-0000-0000-0000-000000000000}"/>
-            </ac:spMkLst>
-          </pc:spChg>
-        </pc:sldLayoutChg>
-        <pc:sldLayoutChg chg="modSp">
-          <pc:chgData name="Zhao Jin" userId="cd05a825-544c-438a-9ba1-08e63db50b47" providerId="ADAL" clId="{A30510A2-62EC-40DC-AB2C-65C341A967ED}" dt="2025-01-07T07:39:25.332" v="1"/>
-          <pc:sldLayoutMkLst>
-            <pc:docMk/>
-            <pc:sldMasterMk cId="0" sldId="2147485087"/>
-            <pc:sldLayoutMk cId="0" sldId="2147485096"/>
-          </pc:sldLayoutMkLst>
-          <pc:spChg chg="mod">
-            <ac:chgData name="Zhao Jin" userId="cd05a825-544c-438a-9ba1-08e63db50b47" providerId="ADAL" clId="{A30510A2-62EC-40DC-AB2C-65C341A967ED}" dt="2025-01-07T07:39:25.332" v="1"/>
-            <ac:spMkLst>
-              <pc:docMk/>
-              <pc:sldMasterMk cId="0" sldId="2147485087"/>
-              <pc:sldLayoutMk cId="0" sldId="2147485096"/>
-              <ac:spMk id="6" creationId="{00000000-0000-0000-0000-000000000000}"/>
-            </ac:spMkLst>
-          </pc:spChg>
-        </pc:sldLayoutChg>
-        <pc:sldLayoutChg chg="modSp">
-          <pc:chgData name="Zhao Jin" userId="cd05a825-544c-438a-9ba1-08e63db50b47" providerId="ADAL" clId="{A30510A2-62EC-40DC-AB2C-65C341A967ED}" dt="2025-01-07T07:39:25.332" v="1"/>
-          <pc:sldLayoutMkLst>
-            <pc:docMk/>
-            <pc:sldMasterMk cId="0" sldId="2147485087"/>
-            <pc:sldLayoutMk cId="0" sldId="2147485097"/>
-          </pc:sldLayoutMkLst>
-          <pc:spChg chg="mod">
-            <ac:chgData name="Zhao Jin" userId="cd05a825-544c-438a-9ba1-08e63db50b47" providerId="ADAL" clId="{A30510A2-62EC-40DC-AB2C-65C341A967ED}" dt="2025-01-07T07:39:25.332" v="1"/>
-            <ac:spMkLst>
-              <pc:docMk/>
-              <pc:sldMasterMk cId="0" sldId="2147485087"/>
-              <pc:sldLayoutMk cId="0" sldId="2147485097"/>
-              <ac:spMk id="5" creationId="{00000000-0000-0000-0000-000000000000}"/>
-            </ac:spMkLst>
-          </pc:spChg>
-        </pc:sldLayoutChg>
-        <pc:sldLayoutChg chg="modSp">
-          <pc:chgData name="Zhao Jin" userId="cd05a825-544c-438a-9ba1-08e63db50b47" providerId="ADAL" clId="{A30510A2-62EC-40DC-AB2C-65C341A967ED}" dt="2025-01-07T07:39:25.332" v="1"/>
-          <pc:sldLayoutMkLst>
-            <pc:docMk/>
-            <pc:sldMasterMk cId="0" sldId="2147485087"/>
-            <pc:sldLayoutMk cId="0" sldId="2147485098"/>
-          </pc:sldLayoutMkLst>
-          <pc:spChg chg="mod">
-            <ac:chgData name="Zhao Jin" userId="cd05a825-544c-438a-9ba1-08e63db50b47" providerId="ADAL" clId="{A30510A2-62EC-40DC-AB2C-65C341A967ED}" dt="2025-01-07T07:39:25.332" v="1"/>
-            <ac:spMkLst>
-              <pc:docMk/>
-              <pc:sldMasterMk cId="0" sldId="2147485087"/>
-              <pc:sldLayoutMk cId="0" sldId="2147485098"/>
-              <ac:spMk id="5" creationId="{00000000-0000-0000-0000-000000000000}"/>
-            </ac:spMkLst>
-          </pc:spChg>
-        </pc:sldLayoutChg>
-      </pc:sldMasterChg>
-    </pc:docChg>
-  </pc:docChgLst>
-  <pc:docChgLst>
-    <pc:chgData name="Zhao Jin" userId="cd05a825-544c-438a-9ba1-08e63db50b47" providerId="ADAL" clId="{37A0D694-38DA-4421-B5D3-DEDBFC2EC57C}"/>
-    <pc:docChg chg="undo redo custSel mod addSld delSld modSld sldOrd modMainMaster">
-      <pc:chgData name="Zhao Jin" userId="cd05a825-544c-438a-9ba1-08e63db50b47" providerId="ADAL" clId="{37A0D694-38DA-4421-B5D3-DEDBFC2EC57C}" dt="2021-02-08T07:59:31.262" v="4966" actId="20577"/>
-      <pc:docMkLst>
-        <pc:docMk/>
-      </pc:docMkLst>
-      <pc:sldChg chg="modSp mod">
-        <pc:chgData name="Zhao Jin" userId="cd05a825-544c-438a-9ba1-08e63db50b47" providerId="ADAL" clId="{37A0D694-38DA-4421-B5D3-DEDBFC2EC57C}" dt="2021-02-03T06:56:00.570" v="28" actId="20577"/>
-        <pc:sldMkLst>
-          <pc:docMk/>
-          <pc:sldMk cId="0" sldId="256"/>
-        </pc:sldMkLst>
-      </pc:sldChg>
-      <pc:sldChg chg="modSp mod">
-        <pc:chgData name="Zhao Jin" userId="cd05a825-544c-438a-9ba1-08e63db50b47" providerId="ADAL" clId="{37A0D694-38DA-4421-B5D3-DEDBFC2EC57C}" dt="2021-02-03T09:25:32.601" v="3334" actId="20577"/>
-        <pc:sldMkLst>
-          <pc:docMk/>
-          <pc:sldMk cId="2438607696" sldId="468"/>
-        </pc:sldMkLst>
-      </pc:sldChg>
-      <pc:sldChg chg="modSp del">
-        <pc:chgData name="Zhao Jin" userId="cd05a825-544c-438a-9ba1-08e63db50b47" providerId="ADAL" clId="{37A0D694-38DA-4421-B5D3-DEDBFC2EC57C}" dt="2021-02-03T07:53:06.972" v="43" actId="47"/>
-        <pc:sldMkLst>
-          <pc:docMk/>
-          <pc:sldMk cId="3792232794" sldId="504"/>
-        </pc:sldMkLst>
-      </pc:sldChg>
-      <pc:sldChg chg="addSp delSp modSp add mod ord modAnim">
-        <pc:chgData name="Zhao Jin" userId="cd05a825-544c-438a-9ba1-08e63db50b47" providerId="ADAL" clId="{37A0D694-38DA-4421-B5D3-DEDBFC2EC57C}" dt="2021-02-03T09:26:12.205" v="3350" actId="478"/>
-        <pc:sldMkLst>
-          <pc:docMk/>
-          <pc:sldMk cId="1705639840" sldId="543"/>
-        </pc:sldMkLst>
-      </pc:sldChg>
-      <pc:sldChg chg="modSp del">
-        <pc:chgData name="Zhao Jin" userId="cd05a825-544c-438a-9ba1-08e63db50b47" providerId="ADAL" clId="{37A0D694-38DA-4421-B5D3-DEDBFC2EC57C}" dt="2021-02-03T09:00:14.226" v="1559" actId="47"/>
-        <pc:sldMkLst>
-          <pc:docMk/>
-          <pc:sldMk cId="4228901100" sldId="545"/>
-        </pc:sldMkLst>
-      </pc:sldChg>
-      <pc:sldChg chg="modSp del">
-        <pc:chgData name="Zhao Jin" userId="cd05a825-544c-438a-9ba1-08e63db50b47" providerId="ADAL" clId="{37A0D694-38DA-4421-B5D3-DEDBFC2EC57C}" dt="2021-02-03T07:53:07.263" v="44" actId="47"/>
-        <pc:sldMkLst>
-          <pc:docMk/>
-          <pc:sldMk cId="4225956616" sldId="546"/>
-        </pc:sldMkLst>
-      </pc:sldChg>
-      <pc:sldChg chg="modSp del">
-        <pc:chgData name="Zhao Jin" userId="cd05a825-544c-438a-9ba1-08e63db50b47" providerId="ADAL" clId="{37A0D694-38DA-4421-B5D3-DEDBFC2EC57C}" dt="2021-02-03T09:00:14.226" v="1559" actId="47"/>
-        <pc:sldMkLst>
-          <pc:docMk/>
-          <pc:sldMk cId="1617257579" sldId="548"/>
-        </pc:sldMkLst>
-      </pc:sldChg>
-      <pc:sldChg chg="modSp del">
-        <pc:chgData name="Zhao Jin" userId="cd05a825-544c-438a-9ba1-08e63db50b47" providerId="ADAL" clId="{37A0D694-38DA-4421-B5D3-DEDBFC2EC57C}" dt="2021-02-03T07:53:07.458" v="45" actId="47"/>
-        <pc:sldMkLst>
-          <pc:docMk/>
-          <pc:sldMk cId="3422194935" sldId="552"/>
-        </pc:sldMkLst>
-      </pc:sldChg>
-      <pc:sldChg chg="addSp delSp modSp mod">
-        <pc:chgData name="Zhao Jin" userId="cd05a825-544c-438a-9ba1-08e63db50b47" providerId="ADAL" clId="{37A0D694-38DA-4421-B5D3-DEDBFC2EC57C}" dt="2021-02-08T01:22:04.286" v="3395"/>
-        <pc:sldMkLst>
-          <pc:docMk/>
-          <pc:sldMk cId="1427618944" sldId="553"/>
-        </pc:sldMkLst>
-      </pc:sldChg>
-      <pc:sldChg chg="modSp del">
-        <pc:chgData name="Zhao Jin" userId="cd05a825-544c-438a-9ba1-08e63db50b47" providerId="ADAL" clId="{37A0D694-38DA-4421-B5D3-DEDBFC2EC57C}" dt="2021-02-03T09:00:14.226" v="1559" actId="47"/>
-        <pc:sldMkLst>
-          <pc:docMk/>
-          <pc:sldMk cId="1659983766" sldId="554"/>
-        </pc:sldMkLst>
-      </pc:sldChg>
-      <pc:sldChg chg="modSp del">
-        <pc:chgData name="Zhao Jin" userId="cd05a825-544c-438a-9ba1-08e63db50b47" providerId="ADAL" clId="{37A0D694-38DA-4421-B5D3-DEDBFC2EC57C}" dt="2021-02-03T09:00:14.226" v="1559" actId="47"/>
-        <pc:sldMkLst>
-          <pc:docMk/>
-          <pc:sldMk cId="1268238251" sldId="555"/>
-        </pc:sldMkLst>
-      </pc:sldChg>
-      <pc:sldChg chg="modSp del">
-        <pc:chgData name="Zhao Jin" userId="cd05a825-544c-438a-9ba1-08e63db50b47" providerId="ADAL" clId="{37A0D694-38DA-4421-B5D3-DEDBFC2EC57C}" dt="2021-02-03T09:00:14.226" v="1559" actId="47"/>
-        <pc:sldMkLst>
-          <pc:docMk/>
-          <pc:sldMk cId="3990513599" sldId="556"/>
-        </pc:sldMkLst>
-      </pc:sldChg>
-      <pc:sldChg chg="modSp del">
-        <pc:chgData name="Zhao Jin" userId="cd05a825-544c-438a-9ba1-08e63db50b47" providerId="ADAL" clId="{37A0D694-38DA-4421-B5D3-DEDBFC2EC57C}" dt="2021-02-03T09:00:14.226" v="1559" actId="47"/>
-        <pc:sldMkLst>
-          <pc:docMk/>
-          <pc:sldMk cId="788021743" sldId="557"/>
-        </pc:sldMkLst>
-      </pc:sldChg>
-      <pc:sldChg chg="addSp delSp modSp add mod ord delAnim modAnim">
-        <pc:chgData name="Zhao Jin" userId="cd05a825-544c-438a-9ba1-08e63db50b47" providerId="ADAL" clId="{37A0D694-38DA-4421-B5D3-DEDBFC2EC57C}" dt="2021-02-08T07:59:31.262" v="4966" actId="20577"/>
-        <pc:sldMkLst>
-          <pc:docMk/>
-          <pc:sldMk cId="487843573" sldId="558"/>
-        </pc:sldMkLst>
-      </pc:sldChg>
-      <pc:sldChg chg="modSp del">
-        <pc:chgData name="Zhao Jin" userId="cd05a825-544c-438a-9ba1-08e63db50b47" providerId="ADAL" clId="{37A0D694-38DA-4421-B5D3-DEDBFC2EC57C}" dt="2021-02-03T09:00:14.226" v="1559" actId="47"/>
-        <pc:sldMkLst>
-          <pc:docMk/>
-          <pc:sldMk cId="686532275" sldId="558"/>
-        </pc:sldMkLst>
-      </pc:sldChg>
-      <pc:sldChg chg="modSp del">
-        <pc:chgData name="Zhao Jin" userId="cd05a825-544c-438a-9ba1-08e63db50b47" providerId="ADAL" clId="{37A0D694-38DA-4421-B5D3-DEDBFC2EC57C}" dt="2021-02-03T09:00:14.226" v="1559" actId="47"/>
-        <pc:sldMkLst>
-          <pc:docMk/>
-          <pc:sldMk cId="182578491" sldId="559"/>
-        </pc:sldMkLst>
-      </pc:sldChg>
-      <pc:sldChg chg="modSp del">
-        <pc:chgData name="Zhao Jin" userId="cd05a825-544c-438a-9ba1-08e63db50b47" providerId="ADAL" clId="{37A0D694-38DA-4421-B5D3-DEDBFC2EC57C}" dt="2021-02-03T09:00:14.226" v="1559" actId="47"/>
-        <pc:sldMkLst>
-          <pc:docMk/>
-          <pc:sldMk cId="2739484572" sldId="562"/>
-        </pc:sldMkLst>
-      </pc:sldChg>
-      <pc:sldChg chg="delSp modSp add del mod">
-        <pc:chgData name="Zhao Jin" userId="cd05a825-544c-438a-9ba1-08e63db50b47" providerId="ADAL" clId="{37A0D694-38DA-4421-B5D3-DEDBFC2EC57C}" dt="2021-02-03T09:25:42.125" v="3337" actId="20577"/>
-        <pc:sldMkLst>
-          <pc:docMk/>
-          <pc:sldMk cId="92291925" sldId="563"/>
-        </pc:sldMkLst>
-      </pc:sldChg>
-      <pc:sldChg chg="addSp delSp modSp add mod addAnim delAnim modAnim">
-        <pc:chgData name="Zhao Jin" userId="cd05a825-544c-438a-9ba1-08e63db50b47" providerId="ADAL" clId="{37A0D694-38DA-4421-B5D3-DEDBFC2EC57C}" dt="2021-02-08T01:23:58.466" v="3512" actId="14734"/>
-        <pc:sldMkLst>
-          <pc:docMk/>
-          <pc:sldMk cId="894186310" sldId="564"/>
-        </pc:sldMkLst>
-      </pc:sldChg>
-      <pc:sldChg chg="delSp modSp add mod">
-        <pc:chgData name="Zhao Jin" userId="cd05a825-544c-438a-9ba1-08e63db50b47" providerId="ADAL" clId="{37A0D694-38DA-4421-B5D3-DEDBFC2EC57C}" dt="2021-02-08T01:59:53.143" v="4810" actId="207"/>
-        <pc:sldMkLst>
-          <pc:docMk/>
-          <pc:sldMk cId="1732540191" sldId="568"/>
-        </pc:sldMkLst>
-      </pc:sldChg>
-      <pc:sldChg chg="addSp delSp modSp add mod delAnim modAnim">
-        <pc:chgData name="Zhao Jin" userId="cd05a825-544c-438a-9ba1-08e63db50b47" providerId="ADAL" clId="{37A0D694-38DA-4421-B5D3-DEDBFC2EC57C}" dt="2021-02-08T02:01:55.171" v="4907" actId="20577"/>
-        <pc:sldMkLst>
-          <pc:docMk/>
-          <pc:sldMk cId="3229890649" sldId="569"/>
-        </pc:sldMkLst>
-      </pc:sldChg>
-      <pc:sldChg chg="addSp delSp modSp add del mod">
-        <pc:chgData name="Zhao Jin" userId="cd05a825-544c-438a-9ba1-08e63db50b47" providerId="ADAL" clId="{37A0D694-38DA-4421-B5D3-DEDBFC2EC57C}" dt="2021-02-08T01:41:10.766" v="4086" actId="1038"/>
-        <pc:sldMkLst>
-          <pc:docMk/>
-          <pc:sldMk cId="3922430229" sldId="580"/>
-        </pc:sldMkLst>
-      </pc:sldChg>
-      <pc:sldChg chg="delSp modSp add mod">
-        <pc:chgData name="Zhao Jin" userId="cd05a825-544c-438a-9ba1-08e63db50b47" providerId="ADAL" clId="{37A0D694-38DA-4421-B5D3-DEDBFC2EC57C}" dt="2021-02-08T01:42:07.875" v="4091"/>
-        <pc:sldMkLst>
-          <pc:docMk/>
-          <pc:sldMk cId="1886636263" sldId="581"/>
-        </pc:sldMkLst>
-      </pc:sldChg>
-      <pc:sldChg chg="modSp add del mod">
-        <pc:chgData name="Zhao Jin" userId="cd05a825-544c-438a-9ba1-08e63db50b47" providerId="ADAL" clId="{37A0D694-38DA-4421-B5D3-DEDBFC2EC57C}" dt="2021-02-03T08:47:45.744" v="1076" actId="47"/>
-        <pc:sldMkLst>
-          <pc:docMk/>
-          <pc:sldMk cId="893488834" sldId="587"/>
-        </pc:sldMkLst>
-      </pc:sldChg>
-      <pc:sldChg chg="addSp modSp add del mod">
-        <pc:chgData name="Zhao Jin" userId="cd05a825-544c-438a-9ba1-08e63db50b47" providerId="ADAL" clId="{37A0D694-38DA-4421-B5D3-DEDBFC2EC57C}" dt="2021-02-03T08:47:43.004" v="1075" actId="47"/>
-        <pc:sldMkLst>
-          <pc:docMk/>
-          <pc:sldMk cId="2663336489" sldId="588"/>
-        </pc:sldMkLst>
-      </pc:sldChg>
-      <pc:sldChg chg="addSp delSp modSp add mod">
-        <pc:chgData name="Zhao Jin" userId="cd05a825-544c-438a-9ba1-08e63db50b47" providerId="ADAL" clId="{37A0D694-38DA-4421-B5D3-DEDBFC2EC57C}" dt="2021-02-03T09:26:19.685" v="3354" actId="478"/>
-        <pc:sldMkLst>
-          <pc:docMk/>
-          <pc:sldMk cId="211149325" sldId="589"/>
-        </pc:sldMkLst>
-      </pc:sldChg>
-      <pc:sldChg chg="addSp delSp modSp add mod delAnim modAnim">
-        <pc:chgData name="Zhao Jin" userId="cd05a825-544c-438a-9ba1-08e63db50b47" providerId="ADAL" clId="{37A0D694-38DA-4421-B5D3-DEDBFC2EC57C}" dt="2021-02-08T01:38:27.881" v="3917" actId="20577"/>
-        <pc:sldMkLst>
-          <pc:docMk/>
-          <pc:sldMk cId="4156536479" sldId="590"/>
-        </pc:sldMkLst>
-      </pc:sldChg>
-      <pc:sldChg chg="addSp delSp modSp add mod delAnim">
-        <pc:chgData name="Zhao Jin" userId="cd05a825-544c-438a-9ba1-08e63db50b47" providerId="ADAL" clId="{37A0D694-38DA-4421-B5D3-DEDBFC2EC57C}" dt="2021-02-08T01:30:20.214" v="3620" actId="21"/>
-        <pc:sldMkLst>
-          <pc:docMk/>
-          <pc:sldMk cId="567798019" sldId="591"/>
-        </pc:sldMkLst>
-      </pc:sldChg>
-      <pc:sldChg chg="addSp delSp modSp add mod delAnim">
-        <pc:chgData name="Zhao Jin" userId="cd05a825-544c-438a-9ba1-08e63db50b47" providerId="ADAL" clId="{37A0D694-38DA-4421-B5D3-DEDBFC2EC57C}" dt="2021-02-08T01:32:46.621" v="3700" actId="478"/>
-        <pc:sldMkLst>
-          <pc:docMk/>
-          <pc:sldMk cId="137810324" sldId="592"/>
-        </pc:sldMkLst>
-      </pc:sldChg>
-      <pc:sldChg chg="addSp delSp modSp add mod">
-        <pc:chgData name="Zhao Jin" userId="cd05a825-544c-438a-9ba1-08e63db50b47" providerId="ADAL" clId="{37A0D694-38DA-4421-B5D3-DEDBFC2EC57C}" dt="2021-02-04T05:05:17.681" v="3392" actId="14100"/>
-        <pc:sldMkLst>
-          <pc:docMk/>
-          <pc:sldMk cId="3233082706" sldId="593"/>
-        </pc:sldMkLst>
-      </pc:sldChg>
-      <pc:sldChg chg="add del">
-        <pc:chgData name="Zhao Jin" userId="cd05a825-544c-438a-9ba1-08e63db50b47" providerId="ADAL" clId="{37A0D694-38DA-4421-B5D3-DEDBFC2EC57C}" dt="2021-02-03T08:52:31.399" v="1274"/>
-        <pc:sldMkLst>
-          <pc:docMk/>
-          <pc:sldMk cId="2125946801" sldId="594"/>
-        </pc:sldMkLst>
-      </pc:sldChg>
-      <pc:sldChg chg="addSp delSp modSp add mod delAnim">
-        <pc:chgData name="Zhao Jin" userId="cd05a825-544c-438a-9ba1-08e63db50b47" providerId="ADAL" clId="{37A0D694-38DA-4421-B5D3-DEDBFC2EC57C}" dt="2021-02-03T09:39:04.677" v="3364" actId="13926"/>
-        <pc:sldMkLst>
-          <pc:docMk/>
-          <pc:sldMk cId="2217225800" sldId="594"/>
-        </pc:sldMkLst>
-      </pc:sldChg>
-      <pc:sldChg chg="addSp modSp add mod">
-        <pc:chgData name="Zhao Jin" userId="cd05a825-544c-438a-9ba1-08e63db50b47" providerId="ADAL" clId="{37A0D694-38DA-4421-B5D3-DEDBFC2EC57C}" dt="2021-02-08T02:03:35.963" v="4958" actId="1076"/>
-        <pc:sldMkLst>
-          <pc:docMk/>
-          <pc:sldMk cId="2419983458" sldId="595"/>
-        </pc:sldMkLst>
-      </pc:sldChg>
-      <pc:sldChg chg="addSp delSp modSp add del mod delAnim">
-        <pc:chgData name="Zhao Jin" userId="cd05a825-544c-438a-9ba1-08e63db50b47" providerId="ADAL" clId="{37A0D694-38DA-4421-B5D3-DEDBFC2EC57C}" dt="2021-02-03T09:05:13.520" v="1668" actId="47"/>
-        <pc:sldMkLst>
-          <pc:docMk/>
-          <pc:sldMk cId="765980287" sldId="596"/>
-        </pc:sldMkLst>
-      </pc:sldChg>
-      <pc:sldChg chg="addSp delSp modSp add mod delAnim modAnim">
-        <pc:chgData name="Zhao Jin" userId="cd05a825-544c-438a-9ba1-08e63db50b47" providerId="ADAL" clId="{37A0D694-38DA-4421-B5D3-DEDBFC2EC57C}" dt="2021-02-08T01:42:03.171" v="4089"/>
-        <pc:sldMkLst>
-          <pc:docMk/>
-          <pc:sldMk cId="3643682471" sldId="596"/>
-        </pc:sldMkLst>
-      </pc:sldChg>
-      <pc:sldChg chg="delSp modSp add mod modAnim">
-        <pc:chgData name="Zhao Jin" userId="cd05a825-544c-438a-9ba1-08e63db50b47" providerId="ADAL" clId="{37A0D694-38DA-4421-B5D3-DEDBFC2EC57C}" dt="2021-02-03T09:39:34.898" v="3370" actId="6549"/>
-        <pc:sldMkLst>
-          <pc:docMk/>
-          <pc:sldMk cId="3231946261" sldId="597"/>
-        </pc:sldMkLst>
-      </pc:sldChg>
-      <pc:sldChg chg="delSp modSp add mod ord">
-        <pc:chgData name="Zhao Jin" userId="cd05a825-544c-438a-9ba1-08e63db50b47" providerId="ADAL" clId="{37A0D694-38DA-4421-B5D3-DEDBFC2EC57C}" dt="2021-02-08T01:42:01.261" v="4088"/>
-        <pc:sldMkLst>
-          <pc:docMk/>
-          <pc:sldMk cId="4002657513" sldId="598"/>
-        </pc:sldMkLst>
-      </pc:sldChg>
-      <pc:sldChg chg="addSp delSp modSp add mod ord modClrScheme addAnim delAnim modAnim chgLayout">
-        <pc:chgData name="Zhao Jin" userId="cd05a825-544c-438a-9ba1-08e63db50b47" providerId="ADAL" clId="{37A0D694-38DA-4421-B5D3-DEDBFC2EC57C}" dt="2021-02-04T05:05:47.079" v="3393" actId="478"/>
-        <pc:sldMkLst>
-          <pc:docMk/>
-          <pc:sldMk cId="2930953569" sldId="599"/>
-        </pc:sldMkLst>
-      </pc:sldChg>
-      <pc:sldChg chg="addSp delSp modSp add mod ord delAnim modAnim">
-        <pc:chgData name="Zhao Jin" userId="cd05a825-544c-438a-9ba1-08e63db50b47" providerId="ADAL" clId="{37A0D694-38DA-4421-B5D3-DEDBFC2EC57C}" dt="2021-02-08T02:02:28.200" v="4908" actId="20577"/>
-        <pc:sldMkLst>
-          <pc:docMk/>
-          <pc:sldMk cId="880934081" sldId="600"/>
-        </pc:sldMkLst>
-      </pc:sldChg>
-      <pc:sldMasterChg chg="modSp modSldLayout">
-        <pc:chgData name="Zhao Jin" userId="cd05a825-544c-438a-9ba1-08e63db50b47" providerId="ADAL" clId="{37A0D694-38DA-4421-B5D3-DEDBFC2EC57C}" dt="2021-02-03T06:56:12.527" v="36"/>
-        <pc:sldMasterMkLst>
-          <pc:docMk/>
-          <pc:sldMasterMk cId="0" sldId="2147485087"/>
-        </pc:sldMasterMkLst>
-        <pc:sldLayoutChg chg="modSp">
-          <pc:chgData name="Zhao Jin" userId="cd05a825-544c-438a-9ba1-08e63db50b47" providerId="ADAL" clId="{37A0D694-38DA-4421-B5D3-DEDBFC2EC57C}" dt="2021-02-03T06:56:12.527" v="36"/>
-          <pc:sldLayoutMkLst>
-            <pc:docMk/>
-            <pc:sldMasterMk cId="0" sldId="2147485087"/>
-            <pc:sldLayoutMk cId="0" sldId="2147485088"/>
-          </pc:sldLayoutMkLst>
-        </pc:sldLayoutChg>
-        <pc:sldLayoutChg chg="modSp">
-          <pc:chgData name="Zhao Jin" userId="cd05a825-544c-438a-9ba1-08e63db50b47" providerId="ADAL" clId="{37A0D694-38DA-4421-B5D3-DEDBFC2EC57C}" dt="2021-02-03T06:56:12.527" v="36"/>
-          <pc:sldLayoutMkLst>
-            <pc:docMk/>
-            <pc:sldMasterMk cId="0" sldId="2147485087"/>
-            <pc:sldLayoutMk cId="0" sldId="2147485089"/>
-          </pc:sldLayoutMkLst>
-        </pc:sldLayoutChg>
-        <pc:sldLayoutChg chg="modSp">
-          <pc:chgData name="Zhao Jin" userId="cd05a825-544c-438a-9ba1-08e63db50b47" providerId="ADAL" clId="{37A0D694-38DA-4421-B5D3-DEDBFC2EC57C}" dt="2021-02-03T06:56:12.527" v="36"/>
-          <pc:sldLayoutMkLst>
-            <pc:docMk/>
-            <pc:sldMasterMk cId="0" sldId="2147485087"/>
-            <pc:sldLayoutMk cId="0" sldId="2147485090"/>
-          </pc:sldLayoutMkLst>
-        </pc:sldLayoutChg>
-        <pc:sldLayoutChg chg="modSp">
-          <pc:chgData name="Zhao Jin" userId="cd05a825-544c-438a-9ba1-08e63db50b47" providerId="ADAL" clId="{37A0D694-38DA-4421-B5D3-DEDBFC2EC57C}" dt="2021-02-03T06:56:12.527" v="36"/>
-          <pc:sldLayoutMkLst>
-            <pc:docMk/>
-            <pc:sldMasterMk cId="0" sldId="2147485087"/>
-            <pc:sldLayoutMk cId="0" sldId="2147485091"/>
-          </pc:sldLayoutMkLst>
-        </pc:sldLayoutChg>
-        <pc:sldLayoutChg chg="modSp">
-          <pc:chgData name="Zhao Jin" userId="cd05a825-544c-438a-9ba1-08e63db50b47" providerId="ADAL" clId="{37A0D694-38DA-4421-B5D3-DEDBFC2EC57C}" dt="2021-02-03T06:56:12.527" v="36"/>
-          <pc:sldLayoutMkLst>
-            <pc:docMk/>
-            <pc:sldMasterMk cId="0" sldId="2147485087"/>
-            <pc:sldLayoutMk cId="0" sldId="2147485092"/>
-          </pc:sldLayoutMkLst>
-        </pc:sldLayoutChg>
-        <pc:sldLayoutChg chg="modSp">
-          <pc:chgData name="Zhao Jin" userId="cd05a825-544c-438a-9ba1-08e63db50b47" providerId="ADAL" clId="{37A0D694-38DA-4421-B5D3-DEDBFC2EC57C}" dt="2021-02-03T06:56:12.527" v="36"/>
-          <pc:sldLayoutMkLst>
-            <pc:docMk/>
-            <pc:sldMasterMk cId="0" sldId="2147485087"/>
-            <pc:sldLayoutMk cId="0" sldId="2147485093"/>
-          </pc:sldLayoutMkLst>
-        </pc:sldLayoutChg>
-        <pc:sldLayoutChg chg="modSp">
-          <pc:chgData name="Zhao Jin" userId="cd05a825-544c-438a-9ba1-08e63db50b47" providerId="ADAL" clId="{37A0D694-38DA-4421-B5D3-DEDBFC2EC57C}" dt="2021-02-03T06:56:12.527" v="36"/>
-          <pc:sldLayoutMkLst>
-            <pc:docMk/>
-            <pc:sldMasterMk cId="0" sldId="2147485087"/>
-            <pc:sldLayoutMk cId="0" sldId="2147485094"/>
-          </pc:sldLayoutMkLst>
-        </pc:sldLayoutChg>
-        <pc:sldLayoutChg chg="modSp">
-          <pc:chgData name="Zhao Jin" userId="cd05a825-544c-438a-9ba1-08e63db50b47" providerId="ADAL" clId="{37A0D694-38DA-4421-B5D3-DEDBFC2EC57C}" dt="2021-02-03T06:56:12.527" v="36"/>
-          <pc:sldLayoutMkLst>
-            <pc:docMk/>
-            <pc:sldMasterMk cId="0" sldId="2147485087"/>
-            <pc:sldLayoutMk cId="0" sldId="2147485095"/>
-          </pc:sldLayoutMkLst>
-        </pc:sldLayoutChg>
-        <pc:sldLayoutChg chg="modSp">
-          <pc:chgData name="Zhao Jin" userId="cd05a825-544c-438a-9ba1-08e63db50b47" providerId="ADAL" clId="{37A0D694-38DA-4421-B5D3-DEDBFC2EC57C}" dt="2021-02-03T06:56:12.527" v="36"/>
-          <pc:sldLayoutMkLst>
-            <pc:docMk/>
-            <pc:sldMasterMk cId="0" sldId="2147485087"/>
-            <pc:sldLayoutMk cId="0" sldId="2147485096"/>
-          </pc:sldLayoutMkLst>
-        </pc:sldLayoutChg>
-        <pc:sldLayoutChg chg="modSp">
-          <pc:chgData name="Zhao Jin" userId="cd05a825-544c-438a-9ba1-08e63db50b47" providerId="ADAL" clId="{37A0D694-38DA-4421-B5D3-DEDBFC2EC57C}" dt="2021-02-03T06:56:12.527" v="36"/>
-          <pc:sldLayoutMkLst>
-            <pc:docMk/>
-            <pc:sldMasterMk cId="0" sldId="2147485087"/>
-            <pc:sldLayoutMk cId="0" sldId="2147485097"/>
-          </pc:sldLayoutMkLst>
-        </pc:sldLayoutChg>
-        <pc:sldLayoutChg chg="modSp">
-          <pc:chgData name="Zhao Jin" userId="cd05a825-544c-438a-9ba1-08e63db50b47" providerId="ADAL" clId="{37A0D694-38DA-4421-B5D3-DEDBFC2EC57C}" dt="2021-02-03T06:56:12.527" v="36"/>
-          <pc:sldLayoutMkLst>
-            <pc:docMk/>
-            <pc:sldMasterMk cId="0" sldId="2147485087"/>
-            <pc:sldLayoutMk cId="0" sldId="2147485098"/>
-          </pc:sldLayoutMkLst>
-        </pc:sldLayoutChg>
-      </pc:sldMasterChg>
-    </pc:docChg>
-  </pc:docChgLst>
-  <pc:docChgLst>
-    <pc:chgData name="Zhao Jin" userId="cd05a825-544c-438a-9ba1-08e63db50b47" providerId="ADAL" clId="{B24B02F7-7905-4588-AF93-2F3E26C169C6}"/>
-    <pc:docChg chg="undo redo custSel addSld delSld modSld modMainMaster">
-      <pc:chgData name="Zhao Jin" userId="cd05a825-544c-438a-9ba1-08e63db50b47" providerId="ADAL" clId="{B24B02F7-7905-4588-AF93-2F3E26C169C6}" dt="2021-02-15T05:41:42.563" v="2814" actId="20577"/>
-      <pc:docMkLst>
-        <pc:docMk/>
-      </pc:docMkLst>
-      <pc:sldChg chg="modSp mod">
-        <pc:chgData name="Zhao Jin" userId="cd05a825-544c-438a-9ba1-08e63db50b47" providerId="ADAL" clId="{B24B02F7-7905-4588-AF93-2F3E26C169C6}" dt="2021-02-10T03:54:53.078" v="11" actId="20577"/>
-        <pc:sldMkLst>
-          <pc:docMk/>
-          <pc:sldMk cId="0" sldId="256"/>
-        </pc:sldMkLst>
-      </pc:sldChg>
-      <pc:sldChg chg="modSp mod">
-        <pc:chgData name="Zhao Jin" userId="cd05a825-544c-438a-9ba1-08e63db50b47" providerId="ADAL" clId="{B24B02F7-7905-4588-AF93-2F3E26C169C6}" dt="2021-02-15T05:40:06.780" v="2547" actId="20577"/>
-        <pc:sldMkLst>
-          <pc:docMk/>
-          <pc:sldMk cId="2438607696" sldId="468"/>
-        </pc:sldMkLst>
-      </pc:sldChg>
-      <pc:sldChg chg="modSp add mod">
-        <pc:chgData name="Zhao Jin" userId="cd05a825-544c-438a-9ba1-08e63db50b47" providerId="ADAL" clId="{B24B02F7-7905-4588-AF93-2F3E26C169C6}" dt="2021-02-15T05:41:42.563" v="2814" actId="20577"/>
-        <pc:sldMkLst>
-          <pc:docMk/>
-          <pc:sldMk cId="1067695719" sldId="526"/>
-        </pc:sldMkLst>
-      </pc:sldChg>
-      <pc:sldChg chg="modSp del">
-        <pc:chgData name="Zhao Jin" userId="cd05a825-544c-438a-9ba1-08e63db50b47" providerId="ADAL" clId="{B24B02F7-7905-4588-AF93-2F3E26C169C6}" dt="2021-02-11T11:05:45.269" v="2429" actId="47"/>
-        <pc:sldMkLst>
-          <pc:docMk/>
-          <pc:sldMk cId="1705639840" sldId="543"/>
-        </pc:sldMkLst>
-      </pc:sldChg>
-      <pc:sldChg chg="addSp modSp add del mod modAnim">
-        <pc:chgData name="Zhao Jin" userId="cd05a825-544c-438a-9ba1-08e63db50b47" providerId="ADAL" clId="{B24B02F7-7905-4588-AF93-2F3E26C169C6}" dt="2021-02-11T10:34:24.898" v="941" actId="207"/>
-        <pc:sldMkLst>
-          <pc:docMk/>
-          <pc:sldMk cId="2573090601" sldId="546"/>
-        </pc:sldMkLst>
-      </pc:sldChg>
-      <pc:sldChg chg="addSp delSp modSp mod modAnim">
-        <pc:chgData name="Zhao Jin" userId="cd05a825-544c-438a-9ba1-08e63db50b47" providerId="ADAL" clId="{B24B02F7-7905-4588-AF93-2F3E26C169C6}" dt="2021-02-11T10:46:20.240" v="1768" actId="6549"/>
-        <pc:sldMkLst>
-          <pc:docMk/>
-          <pc:sldMk cId="1427618944" sldId="553"/>
-        </pc:sldMkLst>
-      </pc:sldChg>
-      <pc:sldChg chg="modSp del">
-        <pc:chgData name="Zhao Jin" userId="cd05a825-544c-438a-9ba1-08e63db50b47" providerId="ADAL" clId="{B24B02F7-7905-4588-AF93-2F3E26C169C6}" dt="2021-02-11T11:05:45.269" v="2429" actId="47"/>
-        <pc:sldMkLst>
-          <pc:docMk/>
-          <pc:sldMk cId="487843573" sldId="558"/>
-        </pc:sldMkLst>
-      </pc:sldChg>
-      <pc:sldChg chg="modSp del">
-        <pc:chgData name="Zhao Jin" userId="cd05a825-544c-438a-9ba1-08e63db50b47" providerId="ADAL" clId="{B24B02F7-7905-4588-AF93-2F3E26C169C6}" dt="2021-02-11T10:14:03.499" v="27" actId="47"/>
-        <pc:sldMkLst>
-          <pc:docMk/>
-          <pc:sldMk cId="92291925" sldId="563"/>
-        </pc:sldMkLst>
-      </pc:sldChg>
-      <pc:sldChg chg="modSp del">
-        <pc:chgData name="Zhao Jin" userId="cd05a825-544c-438a-9ba1-08e63db50b47" providerId="ADAL" clId="{B24B02F7-7905-4588-AF93-2F3E26C169C6}" dt="2021-02-11T11:05:45.269" v="2429" actId="47"/>
-        <pc:sldMkLst>
-          <pc:docMk/>
-          <pc:sldMk cId="894186310" sldId="564"/>
-        </pc:sldMkLst>
-      </pc:sldChg>
-      <pc:sldChg chg="modSp del">
-        <pc:chgData name="Zhao Jin" userId="cd05a825-544c-438a-9ba1-08e63db50b47" providerId="ADAL" clId="{B24B02F7-7905-4588-AF93-2F3E26C169C6}" dt="2021-02-11T11:05:45.269" v="2429" actId="47"/>
-        <pc:sldMkLst>
-          <pc:docMk/>
-          <pc:sldMk cId="1732540191" sldId="568"/>
-        </pc:sldMkLst>
-      </pc:sldChg>
-      <pc:sldChg chg="modSp del mod">
-        <pc:chgData name="Zhao Jin" userId="cd05a825-544c-438a-9ba1-08e63db50b47" providerId="ADAL" clId="{B24B02F7-7905-4588-AF93-2F3E26C169C6}" dt="2021-02-11T11:05:45.269" v="2429" actId="47"/>
-        <pc:sldMkLst>
-          <pc:docMk/>
-          <pc:sldMk cId="3229890649" sldId="569"/>
-        </pc:sldMkLst>
-      </pc:sldChg>
-      <pc:sldChg chg="modSp del">
-        <pc:chgData name="Zhao Jin" userId="cd05a825-544c-438a-9ba1-08e63db50b47" providerId="ADAL" clId="{B24B02F7-7905-4588-AF93-2F3E26C169C6}" dt="2021-02-11T11:05:45.269" v="2429" actId="47"/>
-        <pc:sldMkLst>
-          <pc:docMk/>
-          <pc:sldMk cId="3922430229" sldId="580"/>
-        </pc:sldMkLst>
-      </pc:sldChg>
-      <pc:sldChg chg="modSp del">
-        <pc:chgData name="Zhao Jin" userId="cd05a825-544c-438a-9ba1-08e63db50b47" providerId="ADAL" clId="{B24B02F7-7905-4588-AF93-2F3E26C169C6}" dt="2021-02-11T11:05:45.269" v="2429" actId="47"/>
-        <pc:sldMkLst>
-          <pc:docMk/>
-          <pc:sldMk cId="1886636263" sldId="581"/>
-        </pc:sldMkLst>
-      </pc:sldChg>
-      <pc:sldChg chg="modSp del">
-        <pc:chgData name="Zhao Jin" userId="cd05a825-544c-438a-9ba1-08e63db50b47" providerId="ADAL" clId="{B24B02F7-7905-4588-AF93-2F3E26C169C6}" dt="2021-02-11T11:05:45.269" v="2429" actId="47"/>
-        <pc:sldMkLst>
-          <pc:docMk/>
-          <pc:sldMk cId="211149325" sldId="589"/>
-        </pc:sldMkLst>
-      </pc:sldChg>
-      <pc:sldChg chg="modSp del">
-        <pc:chgData name="Zhao Jin" userId="cd05a825-544c-438a-9ba1-08e63db50b47" providerId="ADAL" clId="{B24B02F7-7905-4588-AF93-2F3E26C169C6}" dt="2021-02-11T11:05:45.269" v="2429" actId="47"/>
-        <pc:sldMkLst>
-          <pc:docMk/>
-          <pc:sldMk cId="4156536479" sldId="590"/>
-        </pc:sldMkLst>
-      </pc:sldChg>
-      <pc:sldChg chg="modSp del">
-        <pc:chgData name="Zhao Jin" userId="cd05a825-544c-438a-9ba1-08e63db50b47" providerId="ADAL" clId="{B24B02F7-7905-4588-AF93-2F3E26C169C6}" dt="2021-02-11T11:05:45.269" v="2429" actId="47"/>
-        <pc:sldMkLst>
-          <pc:docMk/>
-          <pc:sldMk cId="567798019" sldId="591"/>
-        </pc:sldMkLst>
-      </pc:sldChg>
-      <pc:sldChg chg="modSp del">
-        <pc:chgData name="Zhao Jin" userId="cd05a825-544c-438a-9ba1-08e63db50b47" providerId="ADAL" clId="{B24B02F7-7905-4588-AF93-2F3E26C169C6}" dt="2021-02-11T11:05:45.269" v="2429" actId="47"/>
-        <pc:sldMkLst>
-          <pc:docMk/>
-          <pc:sldMk cId="137810324" sldId="592"/>
-        </pc:sldMkLst>
-      </pc:sldChg>
-      <pc:sldChg chg="modSp del">
-        <pc:chgData name="Zhao Jin" userId="cd05a825-544c-438a-9ba1-08e63db50b47" providerId="ADAL" clId="{B24B02F7-7905-4588-AF93-2F3E26C169C6}" dt="2021-02-11T11:05:45.269" v="2429" actId="47"/>
-        <pc:sldMkLst>
-          <pc:docMk/>
-          <pc:sldMk cId="3233082706" sldId="593"/>
-        </pc:sldMkLst>
-      </pc:sldChg>
-      <pc:sldChg chg="modSp del">
-        <pc:chgData name="Zhao Jin" userId="cd05a825-544c-438a-9ba1-08e63db50b47" providerId="ADAL" clId="{B24B02F7-7905-4588-AF93-2F3E26C169C6}" dt="2021-02-11T11:05:45.269" v="2429" actId="47"/>
-        <pc:sldMkLst>
-          <pc:docMk/>
-          <pc:sldMk cId="2217225800" sldId="594"/>
-        </pc:sldMkLst>
-      </pc:sldChg>
-      <pc:sldChg chg="modSp del">
-        <pc:chgData name="Zhao Jin" userId="cd05a825-544c-438a-9ba1-08e63db50b47" providerId="ADAL" clId="{B24B02F7-7905-4588-AF93-2F3E26C169C6}" dt="2021-02-11T11:05:45.269" v="2429" actId="47"/>
-        <pc:sldMkLst>
-          <pc:docMk/>
-          <pc:sldMk cId="2419983458" sldId="595"/>
-        </pc:sldMkLst>
-      </pc:sldChg>
-      <pc:sldChg chg="modSp del">
-        <pc:chgData name="Zhao Jin" userId="cd05a825-544c-438a-9ba1-08e63db50b47" providerId="ADAL" clId="{B24B02F7-7905-4588-AF93-2F3E26C169C6}" dt="2021-02-11T11:05:45.269" v="2429" actId="47"/>
-        <pc:sldMkLst>
-          <pc:docMk/>
-          <pc:sldMk cId="3643682471" sldId="596"/>
-        </pc:sldMkLst>
-      </pc:sldChg>
-      <pc:sldChg chg="modSp del">
-        <pc:chgData name="Zhao Jin" userId="cd05a825-544c-438a-9ba1-08e63db50b47" providerId="ADAL" clId="{B24B02F7-7905-4588-AF93-2F3E26C169C6}" dt="2021-02-11T11:05:45.269" v="2429" actId="47"/>
-        <pc:sldMkLst>
-          <pc:docMk/>
-          <pc:sldMk cId="3231946261" sldId="597"/>
-        </pc:sldMkLst>
-      </pc:sldChg>
-      <pc:sldChg chg="modSp del">
-        <pc:chgData name="Zhao Jin" userId="cd05a825-544c-438a-9ba1-08e63db50b47" providerId="ADAL" clId="{B24B02F7-7905-4588-AF93-2F3E26C169C6}" dt="2021-02-11T11:05:45.269" v="2429" actId="47"/>
-        <pc:sldMkLst>
-          <pc:docMk/>
-          <pc:sldMk cId="4002657513" sldId="598"/>
-        </pc:sldMkLst>
-      </pc:sldChg>
-      <pc:sldChg chg="modSp del">
-        <pc:chgData name="Zhao Jin" userId="cd05a825-544c-438a-9ba1-08e63db50b47" providerId="ADAL" clId="{B24B02F7-7905-4588-AF93-2F3E26C169C6}" dt="2021-02-11T11:05:45.269" v="2429" actId="47"/>
-        <pc:sldMkLst>
-          <pc:docMk/>
-          <pc:sldMk cId="2930953569" sldId="599"/>
-        </pc:sldMkLst>
-      </pc:sldChg>
-      <pc:sldChg chg="modSp del">
-        <pc:chgData name="Zhao Jin" userId="cd05a825-544c-438a-9ba1-08e63db50b47" providerId="ADAL" clId="{B24B02F7-7905-4588-AF93-2F3E26C169C6}" dt="2021-02-11T11:05:45.269" v="2429" actId="47"/>
-        <pc:sldMkLst>
-          <pc:docMk/>
-          <pc:sldMk cId="880934081" sldId="600"/>
-        </pc:sldMkLst>
-      </pc:sldChg>
-      <pc:sldChg chg="addSp delSp modSp add mod modAnim">
-        <pc:chgData name="Zhao Jin" userId="cd05a825-544c-438a-9ba1-08e63db50b47" providerId="ADAL" clId="{B24B02F7-7905-4588-AF93-2F3E26C169C6}" dt="2021-02-11T10:46:14.362" v="1753" actId="20577"/>
-        <pc:sldMkLst>
-          <pc:docMk/>
-          <pc:sldMk cId="1094276337" sldId="601"/>
-        </pc:sldMkLst>
-      </pc:sldChg>
-      <pc:sldChg chg="addSp delSp modSp add mod delAnim modAnim">
-        <pc:chgData name="Zhao Jin" userId="cd05a825-544c-438a-9ba1-08e63db50b47" providerId="ADAL" clId="{B24B02F7-7905-4588-AF93-2F3E26C169C6}" dt="2021-02-11T11:02:40.633" v="2305" actId="207"/>
-        <pc:sldMkLst>
-          <pc:docMk/>
-          <pc:sldMk cId="1542002799" sldId="602"/>
-        </pc:sldMkLst>
-      </pc:sldChg>
-      <pc:sldChg chg="delSp modSp add mod delAnim">
-        <pc:chgData name="Zhao Jin" userId="cd05a825-544c-438a-9ba1-08e63db50b47" providerId="ADAL" clId="{B24B02F7-7905-4588-AF93-2F3E26C169C6}" dt="2021-02-11T11:05:31.419" v="2428" actId="207"/>
-        <pc:sldMkLst>
-          <pc:docMk/>
-          <pc:sldMk cId="830535321" sldId="603"/>
-        </pc:sldMkLst>
-      </pc:sldChg>
-      <pc:sldChg chg="add del">
-        <pc:chgData name="Zhao Jin" userId="cd05a825-544c-438a-9ba1-08e63db50b47" providerId="ADAL" clId="{B24B02F7-7905-4588-AF93-2F3E26C169C6}" dt="2021-02-11T11:11:11.059" v="2431" actId="47"/>
-        <pc:sldMkLst>
-          <pc:docMk/>
-          <pc:sldMk cId="3335349144" sldId="604"/>
-        </pc:sldMkLst>
-      </pc:sldChg>
-      <pc:sldMasterChg chg="modSp modSldLayout">
-        <pc:chgData name="Zhao Jin" userId="cd05a825-544c-438a-9ba1-08e63db50b47" providerId="ADAL" clId="{B24B02F7-7905-4588-AF93-2F3E26C169C6}" dt="2021-02-10T03:55:18.143" v="13"/>
-        <pc:sldMasterMkLst>
-          <pc:docMk/>
-          <pc:sldMasterMk cId="0" sldId="2147485087"/>
-        </pc:sldMasterMkLst>
-        <pc:sldLayoutChg chg="modSp">
-          <pc:chgData name="Zhao Jin" userId="cd05a825-544c-438a-9ba1-08e63db50b47" providerId="ADAL" clId="{B24B02F7-7905-4588-AF93-2F3E26C169C6}" dt="2021-02-10T03:55:18.143" v="13"/>
-          <pc:sldLayoutMkLst>
-            <pc:docMk/>
-            <pc:sldMasterMk cId="0" sldId="2147485087"/>
-            <pc:sldLayoutMk cId="0" sldId="2147485088"/>
-          </pc:sldLayoutMkLst>
-        </pc:sldLayoutChg>
-        <pc:sldLayoutChg chg="modSp">
-          <pc:chgData name="Zhao Jin" userId="cd05a825-544c-438a-9ba1-08e63db50b47" providerId="ADAL" clId="{B24B02F7-7905-4588-AF93-2F3E26C169C6}" dt="2021-02-10T03:55:18.143" v="13"/>
-          <pc:sldLayoutMkLst>
-            <pc:docMk/>
-            <pc:sldMasterMk cId="0" sldId="2147485087"/>
-            <pc:sldLayoutMk cId="0" sldId="2147485089"/>
-          </pc:sldLayoutMkLst>
-        </pc:sldLayoutChg>
-        <pc:sldLayoutChg chg="modSp">
-          <pc:chgData name="Zhao Jin" userId="cd05a825-544c-438a-9ba1-08e63db50b47" providerId="ADAL" clId="{B24B02F7-7905-4588-AF93-2F3E26C169C6}" dt="2021-02-10T03:55:18.143" v="13"/>
-          <pc:sldLayoutMkLst>
-            <pc:docMk/>
-            <pc:sldMasterMk cId="0" sldId="2147485087"/>
-            <pc:sldLayoutMk cId="0" sldId="2147485090"/>
-          </pc:sldLayoutMkLst>
-        </pc:sldLayoutChg>
-        <pc:sldLayoutChg chg="modSp">
-          <pc:chgData name="Zhao Jin" userId="cd05a825-544c-438a-9ba1-08e63db50b47" providerId="ADAL" clId="{B24B02F7-7905-4588-AF93-2F3E26C169C6}" dt="2021-02-10T03:55:18.143" v="13"/>
-          <pc:sldLayoutMkLst>
-            <pc:docMk/>
-            <pc:sldMasterMk cId="0" sldId="2147485087"/>
-            <pc:sldLayoutMk cId="0" sldId="2147485091"/>
-          </pc:sldLayoutMkLst>
-        </pc:sldLayoutChg>
-        <pc:sldLayoutChg chg="modSp">
-          <pc:chgData name="Zhao Jin" userId="cd05a825-544c-438a-9ba1-08e63db50b47" providerId="ADAL" clId="{B24B02F7-7905-4588-AF93-2F3E26C169C6}" dt="2021-02-10T03:55:18.143" v="13"/>
-          <pc:sldLayoutMkLst>
-            <pc:docMk/>
-            <pc:sldMasterMk cId="0" sldId="2147485087"/>
-            <pc:sldLayoutMk cId="0" sldId="2147485092"/>
-          </pc:sldLayoutMkLst>
-        </pc:sldLayoutChg>
-        <pc:sldLayoutChg chg="modSp">
-          <pc:chgData name="Zhao Jin" userId="cd05a825-544c-438a-9ba1-08e63db50b47" providerId="ADAL" clId="{B24B02F7-7905-4588-AF93-2F3E26C169C6}" dt="2021-02-10T03:55:18.143" v="13"/>
-          <pc:sldLayoutMkLst>
-            <pc:docMk/>
-            <pc:sldMasterMk cId="0" sldId="2147485087"/>
-            <pc:sldLayoutMk cId="0" sldId="2147485093"/>
-          </pc:sldLayoutMkLst>
-        </pc:sldLayoutChg>
-        <pc:sldLayoutChg chg="modSp">
-          <pc:chgData name="Zhao Jin" userId="cd05a825-544c-438a-9ba1-08e63db50b47" providerId="ADAL" clId="{B24B02F7-7905-4588-AF93-2F3E26C169C6}" dt="2021-02-10T03:55:18.143" v="13"/>
-          <pc:sldLayoutMkLst>
-            <pc:docMk/>
-            <pc:sldMasterMk cId="0" sldId="2147485087"/>
-            <pc:sldLayoutMk cId="0" sldId="2147485094"/>
-          </pc:sldLayoutMkLst>
-        </pc:sldLayoutChg>
-        <pc:sldLayoutChg chg="modSp">
-          <pc:chgData name="Zhao Jin" userId="cd05a825-544c-438a-9ba1-08e63db50b47" providerId="ADAL" clId="{B24B02F7-7905-4588-AF93-2F3E26C169C6}" dt="2021-02-10T03:55:18.143" v="13"/>
-          <pc:sldLayoutMkLst>
-            <pc:docMk/>
-            <pc:sldMasterMk cId="0" sldId="2147485087"/>
-            <pc:sldLayoutMk cId="0" sldId="2147485095"/>
-          </pc:sldLayoutMkLst>
-        </pc:sldLayoutChg>
-        <pc:sldLayoutChg chg="modSp">
-          <pc:chgData name="Zhao Jin" userId="cd05a825-544c-438a-9ba1-08e63db50b47" providerId="ADAL" clId="{B24B02F7-7905-4588-AF93-2F3E26C169C6}" dt="2021-02-10T03:55:18.143" v="13"/>
-          <pc:sldLayoutMkLst>
-            <pc:docMk/>
-            <pc:sldMasterMk cId="0" sldId="2147485087"/>
-            <pc:sldLayoutMk cId="0" sldId="2147485096"/>
-          </pc:sldLayoutMkLst>
-        </pc:sldLayoutChg>
-        <pc:sldLayoutChg chg="modSp">
-          <pc:chgData name="Zhao Jin" userId="cd05a825-544c-438a-9ba1-08e63db50b47" providerId="ADAL" clId="{B24B02F7-7905-4588-AF93-2F3E26C169C6}" dt="2021-02-10T03:55:18.143" v="13"/>
-          <pc:sldLayoutMkLst>
-            <pc:docMk/>
-            <pc:sldMasterMk cId="0" sldId="2147485087"/>
-            <pc:sldLayoutMk cId="0" sldId="2147485097"/>
-          </pc:sldLayoutMkLst>
-        </pc:sldLayoutChg>
-        <pc:sldLayoutChg chg="modSp">
-          <pc:chgData name="Zhao Jin" userId="cd05a825-544c-438a-9ba1-08e63db50b47" providerId="ADAL" clId="{B24B02F7-7905-4588-AF93-2F3E26C169C6}" dt="2021-02-10T03:55:18.143" v="13"/>
-          <pc:sldLayoutMkLst>
-            <pc:docMk/>
-            <pc:sldMasterMk cId="0" sldId="2147485087"/>
-            <pc:sldLayoutMk cId="0" sldId="2147485098"/>
-          </pc:sldLayoutMkLst>
-        </pc:sldLayoutChg>
-      </pc:sldMasterChg>
-    </pc:docChg>
-  </pc:docChgLst>
-  <pc:docChgLst>
-    <pc:chgData name="Zhao Jin" userId="cd05a825-544c-438a-9ba1-08e63db50b47" providerId="ADAL" clId="{E094A0D3-9008-D44F-B23F-E71F39C2BDEC}"/>
-    <pc:docChg chg="undo custSel addSld delSld modSld sldOrd modMainMaster">
-      <pc:chgData name="Zhao Jin" userId="cd05a825-544c-438a-9ba1-08e63db50b47" providerId="ADAL" clId="{E094A0D3-9008-D44F-B23F-E71F39C2BDEC}" dt="2021-01-27T05:44:46" v="1434" actId="207"/>
-      <pc:docMkLst>
-        <pc:docMk/>
-      </pc:docMkLst>
-      <pc:sldChg chg="modSp">
-        <pc:chgData name="Zhao Jin" userId="cd05a825-544c-438a-9ba1-08e63db50b47" providerId="ADAL" clId="{E094A0D3-9008-D44F-B23F-E71F39C2BDEC}" dt="2021-01-27T04:57:42.438" v="23" actId="20577"/>
-        <pc:sldMkLst>
-          <pc:docMk/>
-          <pc:sldMk cId="0" sldId="256"/>
-        </pc:sldMkLst>
-      </pc:sldChg>
-      <pc:sldChg chg="modSp">
-        <pc:chgData name="Zhao Jin" userId="cd05a825-544c-438a-9ba1-08e63db50b47" providerId="ADAL" clId="{E094A0D3-9008-D44F-B23F-E71F39C2BDEC}" dt="2021-01-27T05:17:21.390" v="251" actId="20577"/>
-        <pc:sldMkLst>
-          <pc:docMk/>
-          <pc:sldMk cId="2438607696" sldId="468"/>
-        </pc:sldMkLst>
-      </pc:sldChg>
-      <pc:sldChg chg="modSp">
-        <pc:chgData name="Zhao Jin" userId="cd05a825-544c-438a-9ba1-08e63db50b47" providerId="ADAL" clId="{E094A0D3-9008-D44F-B23F-E71F39C2BDEC}" dt="2021-01-27T04:58:20.523" v="47"/>
-        <pc:sldMkLst>
-          <pc:docMk/>
-          <pc:sldMk cId="1311126165" sldId="485"/>
-        </pc:sldMkLst>
-      </pc:sldChg>
-      <pc:sldChg chg="modSp add">
-        <pc:chgData name="Zhao Jin" userId="cd05a825-544c-438a-9ba1-08e63db50b47" providerId="ADAL" clId="{E094A0D3-9008-D44F-B23F-E71F39C2BDEC}" dt="2021-01-27T05:17:26.077" v="252" actId="20577"/>
-        <pc:sldMkLst>
-          <pc:docMk/>
-          <pc:sldMk cId="3792232794" sldId="504"/>
-        </pc:sldMkLst>
-      </pc:sldChg>
-      <pc:sldChg chg="modSp">
-        <pc:chgData name="Zhao Jin" userId="cd05a825-544c-438a-9ba1-08e63db50b47" providerId="ADAL" clId="{E094A0D3-9008-D44F-B23F-E71F39C2BDEC}" dt="2021-01-27T04:58:20.523" v="47"/>
-        <pc:sldMkLst>
-          <pc:docMk/>
-          <pc:sldMk cId="681224785" sldId="531"/>
-        </pc:sldMkLst>
-      </pc:sldChg>
-      <pc:sldChg chg="modSp del">
-        <pc:chgData name="Zhao Jin" userId="cd05a825-544c-438a-9ba1-08e63db50b47" providerId="ADAL" clId="{E094A0D3-9008-D44F-B23F-E71F39C2BDEC}" dt="2021-01-27T05:12:53.568" v="127" actId="2696"/>
-        <pc:sldMkLst>
-          <pc:docMk/>
-          <pc:sldMk cId="901453530" sldId="546"/>
-        </pc:sldMkLst>
-      </pc:sldChg>
-      <pc:sldChg chg="modSp add">
-        <pc:chgData name="Zhao Jin" userId="cd05a825-544c-438a-9ba1-08e63db50b47" providerId="ADAL" clId="{E094A0D3-9008-D44F-B23F-E71F39C2BDEC}" dt="2021-01-27T05:17:29.706" v="253" actId="20577"/>
-        <pc:sldMkLst>
-          <pc:docMk/>
-          <pc:sldMk cId="4225956616" sldId="546"/>
-        </pc:sldMkLst>
-      </pc:sldChg>
-      <pc:sldChg chg="modSp del">
-        <pc:chgData name="Zhao Jin" userId="cd05a825-544c-438a-9ba1-08e63db50b47" providerId="ADAL" clId="{E094A0D3-9008-D44F-B23F-E71F39C2BDEC}" dt="2021-01-27T05:16:20.724" v="163" actId="2696"/>
-        <pc:sldMkLst>
-          <pc:docMk/>
-          <pc:sldMk cId="884841463" sldId="547"/>
-        </pc:sldMkLst>
-      </pc:sldChg>
-      <pc:sldChg chg="modSp">
-        <pc:chgData name="Zhao Jin" userId="cd05a825-544c-438a-9ba1-08e63db50b47" providerId="ADAL" clId="{E094A0D3-9008-D44F-B23F-E71F39C2BDEC}" dt="2021-01-27T04:58:20.523" v="47"/>
-        <pc:sldMkLst>
-          <pc:docMk/>
-          <pc:sldMk cId="1617257579" sldId="548"/>
-        </pc:sldMkLst>
-      </pc:sldChg>
-      <pc:sldChg chg="modSp">
-        <pc:chgData name="Zhao Jin" userId="cd05a825-544c-438a-9ba1-08e63db50b47" providerId="ADAL" clId="{E094A0D3-9008-D44F-B23F-E71F39C2BDEC}" dt="2021-01-27T04:58:20.523" v="47"/>
-        <pc:sldMkLst>
-          <pc:docMk/>
-          <pc:sldMk cId="3394924879" sldId="549"/>
-        </pc:sldMkLst>
-      </pc:sldChg>
-      <pc:sldChg chg="modSp">
-        <pc:chgData name="Zhao Jin" userId="cd05a825-544c-438a-9ba1-08e63db50b47" providerId="ADAL" clId="{E094A0D3-9008-D44F-B23F-E71F39C2BDEC}" dt="2021-01-27T04:58:20.523" v="47"/>
-        <pc:sldMkLst>
-          <pc:docMk/>
-          <pc:sldMk cId="784668950" sldId="550"/>
-        </pc:sldMkLst>
-      </pc:sldChg>
-      <pc:sldChg chg="modSp add del">
-        <pc:chgData name="Zhao Jin" userId="cd05a825-544c-438a-9ba1-08e63db50b47" providerId="ADAL" clId="{E094A0D3-9008-D44F-B23F-E71F39C2BDEC}" dt="2021-01-27T05:17:38.111" v="258" actId="2696"/>
-        <pc:sldMkLst>
-          <pc:docMk/>
-          <pc:sldMk cId="2538842699" sldId="551"/>
-        </pc:sldMkLst>
-      </pc:sldChg>
-      <pc:sldChg chg="addSp delSp modSp add delAnim">
-        <pc:chgData name="Zhao Jin" userId="cd05a825-544c-438a-9ba1-08e63db50b47" providerId="ADAL" clId="{E094A0D3-9008-D44F-B23F-E71F39C2BDEC}" dt="2021-01-27T05:22:23.124" v="370" actId="20577"/>
-        <pc:sldMkLst>
-          <pc:docMk/>
-          <pc:sldMk cId="3422194935" sldId="552"/>
-        </pc:sldMkLst>
-      </pc:sldChg>
-      <pc:sldChg chg="add del">
-        <pc:chgData name="Zhao Jin" userId="cd05a825-544c-438a-9ba1-08e63db50b47" providerId="ADAL" clId="{E094A0D3-9008-D44F-B23F-E71F39C2BDEC}" dt="2021-01-27T05:18:00.826" v="262"/>
-        <pc:sldMkLst>
-          <pc:docMk/>
-          <pc:sldMk cId="153180961" sldId="553"/>
-        </pc:sldMkLst>
-      </pc:sldChg>
-      <pc:sldChg chg="modSp add">
-        <pc:chgData name="Zhao Jin" userId="cd05a825-544c-438a-9ba1-08e63db50b47" providerId="ADAL" clId="{E094A0D3-9008-D44F-B23F-E71F39C2BDEC}" dt="2021-01-27T05:33:55.712" v="791" actId="14100"/>
-        <pc:sldMkLst>
-          <pc:docMk/>
-          <pc:sldMk cId="1427618944" sldId="553"/>
-        </pc:sldMkLst>
-      </pc:sldChg>
-      <pc:sldChg chg="addSp delSp modSp add ord delAnim modAnim">
-        <pc:chgData name="Zhao Jin" userId="cd05a825-544c-438a-9ba1-08e63db50b47" providerId="ADAL" clId="{E094A0D3-9008-D44F-B23F-E71F39C2BDEC}" dt="2021-01-27T05:37:50.456" v="1042" actId="1035"/>
-        <pc:sldMkLst>
-          <pc:docMk/>
-          <pc:sldMk cId="1659983766" sldId="554"/>
-        </pc:sldMkLst>
-      </pc:sldChg>
-      <pc:sldChg chg="addSp delSp modSp add">
-        <pc:chgData name="Zhao Jin" userId="cd05a825-544c-438a-9ba1-08e63db50b47" providerId="ADAL" clId="{E094A0D3-9008-D44F-B23F-E71F39C2BDEC}" dt="2021-01-27T05:44:46" v="1434" actId="207"/>
-        <pc:sldMkLst>
-          <pc:docMk/>
-          <pc:sldMk cId="1268238251" sldId="555"/>
-        </pc:sldMkLst>
-      </pc:sldChg>
-      <pc:sldMasterChg chg="modSp modSldLayout">
-        <pc:chgData name="Zhao Jin" userId="cd05a825-544c-438a-9ba1-08e63db50b47" providerId="ADAL" clId="{E094A0D3-9008-D44F-B23F-E71F39C2BDEC}" dt="2021-01-27T04:58:20.523" v="47"/>
-        <pc:sldMasterMkLst>
-          <pc:docMk/>
-          <pc:sldMasterMk cId="0" sldId="2147485087"/>
-        </pc:sldMasterMkLst>
-        <pc:sldLayoutChg chg="modSp">
-          <pc:chgData name="Zhao Jin" userId="cd05a825-544c-438a-9ba1-08e63db50b47" providerId="ADAL" clId="{E094A0D3-9008-D44F-B23F-E71F39C2BDEC}" dt="2021-01-27T04:58:20.523" v="47"/>
-          <pc:sldLayoutMkLst>
-            <pc:docMk/>
-            <pc:sldMasterMk cId="0" sldId="2147485087"/>
-            <pc:sldLayoutMk cId="0" sldId="2147485088"/>
-          </pc:sldLayoutMkLst>
-        </pc:sldLayoutChg>
-        <pc:sldLayoutChg chg="modSp">
-          <pc:chgData name="Zhao Jin" userId="cd05a825-544c-438a-9ba1-08e63db50b47" providerId="ADAL" clId="{E094A0D3-9008-D44F-B23F-E71F39C2BDEC}" dt="2021-01-27T04:58:20.523" v="47"/>
-          <pc:sldLayoutMkLst>
-            <pc:docMk/>
-            <pc:sldMasterMk cId="0" sldId="2147485087"/>
-            <pc:sldLayoutMk cId="0" sldId="2147485089"/>
-          </pc:sldLayoutMkLst>
-        </pc:sldLayoutChg>
-        <pc:sldLayoutChg chg="modSp">
-          <pc:chgData name="Zhao Jin" userId="cd05a825-544c-438a-9ba1-08e63db50b47" providerId="ADAL" clId="{E094A0D3-9008-D44F-B23F-E71F39C2BDEC}" dt="2021-01-27T04:58:20.523" v="47"/>
-          <pc:sldLayoutMkLst>
-            <pc:docMk/>
-            <pc:sldMasterMk cId="0" sldId="2147485087"/>
-            <pc:sldLayoutMk cId="0" sldId="2147485090"/>
-          </pc:sldLayoutMkLst>
-        </pc:sldLayoutChg>
-        <pc:sldLayoutChg chg="modSp">
-          <pc:chgData name="Zhao Jin" userId="cd05a825-544c-438a-9ba1-08e63db50b47" providerId="ADAL" clId="{E094A0D3-9008-D44F-B23F-E71F39C2BDEC}" dt="2021-01-27T04:58:20.523" v="47"/>
-          <pc:sldLayoutMkLst>
-            <pc:docMk/>
-            <pc:sldMasterMk cId="0" sldId="2147485087"/>
-            <pc:sldLayoutMk cId="0" sldId="2147485091"/>
-          </pc:sldLayoutMkLst>
-        </pc:sldLayoutChg>
-        <pc:sldLayoutChg chg="modSp">
-          <pc:chgData name="Zhao Jin" userId="cd05a825-544c-438a-9ba1-08e63db50b47" providerId="ADAL" clId="{E094A0D3-9008-D44F-B23F-E71F39C2BDEC}" dt="2021-01-27T04:58:20.523" v="47"/>
-          <pc:sldLayoutMkLst>
-            <pc:docMk/>
-            <pc:sldMasterMk cId="0" sldId="2147485087"/>
-            <pc:sldLayoutMk cId="0" sldId="2147485092"/>
-          </pc:sldLayoutMkLst>
-        </pc:sldLayoutChg>
-        <pc:sldLayoutChg chg="modSp">
-          <pc:chgData name="Zhao Jin" userId="cd05a825-544c-438a-9ba1-08e63db50b47" providerId="ADAL" clId="{E094A0D3-9008-D44F-B23F-E71F39C2BDEC}" dt="2021-01-27T04:58:20.523" v="47"/>
-          <pc:sldLayoutMkLst>
-            <pc:docMk/>
-            <pc:sldMasterMk cId="0" sldId="2147485087"/>
-            <pc:sldLayoutMk cId="0" sldId="2147485093"/>
-          </pc:sldLayoutMkLst>
-        </pc:sldLayoutChg>
-        <pc:sldLayoutChg chg="modSp">
-          <pc:chgData name="Zhao Jin" userId="cd05a825-544c-438a-9ba1-08e63db50b47" providerId="ADAL" clId="{E094A0D3-9008-D44F-B23F-E71F39C2BDEC}" dt="2021-01-27T04:58:20.523" v="47"/>
-          <pc:sldLayoutMkLst>
-            <pc:docMk/>
-            <pc:sldMasterMk cId="0" sldId="2147485087"/>
-            <pc:sldLayoutMk cId="0" sldId="2147485094"/>
-          </pc:sldLayoutMkLst>
-        </pc:sldLayoutChg>
-        <pc:sldLayoutChg chg="modSp">
-          <pc:chgData name="Zhao Jin" userId="cd05a825-544c-438a-9ba1-08e63db50b47" providerId="ADAL" clId="{E094A0D3-9008-D44F-B23F-E71F39C2BDEC}" dt="2021-01-27T04:58:20.523" v="47"/>
-          <pc:sldLayoutMkLst>
-            <pc:docMk/>
-            <pc:sldMasterMk cId="0" sldId="2147485087"/>
-            <pc:sldLayoutMk cId="0" sldId="2147485095"/>
-          </pc:sldLayoutMkLst>
-        </pc:sldLayoutChg>
-        <pc:sldLayoutChg chg="modSp">
-          <pc:chgData name="Zhao Jin" userId="cd05a825-544c-438a-9ba1-08e63db50b47" providerId="ADAL" clId="{E094A0D3-9008-D44F-B23F-E71F39C2BDEC}" dt="2021-01-27T04:58:20.523" v="47"/>
-          <pc:sldLayoutMkLst>
-            <pc:docMk/>
-            <pc:sldMasterMk cId="0" sldId="2147485087"/>
-            <pc:sldLayoutMk cId="0" sldId="2147485096"/>
-          </pc:sldLayoutMkLst>
-        </pc:sldLayoutChg>
-        <pc:sldLayoutChg chg="modSp">
-          <pc:chgData name="Zhao Jin" userId="cd05a825-544c-438a-9ba1-08e63db50b47" providerId="ADAL" clId="{E094A0D3-9008-D44F-B23F-E71F39C2BDEC}" dt="2021-01-27T04:58:20.523" v="47"/>
-          <pc:sldLayoutMkLst>
-            <pc:docMk/>
-            <pc:sldMasterMk cId="0" sldId="2147485087"/>
-            <pc:sldLayoutMk cId="0" sldId="2147485097"/>
-          </pc:sldLayoutMkLst>
-        </pc:sldLayoutChg>
-        <pc:sldLayoutChg chg="modSp">
-          <pc:chgData name="Zhao Jin" userId="cd05a825-544c-438a-9ba1-08e63db50b47" providerId="ADAL" clId="{E094A0D3-9008-D44F-B23F-E71F39C2BDEC}" dt="2021-01-27T04:58:20.523" v="47"/>
-          <pc:sldLayoutMkLst>
-            <pc:docMk/>
-            <pc:sldMasterMk cId="0" sldId="2147485087"/>
-            <pc:sldLayoutMk cId="0" sldId="2147485098"/>
-          </pc:sldLayoutMkLst>
-        </pc:sldLayoutChg>
-      </pc:sldMasterChg>
-    </pc:docChg>
-  </pc:docChgLst>
-  <pc:docChgLst>
-    <pc:chgData name="Zhao Jin" userId="cd05a825-544c-438a-9ba1-08e63db50b47" providerId="ADAL" clId="{2F5160B5-190D-47F4-8B49-2756B7773FD5}"/>
-    <pc:docChg chg="undo custSel addSld delSld modSld">
-      <pc:chgData name="Zhao Jin" userId="cd05a825-544c-438a-9ba1-08e63db50b47" providerId="ADAL" clId="{2F5160B5-190D-47F4-8B49-2756B7773FD5}" dt="2021-04-06T05:17:49.620" v="4079" actId="207"/>
-      <pc:docMkLst>
-        <pc:docMk/>
-      </pc:docMkLst>
-      <pc:sldChg chg="modSp mod">
-        <pc:chgData name="Zhao Jin" userId="cd05a825-544c-438a-9ba1-08e63db50b47" providerId="ADAL" clId="{2F5160B5-190D-47F4-8B49-2756B7773FD5}" dt="2021-03-10T04:12:52.019" v="7" actId="20577"/>
-        <pc:sldMkLst>
-          <pc:docMk/>
-          <pc:sldMk cId="0" sldId="256"/>
-        </pc:sldMkLst>
-      </pc:sldChg>
-      <pc:sldChg chg="modSp mod">
-        <pc:chgData name="Zhao Jin" userId="cd05a825-544c-438a-9ba1-08e63db50b47" providerId="ADAL" clId="{2F5160B5-190D-47F4-8B49-2756B7773FD5}" dt="2021-04-05T00:56:54.534" v="4031" actId="20577"/>
-        <pc:sldMkLst>
-          <pc:docMk/>
-          <pc:sldMk cId="2438607696" sldId="468"/>
-        </pc:sldMkLst>
-      </pc:sldChg>
-      <pc:sldChg chg="del">
-        <pc:chgData name="Zhao Jin" userId="cd05a825-544c-438a-9ba1-08e63db50b47" providerId="ADAL" clId="{2F5160B5-190D-47F4-8B49-2756B7773FD5}" dt="2021-03-16T06:19:40.055" v="3726" actId="47"/>
-        <pc:sldMkLst>
-          <pc:docMk/>
-          <pc:sldMk cId="1067695719" sldId="526"/>
-        </pc:sldMkLst>
-      </pc:sldChg>
-      <pc:sldChg chg="delSp modSp add mod delAnim">
-        <pc:chgData name="Zhao Jin" userId="cd05a825-544c-438a-9ba1-08e63db50b47" providerId="ADAL" clId="{2F5160B5-190D-47F4-8B49-2756B7773FD5}" dt="2021-04-05T01:09:51.386" v="4056" actId="20577"/>
-        <pc:sldMkLst>
-          <pc:docMk/>
-          <pc:sldMk cId="2573090601" sldId="546"/>
-        </pc:sldMkLst>
-      </pc:sldChg>
-      <pc:sldChg chg="del">
-        <pc:chgData name="Zhao Jin" userId="cd05a825-544c-438a-9ba1-08e63db50b47" providerId="ADAL" clId="{2F5160B5-190D-47F4-8B49-2756B7773FD5}" dt="2021-03-16T05:16:03.511" v="722" actId="47"/>
-        <pc:sldMkLst>
-          <pc:docMk/>
-          <pc:sldMk cId="1427618944" sldId="553"/>
-        </pc:sldMkLst>
-      </pc:sldChg>
-      <pc:sldChg chg="delSp modSp add mod">
-        <pc:chgData name="Zhao Jin" userId="cd05a825-544c-438a-9ba1-08e63db50b47" providerId="ADAL" clId="{2F5160B5-190D-47F4-8B49-2756B7773FD5}" dt="2021-03-16T05:20:12.259" v="944" actId="1035"/>
-        <pc:sldMkLst>
-          <pc:docMk/>
-          <pc:sldMk cId="2047881934" sldId="582"/>
-        </pc:sldMkLst>
-      </pc:sldChg>
-      <pc:sldChg chg="del">
-        <pc:chgData name="Zhao Jin" userId="cd05a825-544c-438a-9ba1-08e63db50b47" providerId="ADAL" clId="{2F5160B5-190D-47F4-8B49-2756B7773FD5}" dt="2021-03-16T05:16:03.511" v="722" actId="47"/>
-        <pc:sldMkLst>
-          <pc:docMk/>
-          <pc:sldMk cId="1813128722" sldId="617"/>
-        </pc:sldMkLst>
-      </pc:sldChg>
-      <pc:sldChg chg="del">
-        <pc:chgData name="Zhao Jin" userId="cd05a825-544c-438a-9ba1-08e63db50b47" providerId="ADAL" clId="{2F5160B5-190D-47F4-8B49-2756B7773FD5}" dt="2021-03-16T05:16:03.511" v="722" actId="47"/>
-        <pc:sldMkLst>
-          <pc:docMk/>
-          <pc:sldMk cId="3454948446" sldId="636"/>
-        </pc:sldMkLst>
-      </pc:sldChg>
-      <pc:sldChg chg="del">
-        <pc:chgData name="Zhao Jin" userId="cd05a825-544c-438a-9ba1-08e63db50b47" providerId="ADAL" clId="{2F5160B5-190D-47F4-8B49-2756B7773FD5}" dt="2021-03-16T05:16:03.511" v="722" actId="47"/>
-        <pc:sldMkLst>
-          <pc:docMk/>
-          <pc:sldMk cId="3737971943" sldId="637"/>
-        </pc:sldMkLst>
-      </pc:sldChg>
-      <pc:sldChg chg="delSp modSp add del mod modAnim">
-        <pc:chgData name="Zhao Jin" userId="cd05a825-544c-438a-9ba1-08e63db50b47" providerId="ADAL" clId="{2F5160B5-190D-47F4-8B49-2756B7773FD5}" dt="2021-04-05T01:09:16.594" v="4047" actId="47"/>
-        <pc:sldMkLst>
-          <pc:docMk/>
-          <pc:sldMk cId="83552886" sldId="638"/>
-        </pc:sldMkLst>
-      </pc:sldChg>
-      <pc:sldChg chg="del">
-        <pc:chgData name="Zhao Jin" userId="cd05a825-544c-438a-9ba1-08e63db50b47" providerId="ADAL" clId="{2F5160B5-190D-47F4-8B49-2756B7773FD5}" dt="2021-03-16T05:16:03.511" v="722" actId="47"/>
-        <pc:sldMkLst>
-          <pc:docMk/>
-          <pc:sldMk cId="1179750071" sldId="639"/>
-        </pc:sldMkLst>
-      </pc:sldChg>
-      <pc:sldChg chg="del">
-        <pc:chgData name="Zhao Jin" userId="cd05a825-544c-438a-9ba1-08e63db50b47" providerId="ADAL" clId="{2F5160B5-190D-47F4-8B49-2756B7773FD5}" dt="2021-03-16T05:16:03.511" v="722" actId="47"/>
-        <pc:sldMkLst>
-          <pc:docMk/>
-          <pc:sldMk cId="3462301147" sldId="640"/>
-        </pc:sldMkLst>
-      </pc:sldChg>
-      <pc:sldChg chg="del">
-        <pc:chgData name="Zhao Jin" userId="cd05a825-544c-438a-9ba1-08e63db50b47" providerId="ADAL" clId="{2F5160B5-190D-47F4-8B49-2756B7773FD5}" dt="2021-03-16T05:16:03.511" v="722" actId="47"/>
-        <pc:sldMkLst>
-          <pc:docMk/>
-          <pc:sldMk cId="723901272" sldId="641"/>
-        </pc:sldMkLst>
-      </pc:sldChg>
-      <pc:sldChg chg="del">
-        <pc:chgData name="Zhao Jin" userId="cd05a825-544c-438a-9ba1-08e63db50b47" providerId="ADAL" clId="{2F5160B5-190D-47F4-8B49-2756B7773FD5}" dt="2021-03-16T05:16:03.511" v="722" actId="47"/>
-        <pc:sldMkLst>
-          <pc:docMk/>
-          <pc:sldMk cId="4089006062" sldId="642"/>
-        </pc:sldMkLst>
-      </pc:sldChg>
-      <pc:sldChg chg="del">
-        <pc:chgData name="Zhao Jin" userId="cd05a825-544c-438a-9ba1-08e63db50b47" providerId="ADAL" clId="{2F5160B5-190D-47F4-8B49-2756B7773FD5}" dt="2021-03-16T05:16:03.511" v="722" actId="47"/>
-        <pc:sldMkLst>
-          <pc:docMk/>
-          <pc:sldMk cId="1514327557" sldId="643"/>
-        </pc:sldMkLst>
-      </pc:sldChg>
-      <pc:sldChg chg="delSp modSp add mod modAnim">
-        <pc:chgData name="Zhao Jin" userId="cd05a825-544c-438a-9ba1-08e63db50b47" providerId="ADAL" clId="{2F5160B5-190D-47F4-8B49-2756B7773FD5}" dt="2021-04-05T01:08:15.181" v="4043"/>
-        <pc:sldMkLst>
-          <pc:docMk/>
-          <pc:sldMk cId="635849530" sldId="644"/>
-        </pc:sldMkLst>
-      </pc:sldChg>
-      <pc:sldChg chg="delSp modSp add mod">
-        <pc:chgData name="Zhao Jin" userId="cd05a825-544c-438a-9ba1-08e63db50b47" providerId="ADAL" clId="{2F5160B5-190D-47F4-8B49-2756B7773FD5}" dt="2021-04-05T01:00:18.488" v="4033" actId="6549"/>
-        <pc:sldMkLst>
-          <pc:docMk/>
-          <pc:sldMk cId="1716205057" sldId="645"/>
-        </pc:sldMkLst>
-      </pc:sldChg>
-      <pc:sldChg chg="addSp delSp modSp add mod delAnim modAnim">
-        <pc:chgData name="Zhao Jin" userId="cd05a825-544c-438a-9ba1-08e63db50b47" providerId="ADAL" clId="{2F5160B5-190D-47F4-8B49-2756B7773FD5}" dt="2021-04-05T01:10:12.126" v="4057"/>
-        <pc:sldMkLst>
-          <pc:docMk/>
-          <pc:sldMk cId="1832708629" sldId="646"/>
-        </pc:sldMkLst>
-      </pc:sldChg>
-      <pc:sldChg chg="addSp delSp modSp add mod delAnim modAnim">
-        <pc:chgData name="Zhao Jin" userId="cd05a825-544c-438a-9ba1-08e63db50b47" providerId="ADAL" clId="{2F5160B5-190D-47F4-8B49-2756B7773FD5}" dt="2021-04-05T01:10:22.734" v="4058"/>
-        <pc:sldMkLst>
-          <pc:docMk/>
-          <pc:sldMk cId="2677643591" sldId="647"/>
-        </pc:sldMkLst>
-      </pc:sldChg>
-      <pc:sldChg chg="addSp delSp modSp add mod modAnim">
-        <pc:chgData name="Zhao Jin" userId="cd05a825-544c-438a-9ba1-08e63db50b47" providerId="ADAL" clId="{2F5160B5-190D-47F4-8B49-2756B7773FD5}" dt="2021-04-05T01:10:37.685" v="4062"/>
-        <pc:sldMkLst>
-          <pc:docMk/>
-          <pc:sldMk cId="2524073575" sldId="648"/>
-        </pc:sldMkLst>
-      </pc:sldChg>
-      <pc:sldChg chg="add del">
-        <pc:chgData name="Zhao Jin" userId="cd05a825-544c-438a-9ba1-08e63db50b47" providerId="ADAL" clId="{2F5160B5-190D-47F4-8B49-2756B7773FD5}" dt="2021-03-16T05:26:49.490" v="1093"/>
-        <pc:sldMkLst>
-          <pc:docMk/>
-          <pc:sldMk cId="3329798881" sldId="648"/>
-        </pc:sldMkLst>
-      </pc:sldChg>
-      <pc:sldChg chg="addSp delSp modSp add mod addAnim delAnim modAnim">
-        <pc:chgData name="Zhao Jin" userId="cd05a825-544c-438a-9ba1-08e63db50b47" providerId="ADAL" clId="{2F5160B5-190D-47F4-8B49-2756B7773FD5}" dt="2021-04-05T01:11:30.302" v="4067" actId="11529"/>
-        <pc:sldMkLst>
-          <pc:docMk/>
-          <pc:sldMk cId="846190340" sldId="649"/>
-        </pc:sldMkLst>
-      </pc:sldChg>
-      <pc:sldChg chg="add del">
-        <pc:chgData name="Zhao Jin" userId="cd05a825-544c-438a-9ba1-08e63db50b47" providerId="ADAL" clId="{2F5160B5-190D-47F4-8B49-2756B7773FD5}" dt="2021-03-16T05:41:15.344" v="2241"/>
-        <pc:sldMkLst>
-          <pc:docMk/>
-          <pc:sldMk cId="1706548485" sldId="649"/>
-        </pc:sldMkLst>
-      </pc:sldChg>
-      <pc:sldChg chg="addSp delSp modSp add mod delAnim modAnim">
-        <pc:chgData name="Zhao Jin" userId="cd05a825-544c-438a-9ba1-08e63db50b47" providerId="ADAL" clId="{2F5160B5-190D-47F4-8B49-2756B7773FD5}" dt="2021-04-06T05:17:49.620" v="4079" actId="207"/>
-        <pc:sldMkLst>
-          <pc:docMk/>
-          <pc:sldMk cId="997017972" sldId="650"/>
-        </pc:sldMkLst>
-      </pc:sldChg>
-    </pc:docChg>
-  </pc:docChgLst>
-  <pc:docChgLst>
-    <pc:chgData name="Zhao Jin" userId="S::dcszjin@nus.edu.sg::cd05a825-544c-438a-9ba1-08e63db50b47" providerId="AD" clId="Web-{66D5AB6E-AF24-491D-9529-2DDB49AD3149}"/>
-    <pc:docChg chg="modSld">
-      <pc:chgData name="Zhao Jin" userId="S::dcszjin@nus.edu.sg::cd05a825-544c-438a-9ba1-08e63db50b47" providerId="AD" clId="Web-{66D5AB6E-AF24-491D-9529-2DDB49AD3149}" dt="2021-01-20T08:43:03.224" v="8" actId="14100"/>
-      <pc:docMkLst>
-        <pc:docMk/>
-      </pc:docMkLst>
-      <pc:sldChg chg="modSp">
-        <pc:chgData name="Zhao Jin" userId="S::dcszjin@nus.edu.sg::cd05a825-544c-438a-9ba1-08e63db50b47" providerId="AD" clId="Web-{66D5AB6E-AF24-491D-9529-2DDB49AD3149}" dt="2021-01-20T08:43:03.224" v="8" actId="14100"/>
-        <pc:sldMkLst>
-          <pc:docMk/>
-          <pc:sldMk cId="901453530" sldId="546"/>
         </pc:sldMkLst>
       </pc:sldChg>
     </pc:docChg>
@@ -3245,7 +964,7 @@
               <a:pPr>
                 <a:defRPr/>
               </a:pPr>
-              <a:t>1/7/2025</a:t>
+              <a:t>4/7/2026</a:t>
             </a:fld>
             <a:endParaRPr lang="en-US"/>
           </a:p>
@@ -10914,7 +8633,7 @@
               <a:buChar char="§"/>
             </a:pPr>
             <a:r>
-              <a:rPr lang="en-US" sz="2400"/>
+              <a:rPr lang="en-US" sz="2400" dirty="0"/>
               <a:t>typedef allows new data types to be defined.</a:t>
             </a:r>
           </a:p>
@@ -10933,7 +8652,7 @@
               <a:buFont typeface="Wingdings" panose="05000000000000000000" pitchFamily="2" charset="2"/>
               <a:buChar char="§"/>
             </a:pPr>
-            <a:endParaRPr lang="en-US" sz="2400"/>
+            <a:endParaRPr lang="en-US" sz="2400" dirty="0"/>
           </a:p>
           <a:p>
             <a:pPr marL="800100" lvl="1" indent="-342900">
@@ -10950,7 +8669,7 @@
               <a:buFont typeface="Wingdings" panose="05000000000000000000" pitchFamily="2" charset="2"/>
               <a:buChar char="§"/>
             </a:pPr>
-            <a:endParaRPr lang="en-US" sz="2400"/>
+            <a:endParaRPr lang="en-US" sz="2400" dirty="0"/>
           </a:p>
           <a:p>
             <a:pPr marL="800100" lvl="1" indent="-342900">
@@ -10967,7 +8686,7 @@
               <a:buFont typeface="Wingdings" panose="05000000000000000000" pitchFamily="2" charset="2"/>
               <a:buChar char="§"/>
             </a:pPr>
-            <a:endParaRPr lang="en-US" sz="2400"/>
+            <a:endParaRPr lang="en-US" sz="2400" dirty="0"/>
           </a:p>
           <a:p>
             <a:pPr lvl="1">
@@ -10982,7 +8701,7 @@
               </a:buClr>
               <a:buSzPct val="100000"/>
             </a:pPr>
-            <a:endParaRPr lang="en-US" sz="1600"/>
+            <a:endParaRPr lang="en-US" sz="1600" dirty="0"/>
           </a:p>
         </p:txBody>
       </p:sp>
@@ -11321,7 +9040,7 @@
         </p:nvSpPr>
         <p:spPr bwMode="auto">
           <a:xfrm>
-            <a:off x="1156424" y="2018581"/>
+            <a:off x="1156424" y="2025456"/>
             <a:ext cx="3691473" cy="1618122"/>
           </a:xfrm>
           <a:prstGeom prst="rect">
@@ -11359,7 +9078,7 @@
               <a:defRPr/>
             </a:pPr>
             <a:r>
-              <a:rPr lang="en-US" sz="2000" b="1">
+              <a:rPr lang="en-US" sz="2000" b="1" dirty="0">
                 <a:solidFill>
                   <a:srgbClr val="0000FF"/>
                 </a:solidFill>
@@ -11368,7 +9087,7 @@
               <a:t>typedef struct </a:t>
             </a:r>
             <a:r>
-              <a:rPr lang="en-US" sz="2000" b="1">
+              <a:rPr lang="en-US" sz="2000" b="1" dirty="0">
                 <a:solidFill>
                   <a:srgbClr val="7030A0"/>
                 </a:solidFill>
@@ -11377,7 +9096,7 @@
               <a:t>module</a:t>
             </a:r>
             <a:r>
-              <a:rPr lang="en-US" sz="2000" b="1">
+              <a:rPr lang="en-US" sz="2000" b="1" dirty="0">
                 <a:solidFill>
                   <a:srgbClr val="0000FF"/>
                 </a:solidFill>
@@ -11386,7 +9105,7 @@
               <a:t> </a:t>
             </a:r>
             <a:r>
-              <a:rPr lang="en-US" sz="2000" b="1">
+              <a:rPr lang="en-US" sz="2000" b="1" dirty="0">
                 <a:solidFill>
                   <a:srgbClr val="000000"/>
                 </a:solidFill>
@@ -11405,7 +9124,7 @@
               <a:defRPr/>
             </a:pPr>
             <a:r>
-              <a:rPr lang="en-US" sz="2000" b="1">
+              <a:rPr lang="en-US" sz="2000" b="1" dirty="0">
                 <a:solidFill>
                   <a:srgbClr val="000000"/>
                 </a:solidFill>
@@ -11414,7 +9133,7 @@
               <a:t>	</a:t>
             </a:r>
             <a:r>
-              <a:rPr lang="en-US" sz="2000" b="1">
+              <a:rPr lang="en-US" sz="2000" b="1" dirty="0">
                 <a:solidFill>
                   <a:srgbClr val="0000FF"/>
                 </a:solidFill>
@@ -11423,13 +9142,13 @@
               <a:t>char </a:t>
             </a:r>
             <a:r>
-              <a:rPr lang="en-US" sz="2000" b="1">
+              <a:rPr lang="en-US" sz="2000" b="1" dirty="0">
                 <a:latin typeface="Courier New" pitchFamily="49" charset="0"/>
               </a:rPr>
               <a:t>*code</a:t>
             </a:r>
             <a:r>
-              <a:rPr lang="en-US" sz="2000" b="1">
+              <a:rPr lang="en-US" sz="2000" b="1" dirty="0">
                 <a:solidFill>
                   <a:srgbClr val="000000"/>
                 </a:solidFill>
@@ -11448,7 +9167,7 @@
               <a:defRPr/>
             </a:pPr>
             <a:r>
-              <a:rPr lang="en-US" sz="2000" b="1">
+              <a:rPr lang="en-US" sz="2000" b="1" dirty="0">
                 <a:solidFill>
                   <a:srgbClr val="000000"/>
                 </a:solidFill>
@@ -11457,7 +9176,7 @@
               <a:t>	</a:t>
             </a:r>
             <a:r>
-              <a:rPr lang="en-US" sz="2000" b="1">
+              <a:rPr lang="en-US" sz="2000" b="1" dirty="0">
                 <a:solidFill>
                   <a:srgbClr val="0000FF"/>
                 </a:solidFill>
@@ -11466,13 +9185,13 @@
               <a:t>char </a:t>
             </a:r>
             <a:r>
-              <a:rPr lang="en-US" sz="2000" b="1">
+              <a:rPr lang="en-US" sz="2000" b="1" dirty="0">
                 <a:latin typeface="Courier New" pitchFamily="49" charset="0"/>
               </a:rPr>
               <a:t>*title</a:t>
             </a:r>
             <a:r>
-              <a:rPr lang="en-US" sz="2000" b="1">
+              <a:rPr lang="en-US" sz="2000" b="1" dirty="0">
                 <a:solidFill>
                   <a:srgbClr val="000000"/>
                 </a:solidFill>
@@ -11491,7 +9210,7 @@
               <a:defRPr/>
             </a:pPr>
             <a:r>
-              <a:rPr lang="en-US" sz="2000" b="1">
+              <a:rPr lang="en-US" sz="2000" b="1" dirty="0">
                 <a:solidFill>
                   <a:srgbClr val="000000"/>
                 </a:solidFill>
@@ -11500,7 +9219,7 @@
               <a:t>	</a:t>
             </a:r>
             <a:r>
-              <a:rPr lang="en-US" sz="2000" b="1">
+              <a:rPr lang="en-US" sz="2000" b="1" dirty="0">
                 <a:solidFill>
                   <a:srgbClr val="0000FF"/>
                 </a:solidFill>
@@ -11509,13 +9228,13 @@
               <a:t>long </a:t>
             </a:r>
             <a:r>
-              <a:rPr lang="en-US" sz="2000" b="1">
+              <a:rPr lang="en-US" sz="2000" b="1" dirty="0">
                 <a:latin typeface="Courier New" pitchFamily="49" charset="0"/>
               </a:rPr>
               <a:t>mc</a:t>
             </a:r>
             <a:r>
-              <a:rPr lang="en-US" sz="2000" b="1">
+              <a:rPr lang="en-US" sz="2000" b="1" dirty="0">
                 <a:solidFill>
                   <a:srgbClr val="000000"/>
                 </a:solidFill>
@@ -11534,7 +9253,7 @@
               <a:defRPr/>
             </a:pPr>
             <a:r>
-              <a:rPr lang="en-US" sz="2000" b="1">
+              <a:rPr lang="en-US" sz="2000" b="1" dirty="0">
                 <a:solidFill>
                   <a:srgbClr val="000000"/>
                 </a:solidFill>
@@ -11543,7 +9262,7 @@
               <a:t>} module</a:t>
             </a:r>
             <a:r>
-              <a:rPr lang="en-US" sz="2000" b="1">
+              <a:rPr lang="en-US" sz="2000" b="1" dirty="0">
                 <a:latin typeface="Courier New" pitchFamily="49" charset="0"/>
               </a:rPr>
               <a:t>;</a:t>
@@ -11553,7 +9272,7 @@
             <a:pPr marL="342900" indent="-342900">
               <a:defRPr/>
             </a:pPr>
-            <a:endParaRPr lang="en-US" sz="2000" b="1">
+            <a:endParaRPr lang="en-US" sz="2000" b="1" dirty="0">
               <a:solidFill>
                 <a:srgbClr val="000000"/>
               </a:solidFill>
@@ -11616,7 +9335,7 @@
               <a:defRPr/>
             </a:pPr>
             <a:r>
-              <a:rPr lang="en-US" sz="2000" b="1">
+              <a:rPr lang="en-US" sz="2000" b="1" dirty="0">
                 <a:solidFill>
                   <a:srgbClr val="0000FF"/>
                 </a:solidFill>
@@ -11625,7 +9344,7 @@
               <a:t>typedef struct </a:t>
             </a:r>
             <a:r>
-              <a:rPr lang="en-US" sz="2000" b="1">
+              <a:rPr lang="en-US" sz="2000" b="1" dirty="0">
                 <a:solidFill>
                   <a:srgbClr val="000000"/>
                 </a:solidFill>
@@ -11644,7 +9363,7 @@
               <a:defRPr/>
             </a:pPr>
             <a:r>
-              <a:rPr lang="en-US" sz="2000" b="1">
+              <a:rPr lang="en-US" sz="2000" b="1" dirty="0">
                 <a:solidFill>
                   <a:srgbClr val="000000"/>
                 </a:solidFill>
@@ -11653,7 +9372,7 @@
               <a:t>	</a:t>
             </a:r>
             <a:r>
-              <a:rPr lang="en-US" sz="2000" b="1">
+              <a:rPr lang="en-US" sz="2000" b="1" dirty="0">
                 <a:solidFill>
                   <a:srgbClr val="0000FF"/>
                 </a:solidFill>
@@ -11662,13 +9381,13 @@
               <a:t>char </a:t>
             </a:r>
             <a:r>
-              <a:rPr lang="en-US" sz="2000" b="1">
+              <a:rPr lang="en-US" sz="2000" b="1" dirty="0">
                 <a:latin typeface="Courier New" pitchFamily="49" charset="0"/>
               </a:rPr>
               <a:t>*code</a:t>
             </a:r>
             <a:r>
-              <a:rPr lang="en-US" sz="2000" b="1">
+              <a:rPr lang="en-US" sz="2000" b="1" dirty="0">
                 <a:solidFill>
                   <a:srgbClr val="000000"/>
                 </a:solidFill>
@@ -11687,7 +9406,7 @@
               <a:defRPr/>
             </a:pPr>
             <a:r>
-              <a:rPr lang="en-US" sz="2000" b="1">
+              <a:rPr lang="en-US" sz="2000" b="1" dirty="0">
                 <a:solidFill>
                   <a:srgbClr val="000000"/>
                 </a:solidFill>
@@ -11696,7 +9415,7 @@
               <a:t>	</a:t>
             </a:r>
             <a:r>
-              <a:rPr lang="en-US" sz="2000" b="1">
+              <a:rPr lang="en-US" sz="2000" b="1" dirty="0">
                 <a:solidFill>
                   <a:srgbClr val="0000FF"/>
                 </a:solidFill>
@@ -11705,13 +9424,13 @@
               <a:t>char </a:t>
             </a:r>
             <a:r>
-              <a:rPr lang="en-US" sz="2000" b="1">
+              <a:rPr lang="en-US" sz="2000" b="1" dirty="0">
                 <a:latin typeface="Courier New" pitchFamily="49" charset="0"/>
               </a:rPr>
               <a:t>*title</a:t>
             </a:r>
             <a:r>
-              <a:rPr lang="en-US" sz="2000" b="1">
+              <a:rPr lang="en-US" sz="2000" b="1" dirty="0">
                 <a:solidFill>
                   <a:srgbClr val="000000"/>
                 </a:solidFill>
@@ -11730,7 +9449,7 @@
               <a:defRPr/>
             </a:pPr>
             <a:r>
-              <a:rPr lang="en-US" sz="2000" b="1">
+              <a:rPr lang="en-US" sz="2000" b="1" dirty="0">
                 <a:solidFill>
                   <a:srgbClr val="000000"/>
                 </a:solidFill>
@@ -11739,7 +9458,7 @@
               <a:t>	</a:t>
             </a:r>
             <a:r>
-              <a:rPr lang="en-US" sz="2000" b="1">
+              <a:rPr lang="en-US" sz="2000" b="1" dirty="0">
                 <a:solidFill>
                   <a:srgbClr val="0000FF"/>
                 </a:solidFill>
@@ -11748,13 +9467,13 @@
               <a:t>long </a:t>
             </a:r>
             <a:r>
-              <a:rPr lang="en-US" sz="2000" b="1">
+              <a:rPr lang="en-US" sz="2000" b="1" dirty="0">
                 <a:latin typeface="Courier New" pitchFamily="49" charset="0"/>
               </a:rPr>
               <a:t>mc</a:t>
             </a:r>
             <a:r>
-              <a:rPr lang="en-US" sz="2000" b="1">
+              <a:rPr lang="en-US" sz="2000" b="1" dirty="0">
                 <a:solidFill>
                   <a:srgbClr val="000000"/>
                 </a:solidFill>
@@ -11773,7 +9492,7 @@
               <a:defRPr/>
             </a:pPr>
             <a:r>
-              <a:rPr lang="en-US" sz="2000" b="1">
+              <a:rPr lang="en-US" sz="2000" b="1" dirty="0">
                 <a:solidFill>
                   <a:srgbClr val="000000"/>
                 </a:solidFill>
@@ -11782,7 +9501,7 @@
               <a:t>} </a:t>
             </a:r>
             <a:r>
-              <a:rPr lang="en-US" sz="2000" b="1">
+              <a:rPr lang="en-US" sz="2000" b="1" dirty="0">
                 <a:latin typeface="Courier New" pitchFamily="49" charset="0"/>
               </a:rPr>
               <a:t>module;</a:t>
@@ -11792,7 +9511,7 @@
             <a:pPr marL="342900" indent="-342900">
               <a:defRPr/>
             </a:pPr>
-            <a:endParaRPr lang="en-US" sz="2000" b="1">
+            <a:endParaRPr lang="en-US" sz="2000" b="1" dirty="0">
               <a:solidFill>
                 <a:srgbClr val="000000"/>
               </a:solidFill>
@@ -11840,14 +9559,14 @@
               <a:defRPr/>
             </a:pPr>
             <a:r>
-              <a:rPr lang="en-SG">
+              <a:rPr lang="en-SG" dirty="0">
                 <a:latin typeface="Arial" charset="0"/>
                 <a:cs typeface="Arial" charset="0"/>
               </a:rPr>
               <a:t>Better to name the type </a:t>
             </a:r>
             <a:r>
-              <a:rPr lang="en-SG" err="1">
+              <a:rPr lang="en-SG" dirty="0" err="1">
                 <a:solidFill>
                   <a:srgbClr val="7030A0"/>
                 </a:solidFill>
@@ -11857,7 +9576,7 @@
               <a:t>module_t</a:t>
             </a:r>
             <a:r>
-              <a:rPr lang="en-SG">
+              <a:rPr lang="en-SG" dirty="0">
                 <a:solidFill>
                   <a:srgbClr val="7030A0"/>
                 </a:solidFill>
@@ -11867,7 +9586,7 @@
               <a:t> </a:t>
             </a:r>
             <a:r>
-              <a:rPr lang="en-SG">
+              <a:rPr lang="en-SG" dirty="0">
                 <a:latin typeface="Arial" charset="0"/>
                 <a:cs typeface="Arial" charset="0"/>
               </a:rPr>
@@ -12032,6 +9751,158 @@
   <p:transition>
     <p:fade/>
   </p:transition>
+  <p:timing>
+    <p:tnLst>
+      <p:par>
+        <p:cTn id="1" dur="indefinite" restart="never" nodeType="tmRoot">
+          <p:childTnLst>
+            <p:seq concurrent="1" nextAc="seek">
+              <p:cTn id="2" dur="indefinite" nodeType="mainSeq">
+                <p:childTnLst>
+                  <p:par>
+                    <p:cTn id="3" fill="hold">
+                      <p:stCondLst>
+                        <p:cond delay="indefinite"/>
+                      </p:stCondLst>
+                      <p:childTnLst>
+                        <p:par>
+                          <p:cTn id="4" fill="hold">
+                            <p:stCondLst>
+                              <p:cond delay="0"/>
+                            </p:stCondLst>
+                            <p:childTnLst>
+                              <p:par>
+                                <p:cTn id="5" presetID="1" presetClass="entr" presetSubtype="0" fill="hold" grpId="0" nodeType="clickEffect">
+                                  <p:stCondLst>
+                                    <p:cond delay="0"/>
+                                  </p:stCondLst>
+                                  <p:childTnLst>
+                                    <p:set>
+                                      <p:cBhvr>
+                                        <p:cTn id="6" dur="1" fill="hold">
+                                          <p:stCondLst>
+                                            <p:cond delay="0"/>
+                                          </p:stCondLst>
+                                        </p:cTn>
+                                        <p:tgtEl>
+                                          <p:spTgt spid="16"/>
+                                        </p:tgtEl>
+                                        <p:attrNameLst>
+                                          <p:attrName>style.visibility</p:attrName>
+                                        </p:attrNameLst>
+                                      </p:cBhvr>
+                                      <p:to>
+                                        <p:strVal val="visible"/>
+                                      </p:to>
+                                    </p:set>
+                                  </p:childTnLst>
+                                </p:cTn>
+                              </p:par>
+                              <p:par>
+                                <p:cTn id="7" presetID="1" presetClass="entr" presetSubtype="0" fill="hold" grpId="0" nodeType="withEffect">
+                                  <p:stCondLst>
+                                    <p:cond delay="0"/>
+                                  </p:stCondLst>
+                                  <p:childTnLst>
+                                    <p:set>
+                                      <p:cBhvr>
+                                        <p:cTn id="8" dur="1" fill="hold">
+                                          <p:stCondLst>
+                                            <p:cond delay="0"/>
+                                          </p:stCondLst>
+                                        </p:cTn>
+                                        <p:tgtEl>
+                                          <p:spTgt spid="9"/>
+                                        </p:tgtEl>
+                                        <p:attrNameLst>
+                                          <p:attrName>style.visibility</p:attrName>
+                                        </p:attrNameLst>
+                                      </p:cBhvr>
+                                      <p:to>
+                                        <p:strVal val="visible"/>
+                                      </p:to>
+                                    </p:set>
+                                  </p:childTnLst>
+                                </p:cTn>
+                              </p:par>
+                            </p:childTnLst>
+                          </p:cTn>
+                        </p:par>
+                      </p:childTnLst>
+                    </p:cTn>
+                  </p:par>
+                  <p:par>
+                    <p:cTn id="9" fill="hold">
+                      <p:stCondLst>
+                        <p:cond delay="indefinite"/>
+                      </p:stCondLst>
+                      <p:childTnLst>
+                        <p:par>
+                          <p:cTn id="10" fill="hold">
+                            <p:stCondLst>
+                              <p:cond delay="0"/>
+                            </p:stCondLst>
+                            <p:childTnLst>
+                              <p:par>
+                                <p:cTn id="11" presetID="1" presetClass="entr" presetSubtype="0" fill="hold" grpId="0" nodeType="clickEffect">
+                                  <p:stCondLst>
+                                    <p:cond delay="0"/>
+                                  </p:stCondLst>
+                                  <p:childTnLst>
+                                    <p:set>
+                                      <p:cBhvr>
+                                        <p:cTn id="12" dur="1" fill="hold">
+                                          <p:stCondLst>
+                                            <p:cond delay="0"/>
+                                          </p:stCondLst>
+                                        </p:cTn>
+                                        <p:tgtEl>
+                                          <p:spTgt spid="19"/>
+                                        </p:tgtEl>
+                                        <p:attrNameLst>
+                                          <p:attrName>style.visibility</p:attrName>
+                                        </p:attrNameLst>
+                                      </p:cBhvr>
+                                      <p:to>
+                                        <p:strVal val="visible"/>
+                                      </p:to>
+                                    </p:set>
+                                  </p:childTnLst>
+                                </p:cTn>
+                              </p:par>
+                            </p:childTnLst>
+                          </p:cTn>
+                        </p:par>
+                      </p:childTnLst>
+                    </p:cTn>
+                  </p:par>
+                </p:childTnLst>
+              </p:cTn>
+              <p:prevCondLst>
+                <p:cond evt="onPrev" delay="0">
+                  <p:tgtEl>
+                    <p:sldTgt/>
+                  </p:tgtEl>
+                </p:cond>
+              </p:prevCondLst>
+              <p:nextCondLst>
+                <p:cond evt="onNext" delay="0">
+                  <p:tgtEl>
+                    <p:sldTgt/>
+                  </p:tgtEl>
+                </p:cond>
+              </p:nextCondLst>
+            </p:seq>
+          </p:childTnLst>
+        </p:cTn>
+      </p:par>
+    </p:tnLst>
+    <p:bldLst>
+      <p:bldP spid="16" grpId="0" animBg="1"/>
+      <p:bldP spid="9" grpId="0" animBg="1"/>
+      <p:bldP spid="19" grpId="0" animBg="1"/>
+    </p:bldLst>
+  </p:timing>
 </p:sld>
 </file>
 
@@ -13596,92 +11467,6 @@
   <p:transition>
     <p:fade/>
   </p:transition>
-  <p:timing>
-    <p:tnLst>
-      <p:par>
-        <p:cTn id="1" dur="indefinite" restart="never" nodeType="tmRoot">
-          <p:childTnLst>
-            <p:seq concurrent="1" nextAc="seek">
-              <p:cTn id="2" dur="indefinite" nodeType="mainSeq">
-                <p:childTnLst>
-                  <p:par>
-                    <p:cTn id="3" fill="hold">
-                      <p:stCondLst>
-                        <p:cond delay="indefinite"/>
-                        <p:cond evt="onBegin" delay="0">
-                          <p:tn val="2"/>
-                        </p:cond>
-                      </p:stCondLst>
-                      <p:childTnLst>
-                        <p:par>
-                          <p:cTn id="4" fill="hold">
-                            <p:stCondLst>
-                              <p:cond delay="0"/>
-                            </p:stCondLst>
-                            <p:childTnLst>
-                              <p:par>
-                                <p:cTn id="5" presetID="9" presetClass="entr" presetSubtype="0" fill="hold" nodeType="afterEffect">
-                                  <p:stCondLst>
-                                    <p:cond delay="0"/>
-                                  </p:stCondLst>
-                                  <p:childTnLst>
-                                    <p:set>
-                                      <p:cBhvr>
-                                        <p:cTn id="6" dur="1" fill="hold">
-                                          <p:stCondLst>
-                                            <p:cond delay="0"/>
-                                          </p:stCondLst>
-                                        </p:cTn>
-                                        <p:tgtEl>
-                                          <p:spTgt spid="82"/>
-                                        </p:tgtEl>
-                                        <p:attrNameLst>
-                                          <p:attrName>style.visibility</p:attrName>
-                                        </p:attrNameLst>
-                                      </p:cBhvr>
-                                      <p:to>
-                                        <p:strVal val="visible"/>
-                                      </p:to>
-                                    </p:set>
-                                    <p:animEffect transition="in" filter="dissolve">
-                                      <p:cBhvr>
-                                        <p:cTn id="7" dur="500"/>
-                                        <p:tgtEl>
-                                          <p:spTgt spid="82"/>
-                                        </p:tgtEl>
-                                      </p:cBhvr>
-                                    </p:animEffect>
-                                  </p:childTnLst>
-                                </p:cTn>
-                              </p:par>
-                            </p:childTnLst>
-                          </p:cTn>
-                        </p:par>
-                      </p:childTnLst>
-                    </p:cTn>
-                  </p:par>
-                </p:childTnLst>
-              </p:cTn>
-              <p:prevCondLst>
-                <p:cond evt="onPrev" delay="0">
-                  <p:tgtEl>
-                    <p:sldTgt/>
-                  </p:tgtEl>
-                </p:cond>
-              </p:prevCondLst>
-              <p:nextCondLst>
-                <p:cond evt="onNext" delay="0">
-                  <p:tgtEl>
-                    <p:sldTgt/>
-                  </p:tgtEl>
-                </p:cond>
-              </p:nextCondLst>
-            </p:seq>
-          </p:childTnLst>
-        </p:cTn>
-      </p:par>
-    </p:tnLst>
-  </p:timing>
 </p:sld>
 </file>
 
@@ -14878,92 +12663,6 @@
   <p:transition>
     <p:fade/>
   </p:transition>
-  <p:timing>
-    <p:tnLst>
-      <p:par>
-        <p:cTn id="1" dur="indefinite" restart="never" nodeType="tmRoot">
-          <p:childTnLst>
-            <p:seq concurrent="1" nextAc="seek">
-              <p:cTn id="2" dur="indefinite" nodeType="mainSeq">
-                <p:childTnLst>
-                  <p:par>
-                    <p:cTn id="3" fill="hold">
-                      <p:stCondLst>
-                        <p:cond delay="indefinite"/>
-                        <p:cond evt="onBegin" delay="0">
-                          <p:tn val="2"/>
-                        </p:cond>
-                      </p:stCondLst>
-                      <p:childTnLst>
-                        <p:par>
-                          <p:cTn id="4" fill="hold">
-                            <p:stCondLst>
-                              <p:cond delay="0"/>
-                            </p:stCondLst>
-                            <p:childTnLst>
-                              <p:par>
-                                <p:cTn id="5" presetID="9" presetClass="entr" presetSubtype="0" fill="hold" nodeType="afterEffect">
-                                  <p:stCondLst>
-                                    <p:cond delay="0"/>
-                                  </p:stCondLst>
-                                  <p:childTnLst>
-                                    <p:set>
-                                      <p:cBhvr>
-                                        <p:cTn id="6" dur="1" fill="hold">
-                                          <p:stCondLst>
-                                            <p:cond delay="0"/>
-                                          </p:stCondLst>
-                                        </p:cTn>
-                                        <p:tgtEl>
-                                          <p:spTgt spid="10"/>
-                                        </p:tgtEl>
-                                        <p:attrNameLst>
-                                          <p:attrName>style.visibility</p:attrName>
-                                        </p:attrNameLst>
-                                      </p:cBhvr>
-                                      <p:to>
-                                        <p:strVal val="visible"/>
-                                      </p:to>
-                                    </p:set>
-                                    <p:animEffect transition="in" filter="dissolve">
-                                      <p:cBhvr>
-                                        <p:cTn id="7" dur="500"/>
-                                        <p:tgtEl>
-                                          <p:spTgt spid="10"/>
-                                        </p:tgtEl>
-                                      </p:cBhvr>
-                                    </p:animEffect>
-                                  </p:childTnLst>
-                                </p:cTn>
-                              </p:par>
-                            </p:childTnLst>
-                          </p:cTn>
-                        </p:par>
-                      </p:childTnLst>
-                    </p:cTn>
-                  </p:par>
-                </p:childTnLst>
-              </p:cTn>
-              <p:prevCondLst>
-                <p:cond evt="onPrev" delay="0">
-                  <p:tgtEl>
-                    <p:sldTgt/>
-                  </p:tgtEl>
-                </p:cond>
-              </p:prevCondLst>
-              <p:nextCondLst>
-                <p:cond evt="onNext" delay="0">
-                  <p:tgtEl>
-                    <p:sldTgt/>
-                  </p:tgtEl>
-                </p:cond>
-              </p:nextCondLst>
-            </p:seq>
-          </p:childTnLst>
-        </p:cTn>
-      </p:par>
-    </p:tnLst>
-  </p:timing>
 </p:sld>
 </file>
 
@@ -15966,92 +13665,6 @@
   <p:transition>
     <p:fade/>
   </p:transition>
-  <p:timing>
-    <p:tnLst>
-      <p:par>
-        <p:cTn id="1" dur="indefinite" restart="never" nodeType="tmRoot">
-          <p:childTnLst>
-            <p:seq concurrent="1" nextAc="seek">
-              <p:cTn id="2" dur="indefinite" nodeType="mainSeq">
-                <p:childTnLst>
-                  <p:par>
-                    <p:cTn id="3" fill="hold">
-                      <p:stCondLst>
-                        <p:cond delay="indefinite"/>
-                      </p:stCondLst>
-                      <p:childTnLst>
-                        <p:par>
-                          <p:cTn id="4" fill="hold">
-                            <p:stCondLst>
-                              <p:cond delay="0"/>
-                            </p:stCondLst>
-                            <p:childTnLst>
-                              <p:par>
-                                <p:cTn id="5" presetID="9" presetClass="entr" presetSubtype="0" fill="hold" grpId="0" nodeType="clickEffect">
-                                  <p:stCondLst>
-                                    <p:cond delay="0"/>
-                                  </p:stCondLst>
-                                  <p:childTnLst>
-                                    <p:set>
-                                      <p:cBhvr>
-                                        <p:cTn id="6" dur="1" fill="hold">
-                                          <p:stCondLst>
-                                            <p:cond delay="0"/>
-                                          </p:stCondLst>
-                                        </p:cTn>
-                                        <p:tgtEl>
-                                          <p:spTgt spid="9"/>
-                                        </p:tgtEl>
-                                        <p:attrNameLst>
-                                          <p:attrName>style.visibility</p:attrName>
-                                        </p:attrNameLst>
-                                      </p:cBhvr>
-                                      <p:to>
-                                        <p:strVal val="visible"/>
-                                      </p:to>
-                                    </p:set>
-                                    <p:animEffect transition="in" filter="dissolve">
-                                      <p:cBhvr>
-                                        <p:cTn id="7" dur="500"/>
-                                        <p:tgtEl>
-                                          <p:spTgt spid="9"/>
-                                        </p:tgtEl>
-                                      </p:cBhvr>
-                                    </p:animEffect>
-                                  </p:childTnLst>
-                                </p:cTn>
-                              </p:par>
-                            </p:childTnLst>
-                          </p:cTn>
-                        </p:par>
-                      </p:childTnLst>
-                    </p:cTn>
-                  </p:par>
-                </p:childTnLst>
-              </p:cTn>
-              <p:prevCondLst>
-                <p:cond evt="onPrev" delay="0">
-                  <p:tgtEl>
-                    <p:sldTgt/>
-                  </p:tgtEl>
-                </p:cond>
-              </p:prevCondLst>
-              <p:nextCondLst>
-                <p:cond evt="onNext" delay="0">
-                  <p:tgtEl>
-                    <p:sldTgt/>
-                  </p:tgtEl>
-                </p:cond>
-              </p:nextCondLst>
-            </p:seq>
-          </p:childTnLst>
-        </p:cTn>
-      </p:par>
-    </p:tnLst>
-    <p:bldLst>
-      <p:bldP spid="9" grpId="0"/>
-    </p:bldLst>
-  </p:timing>
 </p:sld>
 </file>
 
@@ -17226,6 +14839,248 @@
   <p:transition>
     <p:fade/>
   </p:transition>
+  <p:timing>
+    <p:tnLst>
+      <p:par>
+        <p:cTn id="1" dur="indefinite" restart="never" nodeType="tmRoot">
+          <p:childTnLst>
+            <p:seq concurrent="1" nextAc="seek">
+              <p:cTn id="2" dur="indefinite" nodeType="mainSeq">
+                <p:childTnLst>
+                  <p:par>
+                    <p:cTn id="3" fill="hold">
+                      <p:stCondLst>
+                        <p:cond delay="indefinite"/>
+                      </p:stCondLst>
+                      <p:childTnLst>
+                        <p:par>
+                          <p:cTn id="4" fill="hold">
+                            <p:stCondLst>
+                              <p:cond delay="0"/>
+                            </p:stCondLst>
+                            <p:childTnLst>
+                              <p:par>
+                                <p:cTn id="5" presetID="1" presetClass="entr" presetSubtype="0" fill="hold" nodeType="clickEffect">
+                                  <p:stCondLst>
+                                    <p:cond delay="0"/>
+                                  </p:stCondLst>
+                                  <p:childTnLst>
+                                    <p:set>
+                                      <p:cBhvr>
+                                        <p:cTn id="6" dur="1" fill="hold">
+                                          <p:stCondLst>
+                                            <p:cond delay="0"/>
+                                          </p:stCondLst>
+                                        </p:cTn>
+                                        <p:tgtEl>
+                                          <p:spTgt spid="69">
+                                            <p:txEl>
+                                              <p:pRg st="4" end="4"/>
+                                            </p:txEl>
+                                          </p:spTgt>
+                                        </p:tgtEl>
+                                        <p:attrNameLst>
+                                          <p:attrName>style.visibility</p:attrName>
+                                        </p:attrNameLst>
+                                      </p:cBhvr>
+                                      <p:to>
+                                        <p:strVal val="visible"/>
+                                      </p:to>
+                                    </p:set>
+                                  </p:childTnLst>
+                                </p:cTn>
+                              </p:par>
+                              <p:par>
+                                <p:cTn id="7" presetID="1" presetClass="entr" presetSubtype="0" fill="hold" grpId="0" nodeType="withEffect">
+                                  <p:stCondLst>
+                                    <p:cond delay="0"/>
+                                  </p:stCondLst>
+                                  <p:childTnLst>
+                                    <p:set>
+                                      <p:cBhvr>
+                                        <p:cTn id="8" dur="1" fill="hold">
+                                          <p:stCondLst>
+                                            <p:cond delay="0"/>
+                                          </p:stCondLst>
+                                        </p:cTn>
+                                        <p:tgtEl>
+                                          <p:spTgt spid="222"/>
+                                        </p:tgtEl>
+                                        <p:attrNameLst>
+                                          <p:attrName>style.visibility</p:attrName>
+                                        </p:attrNameLst>
+                                      </p:cBhvr>
+                                      <p:to>
+                                        <p:strVal val="visible"/>
+                                      </p:to>
+                                    </p:set>
+                                  </p:childTnLst>
+                                </p:cTn>
+                              </p:par>
+                              <p:par>
+                                <p:cTn id="9" presetID="1" presetClass="entr" presetSubtype="0" fill="hold" grpId="0" nodeType="withEffect">
+                                  <p:stCondLst>
+                                    <p:cond delay="0"/>
+                                  </p:stCondLst>
+                                  <p:childTnLst>
+                                    <p:set>
+                                      <p:cBhvr>
+                                        <p:cTn id="10" dur="1" fill="hold">
+                                          <p:stCondLst>
+                                            <p:cond delay="0"/>
+                                          </p:stCondLst>
+                                        </p:cTn>
+                                        <p:tgtEl>
+                                          <p:spTgt spid="226"/>
+                                        </p:tgtEl>
+                                        <p:attrNameLst>
+                                          <p:attrName>style.visibility</p:attrName>
+                                        </p:attrNameLst>
+                                      </p:cBhvr>
+                                      <p:to>
+                                        <p:strVal val="visible"/>
+                                      </p:to>
+                                    </p:set>
+                                  </p:childTnLst>
+                                </p:cTn>
+                              </p:par>
+                            </p:childTnLst>
+                          </p:cTn>
+                        </p:par>
+                      </p:childTnLst>
+                    </p:cTn>
+                  </p:par>
+                  <p:par>
+                    <p:cTn id="11" fill="hold">
+                      <p:stCondLst>
+                        <p:cond delay="indefinite"/>
+                      </p:stCondLst>
+                      <p:childTnLst>
+                        <p:par>
+                          <p:cTn id="12" fill="hold">
+                            <p:stCondLst>
+                              <p:cond delay="0"/>
+                            </p:stCondLst>
+                            <p:childTnLst>
+                              <p:par>
+                                <p:cTn id="13" presetID="1" presetClass="entr" presetSubtype="0" fill="hold" grpId="0" nodeType="clickEffect">
+                                  <p:stCondLst>
+                                    <p:cond delay="0"/>
+                                  </p:stCondLst>
+                                  <p:childTnLst>
+                                    <p:set>
+                                      <p:cBhvr>
+                                        <p:cTn id="14" dur="1" fill="hold">
+                                          <p:stCondLst>
+                                            <p:cond delay="0"/>
+                                          </p:stCondLst>
+                                        </p:cTn>
+                                        <p:tgtEl>
+                                          <p:spTgt spid="223"/>
+                                        </p:tgtEl>
+                                        <p:attrNameLst>
+                                          <p:attrName>style.visibility</p:attrName>
+                                        </p:attrNameLst>
+                                      </p:cBhvr>
+                                      <p:to>
+                                        <p:strVal val="visible"/>
+                                      </p:to>
+                                    </p:set>
+                                  </p:childTnLst>
+                                </p:cTn>
+                              </p:par>
+                              <p:par>
+                                <p:cTn id="15" presetID="1" presetClass="entr" presetSubtype="0" fill="hold" grpId="0" nodeType="withEffect">
+                                  <p:stCondLst>
+                                    <p:cond delay="0"/>
+                                  </p:stCondLst>
+                                  <p:childTnLst>
+                                    <p:set>
+                                      <p:cBhvr>
+                                        <p:cTn id="16" dur="1" fill="hold">
+                                          <p:stCondLst>
+                                            <p:cond delay="0"/>
+                                          </p:stCondLst>
+                                        </p:cTn>
+                                        <p:tgtEl>
+                                          <p:spTgt spid="227"/>
+                                        </p:tgtEl>
+                                        <p:attrNameLst>
+                                          <p:attrName>style.visibility</p:attrName>
+                                        </p:attrNameLst>
+                                      </p:cBhvr>
+                                      <p:to>
+                                        <p:strVal val="visible"/>
+                                      </p:to>
+                                    </p:set>
+                                  </p:childTnLst>
+                                </p:cTn>
+                              </p:par>
+                              <p:par>
+                                <p:cTn id="17" presetID="1" presetClass="entr" presetSubtype="0" fill="hold" nodeType="withEffect">
+                                  <p:stCondLst>
+                                    <p:cond delay="0"/>
+                                  </p:stCondLst>
+                                  <p:childTnLst>
+                                    <p:set>
+                                      <p:cBhvr>
+                                        <p:cTn id="18" dur="1" fill="hold">
+                                          <p:stCondLst>
+                                            <p:cond delay="0"/>
+                                          </p:stCondLst>
+                                        </p:cTn>
+                                        <p:tgtEl>
+                                          <p:spTgt spid="69">
+                                            <p:txEl>
+                                              <p:pRg st="7" end="7"/>
+                                            </p:txEl>
+                                          </p:spTgt>
+                                        </p:tgtEl>
+                                        <p:attrNameLst>
+                                          <p:attrName>style.visibility</p:attrName>
+                                        </p:attrNameLst>
+                                      </p:cBhvr>
+                                      <p:to>
+                                        <p:strVal val="visible"/>
+                                      </p:to>
+                                    </p:set>
+                                  </p:childTnLst>
+                                </p:cTn>
+                              </p:par>
+                            </p:childTnLst>
+                          </p:cTn>
+                        </p:par>
+                      </p:childTnLst>
+                    </p:cTn>
+                  </p:par>
+                </p:childTnLst>
+              </p:cTn>
+              <p:prevCondLst>
+                <p:cond evt="onPrev" delay="0">
+                  <p:tgtEl>
+                    <p:sldTgt/>
+                  </p:tgtEl>
+                </p:cond>
+              </p:prevCondLst>
+              <p:nextCondLst>
+                <p:cond evt="onNext" delay="0">
+                  <p:tgtEl>
+                    <p:sldTgt/>
+                  </p:tgtEl>
+                </p:cond>
+              </p:nextCondLst>
+            </p:seq>
+          </p:childTnLst>
+        </p:cTn>
+      </p:par>
+    </p:tnLst>
+    <p:bldLst>
+      <p:bldP spid="222" grpId="0" animBg="1"/>
+      <p:bldP spid="223" grpId="0" animBg="1"/>
+      <p:bldP spid="226" grpId="0" animBg="1"/>
+      <p:bldP spid="227" grpId="0" animBg="1"/>
+    </p:bldLst>
+  </p:timing>
 </p:sld>
 </file>
 
@@ -17270,12 +15125,20 @@
           <a:p>
             <a:pPr eaLnBrk="1" hangingPunct="1"/>
             <a:r>
+              <a:rPr lang="en-GB" sz="3600" dirty="0" err="1">
+                <a:solidFill>
+                  <a:srgbClr val="0000FF"/>
+                </a:solidFill>
+              </a:rPr>
+              <a:t>scanf</a:t>
+            </a:r>
+            <a:r>
               <a:rPr lang="en-GB" sz="3600" dirty="0">
                 <a:solidFill>
                   <a:srgbClr val="0000FF"/>
                 </a:solidFill>
               </a:rPr>
-              <a:t>scan()</a:t>
+              <a:t>()</a:t>
             </a:r>
           </a:p>
         </p:txBody>
@@ -20841,6 +18704,143 @@
   <p:transition>
     <p:fade/>
   </p:transition>
+  <p:timing>
+    <p:tnLst>
+      <p:par>
+        <p:cTn id="1" dur="indefinite" restart="never" nodeType="tmRoot">
+          <p:childTnLst>
+            <p:seq concurrent="1" nextAc="seek">
+              <p:cTn id="2" dur="indefinite" nodeType="mainSeq">
+                <p:childTnLst>
+                  <p:par>
+                    <p:cTn id="3" fill="hold">
+                      <p:stCondLst>
+                        <p:cond delay="indefinite"/>
+                      </p:stCondLst>
+                      <p:childTnLst>
+                        <p:par>
+                          <p:cTn id="4" fill="hold">
+                            <p:stCondLst>
+                              <p:cond delay="0"/>
+                            </p:stCondLst>
+                            <p:childTnLst>
+                              <p:par>
+                                <p:cTn id="5" presetID="1" presetClass="entr" presetSubtype="0" fill="hold" grpId="0" nodeType="clickEffect">
+                                  <p:stCondLst>
+                                    <p:cond delay="0"/>
+                                  </p:stCondLst>
+                                  <p:childTnLst>
+                                    <p:set>
+                                      <p:cBhvr>
+                                        <p:cTn id="6" dur="1" fill="hold">
+                                          <p:stCondLst>
+                                            <p:cond delay="0"/>
+                                          </p:stCondLst>
+                                        </p:cTn>
+                                        <p:tgtEl>
+                                          <p:spTgt spid="222"/>
+                                        </p:tgtEl>
+                                        <p:attrNameLst>
+                                          <p:attrName>style.visibility</p:attrName>
+                                        </p:attrNameLst>
+                                      </p:cBhvr>
+                                      <p:to>
+                                        <p:strVal val="visible"/>
+                                      </p:to>
+                                    </p:set>
+                                  </p:childTnLst>
+                                </p:cTn>
+                              </p:par>
+                              <p:par>
+                                <p:cTn id="7" presetID="1" presetClass="entr" presetSubtype="0" fill="hold" grpId="0" nodeType="withEffect">
+                                  <p:stCondLst>
+                                    <p:cond delay="0"/>
+                                  </p:stCondLst>
+                                  <p:childTnLst>
+                                    <p:set>
+                                      <p:cBhvr>
+                                        <p:cTn id="8" dur="1" fill="hold">
+                                          <p:stCondLst>
+                                            <p:cond delay="0"/>
+                                          </p:stCondLst>
+                                        </p:cTn>
+                                        <p:tgtEl>
+                                          <p:spTgt spid="10"/>
+                                        </p:tgtEl>
+                                        <p:attrNameLst>
+                                          <p:attrName>style.visibility</p:attrName>
+                                        </p:attrNameLst>
+                                      </p:cBhvr>
+                                      <p:to>
+                                        <p:strVal val="visible"/>
+                                      </p:to>
+                                    </p:set>
+                                  </p:childTnLst>
+                                </p:cTn>
+                              </p:par>
+                              <p:par>
+                                <p:cTn id="9" presetID="1" presetClass="entr" presetSubtype="0" fill="hold" nodeType="withEffect">
+                                  <p:stCondLst>
+                                    <p:cond delay="0"/>
+                                  </p:stCondLst>
+                                  <p:childTnLst>
+                                    <p:set>
+                                      <p:cBhvr>
+                                        <p:cTn id="10" dur="1" fill="hold">
+                                          <p:stCondLst>
+                                            <p:cond delay="0"/>
+                                          </p:stCondLst>
+                                        </p:cTn>
+                                        <p:tgtEl>
+                                          <p:spTgt spid="69">
+                                            <p:txEl>
+                                              <p:pRg st="3" end="3"/>
+                                            </p:txEl>
+                                          </p:spTgt>
+                                        </p:tgtEl>
+                                        <p:attrNameLst>
+                                          <p:attrName>style.visibility</p:attrName>
+                                        </p:attrNameLst>
+                                      </p:cBhvr>
+                                      <p:to>
+                                        <p:strVal val="visible"/>
+                                      </p:to>
+                                    </p:set>
+                                  </p:childTnLst>
+                                </p:cTn>
+                              </p:par>
+                            </p:childTnLst>
+                          </p:cTn>
+                        </p:par>
+                      </p:childTnLst>
+                    </p:cTn>
+                  </p:par>
+                </p:childTnLst>
+              </p:cTn>
+              <p:prevCondLst>
+                <p:cond evt="onPrev" delay="0">
+                  <p:tgtEl>
+                    <p:sldTgt/>
+                  </p:tgtEl>
+                </p:cond>
+              </p:prevCondLst>
+              <p:nextCondLst>
+                <p:cond evt="onNext" delay="0">
+                  <p:tgtEl>
+                    <p:sldTgt/>
+                  </p:tgtEl>
+                </p:cond>
+              </p:nextCondLst>
+            </p:seq>
+          </p:childTnLst>
+        </p:cTn>
+      </p:par>
+    </p:tnLst>
+    <p:bldLst>
+      <p:bldP spid="222" grpId="0" animBg="1"/>
+      <p:bldP spid="10" grpId="0" animBg="1"/>
+    </p:bldLst>
+  </p:timing>
 </p:sld>
 </file>
 
@@ -21342,6 +19342,133 @@
   <p:transition>
     <p:fade/>
   </p:transition>
+  <p:timing>
+    <p:tnLst>
+      <p:par>
+        <p:cTn id="1" dur="indefinite" restart="never" nodeType="tmRoot">
+          <p:childTnLst>
+            <p:seq concurrent="1" nextAc="seek">
+              <p:cTn id="2" dur="indefinite" nodeType="mainSeq">
+                <p:childTnLst>
+                  <p:par>
+                    <p:cTn id="3" fill="hold">
+                      <p:stCondLst>
+                        <p:cond delay="indefinite"/>
+                      </p:stCondLst>
+                      <p:childTnLst>
+                        <p:par>
+                          <p:cTn id="4" fill="hold">
+                            <p:stCondLst>
+                              <p:cond delay="0"/>
+                            </p:stCondLst>
+                            <p:childTnLst>
+                              <p:par>
+                                <p:cTn id="5" presetID="1" presetClass="entr" presetSubtype="0" fill="hold" grpId="0" nodeType="clickEffect">
+                                  <p:stCondLst>
+                                    <p:cond delay="0"/>
+                                  </p:stCondLst>
+                                  <p:childTnLst>
+                                    <p:set>
+                                      <p:cBhvr>
+                                        <p:cTn id="6" dur="1" fill="hold">
+                                          <p:stCondLst>
+                                            <p:cond delay="0"/>
+                                          </p:stCondLst>
+                                        </p:cTn>
+                                        <p:tgtEl>
+                                          <p:spTgt spid="10"/>
+                                        </p:tgtEl>
+                                        <p:attrNameLst>
+                                          <p:attrName>style.visibility</p:attrName>
+                                        </p:attrNameLst>
+                                      </p:cBhvr>
+                                      <p:to>
+                                        <p:strVal val="visible"/>
+                                      </p:to>
+                                    </p:set>
+                                  </p:childTnLst>
+                                </p:cTn>
+                              </p:par>
+                            </p:childTnLst>
+                          </p:cTn>
+                        </p:par>
+                      </p:childTnLst>
+                    </p:cTn>
+                  </p:par>
+                  <p:par>
+                    <p:cTn id="7" fill="hold">
+                      <p:stCondLst>
+                        <p:cond delay="indefinite"/>
+                      </p:stCondLst>
+                      <p:childTnLst>
+                        <p:par>
+                          <p:cTn id="8" fill="hold">
+                            <p:stCondLst>
+                              <p:cond delay="0"/>
+                            </p:stCondLst>
+                            <p:childTnLst>
+                              <p:par>
+                                <p:cTn id="9" presetID="1" presetClass="entr" presetSubtype="0" fill="hold" nodeType="clickEffect">
+                                  <p:stCondLst>
+                                    <p:cond delay="0"/>
+                                  </p:stCondLst>
+                                  <p:childTnLst>
+                                    <p:set>
+                                      <p:cBhvr>
+                                        <p:cTn id="10" dur="1" fill="hold">
+                                          <p:stCondLst>
+                                            <p:cond delay="0"/>
+                                          </p:stCondLst>
+                                        </p:cTn>
+                                        <p:tgtEl>
+                                          <p:spTgt spid="8">
+                                            <p:txEl>
+                                              <p:pRg st="5" end="5"/>
+                                            </p:txEl>
+                                          </p:spTgt>
+                                        </p:tgtEl>
+                                        <p:attrNameLst>
+                                          <p:attrName>style.visibility</p:attrName>
+                                        </p:attrNameLst>
+                                      </p:cBhvr>
+                                      <p:to>
+                                        <p:strVal val="visible"/>
+                                      </p:to>
+                                    </p:set>
+                                  </p:childTnLst>
+                                </p:cTn>
+                              </p:par>
+                            </p:childTnLst>
+                          </p:cTn>
+                        </p:par>
+                      </p:childTnLst>
+                    </p:cTn>
+                  </p:par>
+                </p:childTnLst>
+              </p:cTn>
+              <p:prevCondLst>
+                <p:cond evt="onPrev" delay="0">
+                  <p:tgtEl>
+                    <p:sldTgt/>
+                  </p:tgtEl>
+                </p:cond>
+              </p:prevCondLst>
+              <p:nextCondLst>
+                <p:cond evt="onNext" delay="0">
+                  <p:tgtEl>
+                    <p:sldTgt/>
+                  </p:tgtEl>
+                </p:cond>
+              </p:nextCondLst>
+            </p:seq>
+          </p:childTnLst>
+        </p:cTn>
+      </p:par>
+    </p:tnLst>
+    <p:bldLst>
+      <p:bldP spid="10" grpId="0" animBg="1"/>
+    </p:bldLst>
+  </p:timing>
 </p:sld>
 </file>
 
@@ -22612,9 +20739,6 @@
                     <p:cTn id="3" fill="hold">
                       <p:stCondLst>
                         <p:cond delay="indefinite"/>
-                        <p:cond evt="onBegin" delay="0">
-                          <p:tn val="2"/>
-                        </p:cond>
                       </p:stCondLst>
                       <p:childTnLst>
                         <p:par>
@@ -22624,7 +20748,7 @@
                             </p:stCondLst>
                             <p:childTnLst>
                               <p:par>
-                                <p:cTn id="5" presetID="9" presetClass="entr" presetSubtype="0" fill="hold" grpId="0" nodeType="afterEffect">
+                                <p:cTn id="5" presetID="1" presetClass="entr" presetSubtype="0" fill="hold" nodeType="clickEffect">
                                   <p:stCondLst>
                                     <p:cond delay="0"/>
                                   </p:stCondLst>
@@ -22632,67 +20756,6 @@
                                     <p:set>
                                       <p:cBhvr>
                                         <p:cTn id="6" dur="1" fill="hold">
-                                          <p:stCondLst>
-                                            <p:cond delay="0"/>
-                                          </p:stCondLst>
-                                        </p:cTn>
-                                        <p:tgtEl>
-                                          <p:spTgt spid="8">
-                                            <p:txEl>
-                                              <p:pRg st="0" end="0"/>
-                                            </p:txEl>
-                                          </p:spTgt>
-                                        </p:tgtEl>
-                                        <p:attrNameLst>
-                                          <p:attrName>style.visibility</p:attrName>
-                                        </p:attrNameLst>
-                                      </p:cBhvr>
-                                      <p:to>
-                                        <p:strVal val="visible"/>
-                                      </p:to>
-                                    </p:set>
-                                    <p:animEffect transition="in" filter="dissolve">
-                                      <p:cBhvr>
-                                        <p:cTn id="7" dur="500"/>
-                                        <p:tgtEl>
-                                          <p:spTgt spid="8">
-                                            <p:txEl>
-                                              <p:pRg st="0" end="0"/>
-                                            </p:txEl>
-                                          </p:spTgt>
-                                        </p:tgtEl>
-                                      </p:cBhvr>
-                                    </p:animEffect>
-                                  </p:childTnLst>
-                                </p:cTn>
-                              </p:par>
-                            </p:childTnLst>
-                          </p:cTn>
-                        </p:par>
-                      </p:childTnLst>
-                    </p:cTn>
-                  </p:par>
-                  <p:par>
-                    <p:cTn id="8" fill="hold">
-                      <p:stCondLst>
-                        <p:cond delay="indefinite"/>
-                      </p:stCondLst>
-                      <p:childTnLst>
-                        <p:par>
-                          <p:cTn id="9" fill="hold">
-                            <p:stCondLst>
-                              <p:cond delay="0"/>
-                            </p:stCondLst>
-                            <p:childTnLst>
-                              <p:par>
-                                <p:cTn id="10" presetID="9" presetClass="entr" presetSubtype="0" fill="hold" nodeType="clickEffect">
-                                  <p:stCondLst>
-                                    <p:cond delay="0"/>
-                                  </p:stCondLst>
-                                  <p:childTnLst>
-                                    <p:set>
-                                      <p:cBhvr>
-                                        <p:cTn id="11" dur="1" fill="hold">
                                           <p:stCondLst>
                                             <p:cond delay="0"/>
                                           </p:stCondLst>
@@ -22708,19 +20771,74 @@
                                         <p:strVal val="visible"/>
                                       </p:to>
                                     </p:set>
-                                    <p:animEffect transition="in" filter="dissolve">
-                                      <p:cBhvr>
-                                        <p:cTn id="12" dur="500"/>
-                                        <p:tgtEl>
-                                          <p:spTgt spid="9"/>
-                                        </p:tgtEl>
-                                      </p:cBhvr>
-                                    </p:animEffect>
                                   </p:childTnLst>
                                 </p:cTn>
                               </p:par>
+                            </p:childTnLst>
+                          </p:cTn>
+                        </p:par>
+                      </p:childTnLst>
+                    </p:cTn>
+                  </p:par>
+                  <p:par>
+                    <p:cTn id="7" fill="hold">
+                      <p:stCondLst>
+                        <p:cond delay="indefinite"/>
+                      </p:stCondLst>
+                      <p:childTnLst>
+                        <p:par>
+                          <p:cTn id="8" fill="hold">
+                            <p:stCondLst>
+                              <p:cond delay="0"/>
+                            </p:stCondLst>
+                            <p:childTnLst>
                               <p:par>
-                                <p:cTn id="13" presetID="9" presetClass="entr" presetSubtype="0" fill="hold" grpId="0" nodeType="withEffect">
+                                <p:cTn id="9" presetID="1" presetClass="entr" presetSubtype="0" fill="hold" grpId="0" nodeType="clickEffect">
+                                  <p:stCondLst>
+                                    <p:cond delay="0"/>
+                                  </p:stCondLst>
+                                  <p:childTnLst>
+                                    <p:set>
+                                      <p:cBhvr>
+                                        <p:cTn id="10" dur="1" fill="hold">
+                                          <p:stCondLst>
+                                            <p:cond delay="0"/>
+                                          </p:stCondLst>
+                                        </p:cTn>
+                                        <p:tgtEl>
+                                          <p:spTgt spid="11"/>
+                                        </p:tgtEl>
+                                        <p:attrNameLst>
+                                          <p:attrName>style.visibility</p:attrName>
+                                        </p:attrNameLst>
+                                      </p:cBhvr>
+                                      <p:to>
+                                        <p:strVal val="visible"/>
+                                      </p:to>
+                                    </p:set>
+                                  </p:childTnLst>
+                                </p:cTn>
+                              </p:par>
+                            </p:childTnLst>
+                          </p:cTn>
+                        </p:par>
+                      </p:childTnLst>
+                    </p:cTn>
+                  </p:par>
+                  <p:par>
+                    <p:cTn id="11" fill="hold">
+                      <p:stCondLst>
+                        <p:cond delay="indefinite"/>
+                      </p:stCondLst>
+                      <p:childTnLst>
+                        <p:par>
+                          <p:cTn id="12" fill="hold">
+                            <p:stCondLst>
+                              <p:cond delay="0"/>
+                            </p:stCondLst>
+                            <p:childTnLst>
+                              <p:par>
+                                <p:cTn id="13" presetID="1" presetClass="entr" presetSubtype="0" fill="hold" grpId="0" nodeType="clickEffect">
                                   <p:stCondLst>
                                     <p:cond delay="0"/>
                                   </p:stCondLst>
@@ -22733,7 +20851,7 @@
                                           </p:stCondLst>
                                         </p:cTn>
                                         <p:tgtEl>
-                                          <p:spTgt spid="10"/>
+                                          <p:spTgt spid="13"/>
                                         </p:tgtEl>
                                         <p:attrNameLst>
                                           <p:attrName>style.visibility</p:attrName>
@@ -22743,14 +20861,6 @@
                                         <p:strVal val="visible"/>
                                       </p:to>
                                     </p:set>
-                                    <p:animEffect transition="in" filter="dissolve">
-                                      <p:cBhvr>
-                                        <p:cTn id="15" dur="500"/>
-                                        <p:tgtEl>
-                                          <p:spTgt spid="10"/>
-                                        </p:tgtEl>
-                                      </p:cBhvr>
-                                    </p:animEffect>
                                   </p:childTnLst>
                                 </p:cTn>
                               </p:par>
@@ -22782,8 +20892,8 @@
       </p:par>
     </p:tnLst>
     <p:bldLst>
-      <p:bldP spid="8" grpId="0" uiExpand="1" build="p"/>
-      <p:bldP spid="10" grpId="0"/>
+      <p:bldP spid="11" grpId="0" animBg="1"/>
+      <p:bldP spid="13" grpId="0" animBg="1"/>
     </p:bldLst>
   </p:timing>
 </p:sld>
@@ -22935,11 +21045,11 @@
             </a:pPr>
             <a:r>
               <a:rPr lang="en-US" sz="2800" dirty="0"/>
-              <a:t>Post-Lecture Diagnostic Quiz</a:t>
-            </a:r>
-          </a:p>
-          <a:p>
-            <a:pPr lvl="1">
+              <a:t>Diagnostic Quizzes</a:t>
+            </a:r>
+          </a:p>
+          <a:p>
+            <a:pPr marL="800100" lvl="1" indent="-342900">
               <a:spcBef>
                 <a:spcPts val="1200"/>
               </a:spcBef>
@@ -22950,6 +21060,44 @@
                 </a:schemeClr>
               </a:buClr>
               <a:buSzPct val="75000"/>
+              <a:buFont typeface="Wingdings" pitchFamily="2" charset="2"/>
+              <a:buChar char="n"/>
+            </a:pPr>
+            <a:r>
+              <a:rPr lang="en-US" sz="2000" dirty="0"/>
+              <a:t>Lecture 11: due </a:t>
+            </a:r>
+            <a:r>
+              <a:rPr lang="en-US" sz="2000" dirty="0">
+                <a:solidFill>
+                  <a:srgbClr val="0000FF"/>
+                </a:solidFill>
+              </a:rPr>
+              <a:t>14 Apr</a:t>
+            </a:r>
+            <a:r>
+              <a:rPr lang="en-US" sz="2000">
+                <a:solidFill>
+                  <a:srgbClr val="0000FF"/>
+                </a:solidFill>
+              </a:rPr>
+              <a:t>, 2pm</a:t>
+            </a:r>
+          </a:p>
+          <a:p>
+            <a:pPr marL="800100" lvl="1" indent="-342900">
+              <a:spcBef>
+                <a:spcPts val="1200"/>
+              </a:spcBef>
+              <a:buClr>
+                <a:schemeClr val="accent4">
+                  <a:lumMod val="60000"/>
+                  <a:lumOff val="40000"/>
+                </a:schemeClr>
+              </a:buClr>
+              <a:buSzPct val="75000"/>
+              <a:buFont typeface="Wingdings" pitchFamily="2" charset="2"/>
+              <a:buChar char="n"/>
             </a:pPr>
             <a:endParaRPr lang="en-US" sz="2800" dirty="0"/>
           </a:p>
@@ -23007,8 +21155,37 @@
             </a:pPr>
             <a:r>
               <a:rPr lang="en-US" sz="2800" dirty="0"/>
-              <a:t>Exercise 8</a:t>
-            </a:r>
+              <a:t>Exercises</a:t>
+            </a:r>
+          </a:p>
+          <a:p>
+            <a:pPr marL="800100" lvl="1" indent="-342900">
+              <a:spcBef>
+                <a:spcPts val="1200"/>
+              </a:spcBef>
+              <a:buClr>
+                <a:schemeClr val="accent4">
+                  <a:lumMod val="60000"/>
+                  <a:lumOff val="40000"/>
+                </a:schemeClr>
+              </a:buClr>
+              <a:buSzPct val="75000"/>
+              <a:buFont typeface="Wingdings" pitchFamily="2" charset="2"/>
+              <a:buChar char="n"/>
+            </a:pPr>
+            <a:r>
+              <a:rPr lang="en-US" sz="2000" dirty="0"/>
+              <a:t>Exercise 8 due </a:t>
+            </a:r>
+            <a:r>
+              <a:rPr lang="en-US" sz="2000" dirty="0">
+                <a:solidFill>
+                  <a:srgbClr val="0000FF"/>
+                </a:solidFill>
+              </a:rPr>
+              <a:t>14 Apr, 2pm</a:t>
+            </a:r>
+            <a:endParaRPr lang="en-US" sz="2800" dirty="0"/>
           </a:p>
         </p:txBody>
       </p:sp>
@@ -26278,12 +24455,12 @@
           <a:p>
             <a:pPr eaLnBrk="1" hangingPunct="1"/>
             <a:r>
-              <a:rPr lang="en-GB" sz="3600">
+              <a:rPr lang="en-GB" sz="3600" dirty="0">
                 <a:solidFill>
                   <a:srgbClr val="0000FF"/>
                 </a:solidFill>
               </a:rPr>
-              <a:t>Structure</a:t>
+              <a:t>Structure Type</a:t>
             </a:r>
           </a:p>
         </p:txBody>
@@ -26373,18 +24550,18 @@
               <a:defRPr/>
             </a:pPr>
             <a:r>
-              <a:rPr lang="en-US"/>
+              <a:rPr lang="en-US" dirty="0"/>
               <a:t>Such a group is called </a:t>
             </a:r>
             <a:r>
-              <a:rPr lang="en-US">
+              <a:rPr lang="en-US" dirty="0">
                 <a:solidFill>
                   <a:srgbClr val="0000FF"/>
                 </a:solidFill>
               </a:rPr>
-              <a:t>structure</a:t>
-            </a:r>
-            <a:endParaRPr lang="en-SG"/>
+              <a:t>structure type</a:t>
+            </a:r>
+            <a:endParaRPr lang="en-SG" dirty="0"/>
           </a:p>
           <a:p>
             <a:pPr marL="347663" indent="-347663">
@@ -26403,7 +24580,7 @@
               <a:defRPr/>
             </a:pPr>
             <a:r>
-              <a:rPr lang="en-US"/>
+              <a:rPr lang="en-US" dirty="0"/>
               <a:t>Examples of structures:</a:t>
             </a:r>
           </a:p>
@@ -27908,14 +26085,13 @@
           </a:bodyPr>
           <a:lstStyle/>
           <a:p>
-            <a:pPr eaLnBrk="1" hangingPunct="1"/>
-            <a:r>
-              <a:rPr lang="en-GB" sz="3600">
+            <a:r>
+              <a:rPr lang="en-GB" sz="3600" dirty="0">
                 <a:solidFill>
                   <a:srgbClr val="0000FF"/>
                 </a:solidFill>
               </a:rPr>
-              <a:t>Structure</a:t>
+              <a:t>Structure Type</a:t>
             </a:r>
           </a:p>
         </p:txBody>
@@ -28011,7 +26187,7 @@
             </a:pPr>
             <a:r>
               <a:rPr lang="en-US" sz="2400" dirty="0"/>
-              <a:t>A structure is </a:t>
+              <a:t>A structure type is </a:t>
             </a:r>
             <a:r>
               <a:rPr lang="en-US" sz="2400" u="sng" dirty="0">
@@ -28043,11 +26219,7 @@
             </a:pPr>
             <a:r>
               <a:rPr lang="en-US" sz="2000" dirty="0"/>
-              <a:t>It is a data type like long, double except that </a:t>
-            </a:r>
-            <a:r>
-              <a:rPr lang="en-US" sz="2000"/>
-              <a:t>it is compound.</a:t>
+              <a:t>It is a data type like long, double except that it is compound.</a:t>
             </a:r>
             <a:br>
               <a:rPr lang="en-US" sz="2000" dirty="0"/>
@@ -28144,7 +26316,7 @@
         </p:nvSpPr>
         <p:spPr bwMode="auto">
           <a:xfrm>
-            <a:off x="2882900" y="4394199"/>
+            <a:off x="1597025" y="4470399"/>
             <a:ext cx="2511033" cy="1575085"/>
           </a:xfrm>
           <a:prstGeom prst="rect">
@@ -28182,7 +26354,7 @@
               <a:defRPr/>
             </a:pPr>
             <a:r>
-              <a:rPr lang="en-US" sz="2000" b="1">
+              <a:rPr lang="en-US" sz="2000" b="1" dirty="0">
                 <a:solidFill>
                   <a:srgbClr val="0000FF"/>
                 </a:solidFill>
@@ -28191,7 +26363,7 @@
               <a:t>struct </a:t>
             </a:r>
             <a:r>
-              <a:rPr lang="en-US" sz="2000" b="1">
+              <a:rPr lang="en-US" sz="2000" b="1" dirty="0">
                 <a:solidFill>
                   <a:srgbClr val="7030A0"/>
                 </a:solidFill>
@@ -28200,7 +26372,7 @@
               <a:t>module</a:t>
             </a:r>
             <a:r>
-              <a:rPr lang="en-US" sz="2000" b="1">
+              <a:rPr lang="en-US" sz="2000" b="1" dirty="0">
                 <a:solidFill>
                   <a:srgbClr val="0000FF"/>
                 </a:solidFill>
@@ -28209,7 +26381,7 @@
               <a:t> </a:t>
             </a:r>
             <a:r>
-              <a:rPr lang="en-US" sz="2000" b="1">
+              <a:rPr lang="en-US" sz="2000" b="1" dirty="0">
                 <a:solidFill>
                   <a:srgbClr val="000000"/>
                 </a:solidFill>
@@ -28228,7 +26400,7 @@
               <a:defRPr/>
             </a:pPr>
             <a:r>
-              <a:rPr lang="en-US" sz="2000" b="1">
+              <a:rPr lang="en-US" sz="2000" b="1" dirty="0">
                 <a:solidFill>
                   <a:srgbClr val="000000"/>
                 </a:solidFill>
@@ -28237,7 +26409,7 @@
               <a:t>	</a:t>
             </a:r>
             <a:r>
-              <a:rPr lang="en-US" sz="2000" b="1">
+              <a:rPr lang="en-US" sz="2000" b="1" dirty="0">
                 <a:solidFill>
                   <a:srgbClr val="0000FF"/>
                 </a:solidFill>
@@ -28246,13 +26418,13 @@
               <a:t>char </a:t>
             </a:r>
             <a:r>
-              <a:rPr lang="en-US" sz="2000" b="1">
+              <a:rPr lang="en-US" sz="2000" b="1" dirty="0">
                 <a:latin typeface="Courier New" pitchFamily="49" charset="0"/>
               </a:rPr>
               <a:t>*code</a:t>
             </a:r>
             <a:r>
-              <a:rPr lang="en-US" sz="2000" b="1">
+              <a:rPr lang="en-US" sz="2000" b="1" dirty="0">
                 <a:solidFill>
                   <a:srgbClr val="000000"/>
                 </a:solidFill>
@@ -28271,7 +26443,7 @@
               <a:defRPr/>
             </a:pPr>
             <a:r>
-              <a:rPr lang="en-US" sz="2000" b="1">
+              <a:rPr lang="en-US" sz="2000" b="1" dirty="0">
                 <a:solidFill>
                   <a:srgbClr val="000000"/>
                 </a:solidFill>
@@ -28280,7 +26452,7 @@
               <a:t>	</a:t>
             </a:r>
             <a:r>
-              <a:rPr lang="en-US" sz="2000" b="1">
+              <a:rPr lang="en-US" sz="2000" b="1" dirty="0">
                 <a:solidFill>
                   <a:srgbClr val="0000FF"/>
                 </a:solidFill>
@@ -28289,13 +26461,13 @@
               <a:t>char </a:t>
             </a:r>
             <a:r>
-              <a:rPr lang="en-US" sz="2000" b="1">
+              <a:rPr lang="en-US" sz="2000" b="1" dirty="0">
                 <a:latin typeface="Courier New" pitchFamily="49" charset="0"/>
               </a:rPr>
               <a:t>*title</a:t>
             </a:r>
             <a:r>
-              <a:rPr lang="en-US" sz="2000" b="1">
+              <a:rPr lang="en-US" sz="2000" b="1" dirty="0">
                 <a:solidFill>
                   <a:srgbClr val="000000"/>
                 </a:solidFill>
@@ -28314,7 +26486,7 @@
               <a:defRPr/>
             </a:pPr>
             <a:r>
-              <a:rPr lang="en-US" sz="2000" b="1">
+              <a:rPr lang="en-US" sz="2000" b="1" dirty="0">
                 <a:solidFill>
                   <a:srgbClr val="000000"/>
                 </a:solidFill>
@@ -28323,7 +26495,7 @@
               <a:t>	</a:t>
             </a:r>
             <a:r>
-              <a:rPr lang="en-US" sz="2000" b="1">
+              <a:rPr lang="en-US" sz="2000" b="1" dirty="0">
                 <a:solidFill>
                   <a:srgbClr val="0000FF"/>
                 </a:solidFill>
@@ -28332,13 +26504,13 @@
               <a:t>long </a:t>
             </a:r>
             <a:r>
-              <a:rPr lang="en-US" sz="2000" b="1">
+              <a:rPr lang="en-US" sz="2000" b="1" dirty="0">
                 <a:latin typeface="Courier New" pitchFamily="49" charset="0"/>
               </a:rPr>
               <a:t>mc</a:t>
             </a:r>
             <a:r>
-              <a:rPr lang="en-US" sz="2000" b="1">
+              <a:rPr lang="en-US" sz="2000" b="1" dirty="0">
                 <a:solidFill>
                   <a:srgbClr val="000000"/>
                 </a:solidFill>
@@ -28357,7 +26529,7 @@
               <a:defRPr/>
             </a:pPr>
             <a:r>
-              <a:rPr lang="en-US" sz="2000" b="1">
+              <a:rPr lang="en-US" sz="2000" b="1" dirty="0">
                 <a:solidFill>
                   <a:srgbClr val="000000"/>
                 </a:solidFill>
@@ -28366,7 +26538,7 @@
               <a:t>}</a:t>
             </a:r>
             <a:r>
-              <a:rPr lang="en-US" sz="2000" b="1">
+              <a:rPr lang="en-US" sz="2000" b="1" dirty="0">
                 <a:latin typeface="Courier New" pitchFamily="49" charset="0"/>
               </a:rPr>
               <a:t>;</a:t>
@@ -28376,7 +26548,7 @@
             <a:pPr marL="342900" indent="-342900">
               <a:defRPr/>
             </a:pPr>
-            <a:endParaRPr lang="en-US" sz="2400" b="1">
+            <a:endParaRPr lang="en-US" sz="2400" b="1" dirty="0">
               <a:solidFill>
                 <a:srgbClr val="000000"/>
               </a:solidFill>
@@ -28416,6 +26588,71 @@
           </a:p>
         </p:txBody>
       </p:sp>
+      <p:sp>
+        <p:nvSpPr>
+          <p:cNvPr id="3" name="TextBox 2">
+            <a:extLst>
+              <a:ext uri="{FF2B5EF4-FFF2-40B4-BE49-F238E27FC236}">
+                <a16:creationId xmlns:a16="http://schemas.microsoft.com/office/drawing/2014/main" id="{DEFAE54C-FDA9-2BD9-5772-6CD3F50FD409}"/>
+              </a:ext>
+            </a:extLst>
+          </p:cNvPr>
+          <p:cNvSpPr txBox="1"/>
+          <p:nvPr/>
+        </p:nvSpPr>
+        <p:spPr bwMode="auto">
+          <a:xfrm>
+            <a:off x="4286436" y="4858575"/>
+            <a:ext cx="3676278" cy="646331"/>
+          </a:xfrm>
+          <a:prstGeom prst="rect">
+            <a:avLst/>
+          </a:prstGeom>
+          <a:solidFill>
+            <a:srgbClr val="FFFF99"/>
+          </a:solidFill>
+          <a:ln>
+            <a:solidFill>
+              <a:schemeClr val="tx1"/>
+            </a:solidFill>
+          </a:ln>
+        </p:spPr>
+        <p:txBody>
+          <a:bodyPr wrap="square">
+            <a:spAutoFit/>
+          </a:bodyPr>
+          <a:lstStyle/>
+          <a:p>
+            <a:pPr>
+              <a:defRPr/>
+            </a:pPr>
+            <a:r>
+              <a:rPr lang="en-US" dirty="0">
+                <a:latin typeface="Arial" charset="0"/>
+                <a:cs typeface="Arial" charset="0"/>
+              </a:rPr>
+              <a:t>Before function prototypes </a:t>
+            </a:r>
+            <a:br>
+              <a:rPr lang="en-US" dirty="0">
+                <a:latin typeface="Arial" charset="0"/>
+                <a:cs typeface="Arial" charset="0"/>
+              </a:rPr>
+            </a:br>
+            <a:r>
+              <a:rPr lang="en-US" dirty="0">
+                <a:latin typeface="Arial" charset="0"/>
+                <a:cs typeface="Arial" charset="0"/>
+              </a:rPr>
+              <a:t>(but after preprocessor directives)</a:t>
+            </a:r>
+            <a:endParaRPr lang="en-SG" dirty="0">
+              <a:latin typeface="Arial" charset="0"/>
+              <a:cs typeface="Arial" charset="0"/>
+            </a:endParaRPr>
+          </a:p>
+        </p:txBody>
+      </p:sp>
     </p:spTree>
     <p:extLst>
       <p:ext uri="{BB962C8B-B14F-4D97-AF65-F5344CB8AC3E}">
@@ -28429,95 +26666,6 @@
   <p:transition>
     <p:fade/>
   </p:transition>
-  <p:timing>
-    <p:tnLst>
-      <p:par>
-        <p:cTn id="1" dur="indefinite" restart="never" nodeType="tmRoot">
-          <p:childTnLst>
-            <p:seq concurrent="1" nextAc="seek">
-              <p:cTn id="2" dur="indefinite" nodeType="mainSeq">
-                <p:childTnLst>
-                  <p:par>
-                    <p:cTn id="3" fill="hold">
-                      <p:stCondLst>
-                        <p:cond delay="indefinite"/>
-                        <p:cond evt="onBegin" delay="0">
-                          <p:tn val="2"/>
-                        </p:cond>
-                      </p:stCondLst>
-                      <p:childTnLst>
-                        <p:par>
-                          <p:cTn id="4" fill="hold">
-                            <p:stCondLst>
-                              <p:cond delay="0"/>
-                            </p:stCondLst>
-                            <p:childTnLst>
-                              <p:par>
-                                <p:cTn id="5" presetID="9" presetClass="entr" presetSubtype="0" fill="hold" grpId="0" nodeType="afterEffect">
-                                  <p:stCondLst>
-                                    <p:cond delay="0"/>
-                                  </p:stCondLst>
-                                  <p:childTnLst>
-                                    <p:set>
-                                      <p:cBhvr>
-                                        <p:cTn id="6" dur="1" fill="hold">
-                                          <p:stCondLst>
-                                            <p:cond delay="0"/>
-                                          </p:stCondLst>
-                                        </p:cTn>
-                                        <p:tgtEl>
-                                          <p:spTgt spid="19"/>
-                                        </p:tgtEl>
-                                        <p:attrNameLst>
-                                          <p:attrName>style.visibility</p:attrName>
-                                        </p:attrNameLst>
-                                      </p:cBhvr>
-                                      <p:to>
-                                        <p:strVal val="visible"/>
-                                      </p:to>
-                                    </p:set>
-                                    <p:animEffect transition="in" filter="dissolve">
-                                      <p:cBhvr>
-                                        <p:cTn id="7" dur="500"/>
-                                        <p:tgtEl>
-                                          <p:spTgt spid="19"/>
-                                        </p:tgtEl>
-                                      </p:cBhvr>
-                                    </p:animEffect>
-                                  </p:childTnLst>
-                                </p:cTn>
-                              </p:par>
-                            </p:childTnLst>
-                          </p:cTn>
-                        </p:par>
-                      </p:childTnLst>
-                    </p:cTn>
-                  </p:par>
-                </p:childTnLst>
-              </p:cTn>
-              <p:prevCondLst>
-                <p:cond evt="onPrev" delay="0">
-                  <p:tgtEl>
-                    <p:sldTgt/>
-                  </p:tgtEl>
-                </p:cond>
-              </p:prevCondLst>
-              <p:nextCondLst>
-                <p:cond evt="onNext" delay="0">
-                  <p:tgtEl>
-                    <p:sldTgt/>
-                  </p:tgtEl>
-                </p:cond>
-              </p:nextCondLst>
-            </p:seq>
-          </p:childTnLst>
-        </p:cTn>
-      </p:par>
-    </p:tnLst>
-    <p:bldLst>
-      <p:bldP spid="19" grpId="0" animBg="1"/>
-    </p:bldLst>
-  </p:timing>
 </p:sld>
 </file>
 
@@ -28662,7 +26810,7 @@
               <a:buChar char="§"/>
             </a:pPr>
             <a:r>
-              <a:rPr lang="en-US" sz="2800"/>
+              <a:rPr lang="en-US" sz="2800" dirty="0"/>
               <a:t>Declaration</a:t>
             </a:r>
           </a:p>
@@ -28682,323 +26830,10 @@
               <a:buChar char="§"/>
             </a:pPr>
             <a:r>
-              <a:rPr lang="en-US" sz="2400"/>
+              <a:rPr lang="en-US" sz="2400" dirty="0"/>
               <a:t>The syntax is similar to declaring ordinary variables</a:t>
             </a:r>
-            <a:r>
-              <a:rPr lang="en-US" sz="2000"/>
-              <a:t>.</a:t>
-            </a:r>
-          </a:p>
-        </p:txBody>
-      </p:sp>
-      <p:sp>
-        <p:nvSpPr>
-          <p:cNvPr id="17" name="Rectangle 8"/>
-          <p:cNvSpPr>
-            <a:spLocks noChangeArrowheads="1"/>
-          </p:cNvSpPr>
-          <p:nvPr/>
-        </p:nvSpPr>
-        <p:spPr bwMode="auto">
-          <a:xfrm>
-            <a:off x="1182688" y="2501107"/>
-            <a:ext cx="2680395" cy="1667756"/>
-          </a:xfrm>
-          <a:prstGeom prst="rect">
-            <a:avLst/>
-          </a:prstGeom>
-          <a:solidFill>
-            <a:schemeClr val="bg1"/>
-          </a:solidFill>
-          <a:ln w="25400" algn="ctr">
-            <a:solidFill>
-              <a:srgbClr val="8A8AB9"/>
-            </a:solidFill>
-            <a:miter lim="800000"/>
-            <a:headEnd/>
-            <a:tailEnd/>
-          </a:ln>
-          <a:effectLst>
-            <a:outerShdw dist="38100" dir="2700000" algn="tl" rotWithShape="0">
-              <a:srgbClr val="808080">
-                <a:alpha val="39998"/>
-              </a:srgbClr>
-            </a:outerShdw>
-          </a:effectLst>
-        </p:spPr>
-        <p:txBody>
-          <a:bodyPr/>
-          <a:lstStyle/>
-          <a:p>
-            <a:pPr>
-              <a:tabLst>
-                <a:tab pos="358775" algn="l"/>
-                <a:tab pos="715963" algn="l"/>
-                <a:tab pos="1074738" algn="l"/>
-              </a:tabLst>
-              <a:defRPr/>
-            </a:pPr>
-            <a:r>
-              <a:rPr lang="en-US" sz="2000" b="1">
-                <a:solidFill>
-                  <a:srgbClr val="0000FF"/>
-                </a:solidFill>
-                <a:latin typeface="Courier New" pitchFamily="49" charset="0"/>
-              </a:rPr>
-              <a:t>struct </a:t>
-            </a:r>
-            <a:r>
-              <a:rPr lang="en-US" sz="2000" b="1">
-                <a:solidFill>
-                  <a:srgbClr val="7030A0"/>
-                </a:solidFill>
-                <a:latin typeface="Courier New" pitchFamily="49" charset="0"/>
-              </a:rPr>
-              <a:t>module</a:t>
-            </a:r>
-            <a:r>
-              <a:rPr lang="en-US" sz="2000" b="1">
-                <a:solidFill>
-                  <a:srgbClr val="0000FF"/>
-                </a:solidFill>
-                <a:latin typeface="Courier New" pitchFamily="49" charset="0"/>
-              </a:rPr>
-              <a:t> </a:t>
-            </a:r>
-            <a:r>
-              <a:rPr lang="en-US" sz="2000" b="1">
-                <a:solidFill>
-                  <a:srgbClr val="000000"/>
-                </a:solidFill>
-                <a:latin typeface="Courier New" pitchFamily="49" charset="0"/>
-              </a:rPr>
-              <a:t>{</a:t>
-            </a:r>
-          </a:p>
-          <a:p>
-            <a:pPr>
-              <a:tabLst>
-                <a:tab pos="358775" algn="l"/>
-                <a:tab pos="715963" algn="l"/>
-                <a:tab pos="1074738" algn="l"/>
-              </a:tabLst>
-              <a:defRPr/>
-            </a:pPr>
-            <a:r>
-              <a:rPr lang="en-US" sz="2000" b="1">
-                <a:solidFill>
-                  <a:srgbClr val="000000"/>
-                </a:solidFill>
-                <a:latin typeface="Courier New" pitchFamily="49" charset="0"/>
-              </a:rPr>
-              <a:t>	</a:t>
-            </a:r>
-            <a:r>
-              <a:rPr lang="en-US" sz="2000" b="1">
-                <a:solidFill>
-                  <a:srgbClr val="0000FF"/>
-                </a:solidFill>
-                <a:latin typeface="Courier New" pitchFamily="49" charset="0"/>
-              </a:rPr>
-              <a:t>char </a:t>
-            </a:r>
-            <a:r>
-              <a:rPr lang="en-US" sz="2000" b="1">
-                <a:latin typeface="Courier New" pitchFamily="49" charset="0"/>
-              </a:rPr>
-              <a:t>*code</a:t>
-            </a:r>
-            <a:r>
-              <a:rPr lang="en-US" sz="2000" b="1">
-                <a:solidFill>
-                  <a:srgbClr val="000000"/>
-                </a:solidFill>
-                <a:latin typeface="Courier New" pitchFamily="49" charset="0"/>
-              </a:rPr>
-              <a:t>;</a:t>
-            </a:r>
-          </a:p>
-          <a:p>
-            <a:pPr>
-              <a:tabLst>
-                <a:tab pos="358775" algn="l"/>
-                <a:tab pos="715963" algn="l"/>
-                <a:tab pos="1074738" algn="l"/>
-              </a:tabLst>
-              <a:defRPr/>
-            </a:pPr>
-            <a:r>
-              <a:rPr lang="en-US" sz="2000" b="1">
-                <a:solidFill>
-                  <a:srgbClr val="000000"/>
-                </a:solidFill>
-                <a:latin typeface="Courier New" pitchFamily="49" charset="0"/>
-              </a:rPr>
-              <a:t>	</a:t>
-            </a:r>
-            <a:r>
-              <a:rPr lang="en-US" sz="2000" b="1">
-                <a:solidFill>
-                  <a:srgbClr val="0000FF"/>
-                </a:solidFill>
-                <a:latin typeface="Courier New" pitchFamily="49" charset="0"/>
-              </a:rPr>
-              <a:t>char </a:t>
-            </a:r>
-            <a:r>
-              <a:rPr lang="en-US" sz="2000" b="1">
-                <a:latin typeface="Courier New" pitchFamily="49" charset="0"/>
-              </a:rPr>
-              <a:t>*title</a:t>
-            </a:r>
-            <a:r>
-              <a:rPr lang="en-US" sz="2000" b="1">
-                <a:solidFill>
-                  <a:srgbClr val="000000"/>
-                </a:solidFill>
-                <a:latin typeface="Courier New" pitchFamily="49" charset="0"/>
-              </a:rPr>
-              <a:t>;</a:t>
-            </a:r>
-          </a:p>
-          <a:p>
-            <a:pPr>
-              <a:tabLst>
-                <a:tab pos="358775" algn="l"/>
-                <a:tab pos="715963" algn="l"/>
-                <a:tab pos="1074738" algn="l"/>
-              </a:tabLst>
-              <a:defRPr/>
-            </a:pPr>
-            <a:r>
-              <a:rPr lang="en-US" sz="2000" b="1">
-                <a:solidFill>
-                  <a:srgbClr val="000000"/>
-                </a:solidFill>
-                <a:latin typeface="Courier New" pitchFamily="49" charset="0"/>
-              </a:rPr>
-              <a:t>	</a:t>
-            </a:r>
-            <a:r>
-              <a:rPr lang="en-US" sz="2000" b="1">
-                <a:solidFill>
-                  <a:srgbClr val="0000FF"/>
-                </a:solidFill>
-                <a:latin typeface="Courier New" pitchFamily="49" charset="0"/>
-              </a:rPr>
-              <a:t>long </a:t>
-            </a:r>
-            <a:r>
-              <a:rPr lang="en-US" sz="2000" b="1">
-                <a:latin typeface="Courier New" pitchFamily="49" charset="0"/>
-              </a:rPr>
-              <a:t>mc</a:t>
-            </a:r>
-            <a:r>
-              <a:rPr lang="en-US" sz="2000" b="1">
-                <a:solidFill>
-                  <a:srgbClr val="000000"/>
-                </a:solidFill>
-                <a:latin typeface="Courier New" pitchFamily="49" charset="0"/>
-              </a:rPr>
-              <a:t>;</a:t>
-            </a:r>
-          </a:p>
-          <a:p>
-            <a:pPr>
-              <a:tabLst>
-                <a:tab pos="358775" algn="l"/>
-                <a:tab pos="715963" algn="l"/>
-                <a:tab pos="1074738" algn="l"/>
-              </a:tabLst>
-              <a:defRPr/>
-            </a:pPr>
-            <a:r>
-              <a:rPr lang="en-US" sz="2000" b="1">
-                <a:solidFill>
-                  <a:srgbClr val="000000"/>
-                </a:solidFill>
-                <a:latin typeface="Courier New" pitchFamily="49" charset="0"/>
-              </a:rPr>
-              <a:t>}</a:t>
-            </a:r>
-            <a:r>
-              <a:rPr lang="en-US" sz="2000" b="1">
-                <a:latin typeface="Courier New" pitchFamily="49" charset="0"/>
-              </a:rPr>
-              <a:t>;</a:t>
-            </a:r>
-          </a:p>
-          <a:p>
-            <a:pPr marL="342900" indent="-342900">
-              <a:defRPr/>
-            </a:pPr>
-            <a:endParaRPr lang="en-US" sz="2000" b="1">
-              <a:solidFill>
-                <a:srgbClr val="000000"/>
-              </a:solidFill>
-              <a:latin typeface="Courier New" pitchFamily="49" charset="0"/>
-            </a:endParaRPr>
-          </a:p>
-        </p:txBody>
-      </p:sp>
-      <p:sp>
-        <p:nvSpPr>
-          <p:cNvPr id="20" name="TextBox 19"/>
-          <p:cNvSpPr txBox="1"/>
-          <p:nvPr/>
-        </p:nvSpPr>
-        <p:spPr bwMode="auto">
-          <a:xfrm>
-            <a:off x="4193726" y="2894331"/>
-            <a:ext cx="3676278" cy="646331"/>
-          </a:xfrm>
-          <a:prstGeom prst="rect">
-            <a:avLst/>
-          </a:prstGeom>
-          <a:solidFill>
-            <a:srgbClr val="FFFF99"/>
-          </a:solidFill>
-          <a:ln>
-            <a:solidFill>
-              <a:schemeClr val="tx1"/>
-            </a:solidFill>
-          </a:ln>
-        </p:spPr>
-        <p:txBody>
-          <a:bodyPr wrap="square">
-            <a:spAutoFit/>
-          </a:bodyPr>
-          <a:lstStyle/>
-          <a:p>
-            <a:pPr>
-              <a:defRPr/>
-            </a:pPr>
-            <a:r>
-              <a:rPr lang="en-US">
-                <a:latin typeface="Arial" charset="0"/>
-                <a:cs typeface="Arial" charset="0"/>
-              </a:rPr>
-              <a:t>Before function prototypes </a:t>
-            </a:r>
-            <a:br>
-              <a:rPr lang="en-US">
-                <a:latin typeface="Arial" charset="0"/>
-                <a:cs typeface="Arial" charset="0"/>
-              </a:rPr>
-            </a:br>
-            <a:r>
-              <a:rPr lang="en-US">
-                <a:latin typeface="Arial" charset="0"/>
-                <a:cs typeface="Arial" charset="0"/>
-              </a:rPr>
-              <a:t>(but after preprocessor directives)</a:t>
-            </a:r>
-            <a:endParaRPr lang="en-SG">
-              <a:latin typeface="Arial" charset="0"/>
-              <a:cs typeface="Arial" charset="0"/>
-            </a:endParaRPr>
+            <a:endParaRPr lang="en-US" sz="2000" dirty="0"/>
           </a:p>
         </p:txBody>
       </p:sp>
@@ -29018,7 +26853,7 @@
         </p:nvSpPr>
         <p:spPr bwMode="auto">
           <a:xfrm>
-            <a:off x="1182689" y="4427224"/>
+            <a:off x="1658144" y="2501107"/>
             <a:ext cx="3389312" cy="483015"/>
           </a:xfrm>
           <a:prstGeom prst="rect">
@@ -29051,7 +26886,7 @@
               <a:defRPr/>
             </a:pPr>
             <a:r>
-              <a:rPr lang="en-US" sz="2000" b="1">
+              <a:rPr lang="en-US" sz="2000" b="1" dirty="0">
                 <a:solidFill>
                   <a:srgbClr val="0000FF"/>
                 </a:solidFill>
@@ -29060,7 +26895,7 @@
               <a:t>struct</a:t>
             </a:r>
             <a:r>
-              <a:rPr lang="en-US" sz="2000" b="1">
+              <a:rPr lang="en-US" sz="2000" b="1" dirty="0">
                 <a:solidFill>
                   <a:srgbClr val="7030A0"/>
                 </a:solidFill>
@@ -29069,57 +26904,11 @@
               <a:t> module </a:t>
             </a:r>
             <a:r>
-              <a:rPr lang="en-US" sz="2000" b="1">
+              <a:rPr lang="en-US" sz="2000" b="1" dirty="0">
                 <a:latin typeface="Courier New" pitchFamily="49" charset="0"/>
               </a:rPr>
               <a:t>cs1010;</a:t>
             </a:r>
-          </a:p>
-        </p:txBody>
-      </p:sp>
-      <p:sp>
-        <p:nvSpPr>
-          <p:cNvPr id="13" name="TextBox 12"/>
-          <p:cNvSpPr txBox="1"/>
-          <p:nvPr/>
-        </p:nvSpPr>
-        <p:spPr bwMode="auto">
-          <a:xfrm>
-            <a:off x="4824412" y="4498868"/>
-            <a:ext cx="2172514" cy="369332"/>
-          </a:xfrm>
-          <a:prstGeom prst="rect">
-            <a:avLst/>
-          </a:prstGeom>
-          <a:solidFill>
-            <a:srgbClr val="FFFF99"/>
-          </a:solidFill>
-          <a:ln>
-            <a:solidFill>
-              <a:srgbClr val="002060"/>
-            </a:solidFill>
-          </a:ln>
-        </p:spPr>
-        <p:txBody>
-          <a:bodyPr wrap="square">
-            <a:spAutoFit/>
-          </a:bodyPr>
-          <a:lstStyle/>
-          <a:p>
-            <a:pPr>
-              <a:defRPr/>
-            </a:pPr>
-            <a:r>
-              <a:rPr lang="en-US">
-                <a:latin typeface="Arial" charset="0"/>
-                <a:cs typeface="Arial" charset="0"/>
-              </a:rPr>
-              <a:t>Inside any function</a:t>
-            </a:r>
-            <a:endParaRPr lang="en-SG">
-              <a:latin typeface="Arial" charset="0"/>
-              <a:cs typeface="Arial" charset="0"/>
-            </a:endParaRPr>
           </a:p>
         </p:txBody>
       </p:sp>
@@ -29151,6 +26940,58 @@
               <a:rPr lang="en-US" dirty="0"/>
               <a:t>CS1010: Programming Methodology</a:t>
             </a:r>
+          </a:p>
+        </p:txBody>
+      </p:sp>
+      <p:sp>
+        <p:nvSpPr>
+          <p:cNvPr id="5" name="TextBox 4">
+            <a:extLst>
+              <a:ext uri="{FF2B5EF4-FFF2-40B4-BE49-F238E27FC236}">
+                <a16:creationId xmlns:a16="http://schemas.microsoft.com/office/drawing/2014/main" id="{CF63EDAB-F53D-A2B2-C39C-D2D189321E3A}"/>
+              </a:ext>
+            </a:extLst>
+          </p:cNvPr>
+          <p:cNvSpPr txBox="1"/>
+          <p:nvPr/>
+        </p:nvSpPr>
+        <p:spPr bwMode="auto">
+          <a:xfrm>
+            <a:off x="5398264" y="2501107"/>
+            <a:ext cx="3126611" cy="646331"/>
+          </a:xfrm>
+          <a:prstGeom prst="rect">
+            <a:avLst/>
+          </a:prstGeom>
+          <a:solidFill>
+            <a:srgbClr val="FFFF99"/>
+          </a:solidFill>
+          <a:ln>
+            <a:solidFill>
+              <a:schemeClr val="tx1"/>
+            </a:solidFill>
+          </a:ln>
+        </p:spPr>
+        <p:txBody>
+          <a:bodyPr wrap="square">
+            <a:spAutoFit/>
+          </a:bodyPr>
+          <a:lstStyle/>
+          <a:p>
+            <a:pPr>
+              <a:defRPr/>
+            </a:pPr>
+            <a:r>
+              <a:rPr lang="en-US" dirty="0">
+                <a:latin typeface="Arial" charset="0"/>
+                <a:cs typeface="Arial" charset="0"/>
+              </a:rPr>
+              <a:t>Use a structure type instead of the standard data types</a:t>
+            </a:r>
+            <a:endParaRPr lang="en-SG" dirty="0">
+              <a:latin typeface="Arial" charset="0"/>
+              <a:cs typeface="Arial" charset="0"/>
+            </a:endParaRPr>
           </a:p>
         </p:txBody>
       </p:sp>
@@ -29311,7 +27152,7 @@
               <a:buChar char="§"/>
             </a:pPr>
             <a:r>
-              <a:rPr lang="en-US" sz="2800"/>
+              <a:rPr lang="en-US" sz="2800" dirty="0"/>
               <a:t>Initialization</a:t>
             </a:r>
           </a:p>
@@ -29331,7 +27172,7 @@
               <a:buChar char="§"/>
             </a:pPr>
             <a:r>
-              <a:rPr lang="en-US" sz="2400"/>
+              <a:rPr lang="en-US" sz="2400" dirty="0"/>
               <a:t>Use dot (.) operator </a:t>
             </a:r>
           </a:p>
@@ -29350,7 +27191,7 @@
               <a:buFont typeface="Wingdings" panose="05000000000000000000" pitchFamily="2" charset="2"/>
               <a:buChar char="§"/>
             </a:pPr>
-            <a:endParaRPr lang="en-US" sz="2400"/>
+            <a:endParaRPr lang="en-US" sz="2400" dirty="0"/>
           </a:p>
           <a:p>
             <a:pPr marL="800100" lvl="1" indent="-342900">
@@ -29367,7 +27208,7 @@
               <a:buFont typeface="Wingdings" panose="05000000000000000000" pitchFamily="2" charset="2"/>
               <a:buChar char="§"/>
             </a:pPr>
-            <a:endParaRPr lang="en-US" sz="2400"/>
+            <a:endParaRPr lang="en-US" sz="2400" dirty="0"/>
           </a:p>
           <a:p>
             <a:pPr marL="800100" lvl="1" indent="-342900">
@@ -29384,7 +27225,7 @@
               <a:buFont typeface="Wingdings" panose="05000000000000000000" pitchFamily="2" charset="2"/>
               <a:buChar char="§"/>
             </a:pPr>
-            <a:endParaRPr lang="en-US" sz="2400"/>
+            <a:endParaRPr lang="en-US" sz="2400" dirty="0"/>
           </a:p>
           <a:p>
             <a:pPr marL="800100" lvl="1" indent="-342900">
@@ -29401,7 +27242,7 @@
               <a:buFont typeface="Wingdings" panose="05000000000000000000" pitchFamily="2" charset="2"/>
               <a:buChar char="§"/>
             </a:pPr>
-            <a:endParaRPr lang="en-US" sz="2400"/>
+            <a:endParaRPr lang="en-US" sz="2400" dirty="0"/>
           </a:p>
           <a:p>
             <a:pPr marL="800100" lvl="1" indent="-342900">
@@ -29419,7 +27260,7 @@
               <a:buChar char="§"/>
             </a:pPr>
             <a:r>
-              <a:rPr lang="en-US" sz="2400"/>
+              <a:rPr lang="en-US" sz="2400" dirty="0"/>
               <a:t>With compound literal</a:t>
             </a:r>
           </a:p>
@@ -29474,7 +27315,7 @@
               <a:defRPr/>
             </a:pPr>
             <a:r>
-              <a:rPr lang="en-US" sz="2000" b="1">
+              <a:rPr lang="en-US" sz="2000" b="1" dirty="0">
                 <a:solidFill>
                   <a:srgbClr val="0000FF"/>
                 </a:solidFill>
@@ -29483,7 +27324,7 @@
               <a:t>struct</a:t>
             </a:r>
             <a:r>
-              <a:rPr lang="en-US" sz="2000" b="1">
+              <a:rPr lang="en-US" sz="2000" b="1" dirty="0">
                 <a:solidFill>
                   <a:srgbClr val="7030A0"/>
                 </a:solidFill>
@@ -29492,7 +27333,7 @@
               <a:t> module </a:t>
             </a:r>
             <a:r>
-              <a:rPr lang="en-US" sz="2000" b="1">
+              <a:rPr lang="en-US" sz="2000" b="1" dirty="0">
                 <a:latin typeface="Courier New" pitchFamily="49" charset="0"/>
               </a:rPr>
               <a:t>cs1010;</a:t>
@@ -29503,13 +27344,13 @@
               <a:defRPr/>
             </a:pPr>
             <a:r>
-              <a:rPr lang="en-US" sz="2000" b="1">
+              <a:rPr lang="en-US" sz="2000" b="1" dirty="0">
                 <a:latin typeface="Courier New" pitchFamily="49" charset="0"/>
               </a:rPr>
               <a:t>cs1010.code = </a:t>
             </a:r>
             <a:r>
-              <a:rPr lang="en-US" sz="2000" b="1">
+              <a:rPr lang="en-US" sz="2000" b="1" dirty="0">
                 <a:solidFill>
                   <a:srgbClr val="006600"/>
                 </a:solidFill>
@@ -29518,7 +27359,7 @@
               <a:t>"CS1010"</a:t>
             </a:r>
             <a:r>
-              <a:rPr lang="en-US" sz="2000" b="1">
+              <a:rPr lang="en-US" sz="2000" b="1" dirty="0">
                 <a:latin typeface="Courier New" pitchFamily="49" charset="0"/>
               </a:rPr>
               <a:t>;</a:t>
@@ -29529,13 +27370,13 @@
               <a:defRPr/>
             </a:pPr>
             <a:r>
-              <a:rPr lang="en-US" sz="2000" b="1">
+              <a:rPr lang="en-US" sz="2000" b="1" dirty="0">
                 <a:latin typeface="Courier New" pitchFamily="49" charset="0"/>
               </a:rPr>
               <a:t>cs1010.title = </a:t>
             </a:r>
             <a:r>
-              <a:rPr lang="en-US" sz="2000" b="1">
+              <a:rPr lang="en-US" sz="2000" b="1" dirty="0">
                 <a:solidFill>
                   <a:srgbClr val="006600"/>
                 </a:solidFill>
@@ -29544,7 +27385,7 @@
               <a:t>"Programming Methodology"</a:t>
             </a:r>
             <a:r>
-              <a:rPr lang="en-US" sz="2000" b="1">
+              <a:rPr lang="en-US" sz="2000" b="1" dirty="0">
                 <a:latin typeface="Courier New" pitchFamily="49" charset="0"/>
               </a:rPr>
               <a:t>;</a:t>
@@ -29555,13 +27396,13 @@
               <a:defRPr/>
             </a:pPr>
             <a:r>
-              <a:rPr lang="en-US" sz="2000" b="1">
+              <a:rPr lang="en-US" sz="2000" b="1" dirty="0">
                 <a:latin typeface="Courier New" pitchFamily="49" charset="0"/>
               </a:rPr>
               <a:t>cs1010.mc = </a:t>
             </a:r>
             <a:r>
-              <a:rPr lang="en-US" sz="2000" b="1">
+              <a:rPr lang="en-US" sz="2000" b="1" dirty="0">
                 <a:solidFill>
                   <a:srgbClr val="C00000"/>
                 </a:solidFill>
@@ -29570,7 +27411,7 @@
               <a:t>4</a:t>
             </a:r>
             <a:r>
-              <a:rPr lang="en-US" sz="2000" b="1">
+              <a:rPr lang="en-US" sz="2000" b="1" dirty="0">
                 <a:latin typeface="Courier New" pitchFamily="49" charset="0"/>
               </a:rPr>
               <a:t>;</a:t>
@@ -29856,6 +27697,161 @@
   <p:transition>
     <p:fade/>
   </p:transition>
+  <p:timing>
+    <p:tnLst>
+      <p:par>
+        <p:cTn id="1" dur="indefinite" restart="never" nodeType="tmRoot">
+          <p:childTnLst>
+            <p:seq concurrent="1" nextAc="seek">
+              <p:cTn id="2" dur="indefinite" nodeType="mainSeq">
+                <p:childTnLst>
+                  <p:par>
+                    <p:cTn id="3" fill="hold">
+                      <p:stCondLst>
+                        <p:cond delay="indefinite"/>
+                      </p:stCondLst>
+                      <p:childTnLst>
+                        <p:par>
+                          <p:cTn id="4" fill="hold">
+                            <p:stCondLst>
+                              <p:cond delay="0"/>
+                            </p:stCondLst>
+                            <p:childTnLst>
+                              <p:par>
+                                <p:cTn id="5" presetID="1" presetClass="entr" presetSubtype="0" fill="hold" nodeType="clickEffect">
+                                  <p:stCondLst>
+                                    <p:cond delay="0"/>
+                                  </p:stCondLst>
+                                  <p:childTnLst>
+                                    <p:set>
+                                      <p:cBhvr>
+                                        <p:cTn id="6" dur="1" fill="hold">
+                                          <p:stCondLst>
+                                            <p:cond delay="0"/>
+                                          </p:stCondLst>
+                                        </p:cTn>
+                                        <p:tgtEl>
+                                          <p:spTgt spid="11">
+                                            <p:txEl>
+                                              <p:pRg st="6" end="6"/>
+                                            </p:txEl>
+                                          </p:spTgt>
+                                        </p:tgtEl>
+                                        <p:attrNameLst>
+                                          <p:attrName>style.visibility</p:attrName>
+                                        </p:attrNameLst>
+                                      </p:cBhvr>
+                                      <p:to>
+                                        <p:strVal val="visible"/>
+                                      </p:to>
+                                    </p:set>
+                                  </p:childTnLst>
+                                </p:cTn>
+                              </p:par>
+                              <p:par>
+                                <p:cTn id="7" presetID="1" presetClass="entr" presetSubtype="0" fill="hold" grpId="0" nodeType="withEffect">
+                                  <p:stCondLst>
+                                    <p:cond delay="0"/>
+                                  </p:stCondLst>
+                                  <p:childTnLst>
+                                    <p:set>
+                                      <p:cBhvr>
+                                        <p:cTn id="8" dur="1" fill="hold">
+                                          <p:stCondLst>
+                                            <p:cond delay="0"/>
+                                          </p:stCondLst>
+                                        </p:cTn>
+                                        <p:tgtEl>
+                                          <p:spTgt spid="16"/>
+                                        </p:tgtEl>
+                                        <p:attrNameLst>
+                                          <p:attrName>style.visibility</p:attrName>
+                                        </p:attrNameLst>
+                                      </p:cBhvr>
+                                      <p:to>
+                                        <p:strVal val="visible"/>
+                                      </p:to>
+                                    </p:set>
+                                  </p:childTnLst>
+                                </p:cTn>
+                              </p:par>
+                            </p:childTnLst>
+                          </p:cTn>
+                        </p:par>
+                      </p:childTnLst>
+                    </p:cTn>
+                  </p:par>
+                  <p:par>
+                    <p:cTn id="9" fill="hold">
+                      <p:stCondLst>
+                        <p:cond delay="indefinite"/>
+                      </p:stCondLst>
+                      <p:childTnLst>
+                        <p:par>
+                          <p:cTn id="10" fill="hold">
+                            <p:stCondLst>
+                              <p:cond delay="0"/>
+                            </p:stCondLst>
+                            <p:childTnLst>
+                              <p:par>
+                                <p:cTn id="11" presetID="1" presetClass="entr" presetSubtype="0" fill="hold" grpId="0" nodeType="clickEffect">
+                                  <p:stCondLst>
+                                    <p:cond delay="0"/>
+                                  </p:stCondLst>
+                                  <p:childTnLst>
+                                    <p:set>
+                                      <p:cBhvr>
+                                        <p:cTn id="12" dur="1" fill="hold">
+                                          <p:stCondLst>
+                                            <p:cond delay="0"/>
+                                          </p:stCondLst>
+                                        </p:cTn>
+                                        <p:tgtEl>
+                                          <p:spTgt spid="18"/>
+                                        </p:tgtEl>
+                                        <p:attrNameLst>
+                                          <p:attrName>style.visibility</p:attrName>
+                                        </p:attrNameLst>
+                                      </p:cBhvr>
+                                      <p:to>
+                                        <p:strVal val="visible"/>
+                                      </p:to>
+                                    </p:set>
+                                  </p:childTnLst>
+                                </p:cTn>
+                              </p:par>
+                            </p:childTnLst>
+                          </p:cTn>
+                        </p:par>
+                      </p:childTnLst>
+                    </p:cTn>
+                  </p:par>
+                </p:childTnLst>
+              </p:cTn>
+              <p:prevCondLst>
+                <p:cond evt="onPrev" delay="0">
+                  <p:tgtEl>
+                    <p:sldTgt/>
+                  </p:tgtEl>
+                </p:cond>
+              </p:prevCondLst>
+              <p:nextCondLst>
+                <p:cond evt="onNext" delay="0">
+                  <p:tgtEl>
+                    <p:sldTgt/>
+                  </p:tgtEl>
+                </p:cond>
+              </p:nextCondLst>
+            </p:seq>
+          </p:childTnLst>
+        </p:cTn>
+      </p:par>
+    </p:tnLst>
+    <p:bldLst>
+      <p:bldP spid="16" grpId="0" animBg="1"/>
+      <p:bldP spid="18" grpId="0" animBg="1"/>
+    </p:bldLst>
+  </p:timing>
 </p:sld>
 </file>
 
@@ -30000,7 +27996,7 @@
               <a:buChar char="§"/>
             </a:pPr>
             <a:r>
-              <a:rPr lang="en-US" sz="2400"/>
+              <a:rPr lang="en-US" sz="2400" dirty="0"/>
               <a:t>Call by value</a:t>
             </a:r>
           </a:p>
@@ -30019,7 +28015,7 @@
               <a:buFont typeface="Wingdings" panose="05000000000000000000" pitchFamily="2" charset="2"/>
               <a:buChar char="§"/>
             </a:pPr>
-            <a:endParaRPr lang="en-US" sz="2400"/>
+            <a:endParaRPr lang="en-US" sz="2400" dirty="0"/>
           </a:p>
           <a:p>
             <a:pPr marL="800100" lvl="1" indent="-342900">
@@ -30036,7 +28032,7 @@
               <a:buFont typeface="Wingdings" panose="05000000000000000000" pitchFamily="2" charset="2"/>
               <a:buChar char="§"/>
             </a:pPr>
-            <a:endParaRPr lang="en-US" sz="2400"/>
+            <a:endParaRPr lang="en-US" sz="2400" dirty="0"/>
           </a:p>
           <a:p>
             <a:pPr marL="800100" lvl="1" indent="-342900">
@@ -30053,7 +28049,7 @@
               <a:buFont typeface="Wingdings" panose="05000000000000000000" pitchFamily="2" charset="2"/>
               <a:buChar char="§"/>
             </a:pPr>
-            <a:endParaRPr lang="en-US" sz="2400"/>
+            <a:endParaRPr lang="en-US" sz="2400" dirty="0"/>
           </a:p>
           <a:p>
             <a:pPr marL="800100" lvl="1" indent="-342900">
@@ -30070,7 +28066,7 @@
               <a:buFont typeface="Wingdings" panose="05000000000000000000" pitchFamily="2" charset="2"/>
               <a:buChar char="§"/>
             </a:pPr>
-            <a:endParaRPr lang="en-US" sz="1600"/>
+            <a:endParaRPr lang="en-US" sz="1600" dirty="0"/>
           </a:p>
           <a:p>
             <a:pPr marL="342900" indent="-342900">
@@ -30088,7 +28084,7 @@
               <a:buChar char="§"/>
             </a:pPr>
             <a:r>
-              <a:rPr lang="en-US" sz="2400"/>
+              <a:rPr lang="en-US" sz="2400" dirty="0"/>
               <a:t>Call by reference (recommended)</a:t>
             </a:r>
           </a:p>
@@ -30523,18 +28519,18 @@
               <a:defRPr/>
             </a:pPr>
             <a:r>
-              <a:rPr lang="en-SG">
+              <a:rPr lang="en-SG" dirty="0">
                 <a:latin typeface="Arial" charset="0"/>
                 <a:cs typeface="Arial" charset="0"/>
               </a:rPr>
               <a:t>More efficient and allow changes to be visible </a:t>
             </a:r>
             <a:r>
-              <a:rPr lang="en-SG"/>
+              <a:rPr lang="en-SG" dirty="0"/>
               <a:t>outside.</a:t>
             </a:r>
             <a:r>
-              <a:rPr lang="en-SG">
+              <a:rPr lang="en-SG" dirty="0">
                 <a:latin typeface="Arial" charset="0"/>
                 <a:cs typeface="Arial" charset="0"/>
               </a:rPr>
@@ -30582,18 +28578,18 @@
               <a:defRPr/>
             </a:pPr>
             <a:r>
-              <a:rPr lang="en-SG">
+              <a:rPr lang="en-SG" dirty="0">
                 <a:latin typeface="Arial" charset="0"/>
                 <a:cs typeface="Arial" charset="0"/>
               </a:rPr>
               <a:t>Values copied component by component and changes not visible </a:t>
             </a:r>
             <a:r>
-              <a:rPr lang="en-SG"/>
+              <a:rPr lang="en-SG" dirty="0"/>
               <a:t>outside.</a:t>
             </a:r>
             <a:r>
-              <a:rPr lang="en-SG">
+              <a:rPr lang="en-SG" dirty="0">
                 <a:latin typeface="Arial" charset="0"/>
                 <a:cs typeface="Arial" charset="0"/>
               </a:rPr>
@@ -30748,7 +28744,7 @@
               <a:defRPr/>
             </a:pPr>
             <a:r>
-              <a:rPr lang="en-SG">
+              <a:rPr lang="en-SG" dirty="0">
                 <a:latin typeface="Arial" charset="0"/>
                 <a:cs typeface="Arial" charset="0"/>
               </a:rPr>
@@ -30864,7 +28860,7 @@
                             </p:stCondLst>
                             <p:childTnLst>
                               <p:par>
-                                <p:cTn id="5" presetID="9" presetClass="entr" presetSubtype="0" fill="hold" grpId="0" nodeType="clickEffect">
+                                <p:cTn id="5" presetID="1" presetClass="entr" presetSubtype="0" fill="hold" nodeType="clickEffect">
                                   <p:stCondLst>
                                     <p:cond delay="0"/>
                                   </p:stCondLst>
@@ -30877,7 +28873,11 @@
                                           </p:stCondLst>
                                         </p:cTn>
                                         <p:tgtEl>
-                                          <p:spTgt spid="15"/>
+                                          <p:spTgt spid="11">
+                                            <p:txEl>
+                                              <p:pRg st="5" end="5"/>
+                                            </p:txEl>
+                                          </p:spTgt>
                                         </p:tgtEl>
                                         <p:attrNameLst>
                                           <p:attrName>style.visibility</p:attrName>
@@ -30887,44 +28887,18 @@
                                         <p:strVal val="visible"/>
                                       </p:to>
                                     </p:set>
-                                    <p:animEffect transition="in" filter="dissolve">
-                                      <p:cBhvr>
-                                        <p:cTn id="7" dur="500"/>
-                                        <p:tgtEl>
-                                          <p:spTgt spid="15"/>
-                                        </p:tgtEl>
-                                      </p:cBhvr>
-                                    </p:animEffect>
                                   </p:childTnLst>
                                 </p:cTn>
                               </p:par>
-                            </p:childTnLst>
-                          </p:cTn>
-                        </p:par>
-                      </p:childTnLst>
-                    </p:cTn>
-                  </p:par>
-                  <p:par>
-                    <p:cTn id="8" fill="hold">
-                      <p:stCondLst>
-                        <p:cond delay="indefinite"/>
-                      </p:stCondLst>
-                      <p:childTnLst>
-                        <p:par>
-                          <p:cTn id="9" fill="hold">
-                            <p:stCondLst>
-                              <p:cond delay="0"/>
-                            </p:stCondLst>
-                            <p:childTnLst>
                               <p:par>
-                                <p:cTn id="10" presetID="9" presetClass="entr" presetSubtype="0" fill="hold" grpId="0" nodeType="clickEffect">
+                                <p:cTn id="7" presetID="1" presetClass="entr" presetSubtype="0" fill="hold" grpId="0" nodeType="withEffect">
                                   <p:stCondLst>
                                     <p:cond delay="0"/>
                                   </p:stCondLst>
                                   <p:childTnLst>
                                     <p:set>
                                       <p:cBhvr>
-                                        <p:cTn id="11" dur="1" fill="hold">
+                                        <p:cTn id="8" dur="1" fill="hold">
                                           <p:stCondLst>
                                             <p:cond delay="0"/>
                                           </p:stCondLst>
@@ -30940,19 +28914,56 @@
                                         <p:strVal val="visible"/>
                                       </p:to>
                                     </p:set>
-                                    <p:animEffect transition="in" filter="dissolve">
-                                      <p:cBhvr>
-                                        <p:cTn id="12" dur="500"/>
-                                        <p:tgtEl>
-                                          <p:spTgt spid="16"/>
-                                        </p:tgtEl>
-                                      </p:cBhvr>
-                                    </p:animEffect>
                                   </p:childTnLst>
                                 </p:cTn>
                               </p:par>
                               <p:par>
-                                <p:cTn id="13" presetID="9" presetClass="entr" presetSubtype="0" fill="hold" grpId="0" nodeType="withEffect">
+                                <p:cTn id="9" presetID="1" presetClass="entr" presetSubtype="0" fill="hold" grpId="0" nodeType="withEffect">
+                                  <p:stCondLst>
+                                    <p:cond delay="0"/>
+                                  </p:stCondLst>
+                                  <p:childTnLst>
+                                    <p:set>
+                                      <p:cBhvr>
+                                        <p:cTn id="10" dur="1" fill="hold">
+                                          <p:stCondLst>
+                                            <p:cond delay="0"/>
+                                          </p:stCondLst>
+                                        </p:cTn>
+                                        <p:tgtEl>
+                                          <p:spTgt spid="9"/>
+                                        </p:tgtEl>
+                                        <p:attrNameLst>
+                                          <p:attrName>style.visibility</p:attrName>
+                                        </p:attrNameLst>
+                                      </p:cBhvr>
+                                      <p:to>
+                                        <p:strVal val="visible"/>
+                                      </p:to>
+                                    </p:set>
+                                  </p:childTnLst>
+                                </p:cTn>
+                              </p:par>
+                            </p:childTnLst>
+                          </p:cTn>
+                        </p:par>
+                      </p:childTnLst>
+                    </p:cTn>
+                  </p:par>
+                  <p:par>
+                    <p:cTn id="11" fill="hold">
+                      <p:stCondLst>
+                        <p:cond delay="indefinite"/>
+                      </p:stCondLst>
+                      <p:childTnLst>
+                        <p:par>
+                          <p:cTn id="12" fill="hold">
+                            <p:stCondLst>
+                              <p:cond delay="0"/>
+                            </p:stCondLst>
+                            <p:childTnLst>
+                              <p:par>
+                                <p:cTn id="13" presetID="1" presetClass="entr" presetSubtype="0" fill="hold" nodeType="clickEffect">
                                   <p:stCondLst>
                                     <p:cond delay="0"/>
                                   </p:stCondLst>
@@ -30960,6 +28971,33 @@
                                     <p:set>
                                       <p:cBhvr>
                                         <p:cTn id="14" dur="1" fill="hold">
+                                          <p:stCondLst>
+                                            <p:cond delay="0"/>
+                                          </p:stCondLst>
+                                        </p:cTn>
+                                        <p:tgtEl>
+                                          <p:spTgt spid="4"/>
+                                        </p:tgtEl>
+                                        <p:attrNameLst>
+                                          <p:attrName>style.visibility</p:attrName>
+                                        </p:attrNameLst>
+                                      </p:cBhvr>
+                                      <p:to>
+                                        <p:strVal val="visible"/>
+                                      </p:to>
+                                    </p:set>
+                                  </p:childTnLst>
+                                </p:cTn>
+                              </p:par>
+                              <p:par>
+                                <p:cTn id="15" presetID="1" presetClass="entr" presetSubtype="0" fill="hold" grpId="0" nodeType="withEffect">
+                                  <p:stCondLst>
+                                    <p:cond delay="0"/>
+                                  </p:stCondLst>
+                                  <p:childTnLst>
+                                    <p:set>
+                                      <p:cBhvr>
+                                        <p:cTn id="16" dur="1" fill="hold">
                                           <p:stCondLst>
                                             <p:cond delay="0"/>
                                           </p:stCondLst>
@@ -30975,14 +29013,33 @@
                                         <p:strVal val="visible"/>
                                       </p:to>
                                     </p:set>
-                                    <p:animEffect transition="in" filter="dissolve">
+                                  </p:childTnLst>
+                                </p:cTn>
+                              </p:par>
+                              <p:par>
+                                <p:cTn id="17" presetID="1" presetClass="entr" presetSubtype="0" fill="hold" grpId="0" nodeType="withEffect">
+                                  <p:stCondLst>
+                                    <p:cond delay="0"/>
+                                  </p:stCondLst>
+                                  <p:childTnLst>
+                                    <p:set>
                                       <p:cBhvr>
-                                        <p:cTn id="15" dur="500"/>
+                                        <p:cTn id="18" dur="1" fill="hold">
+                                          <p:stCondLst>
+                                            <p:cond delay="0"/>
+                                          </p:stCondLst>
+                                        </p:cTn>
                                         <p:tgtEl>
-                                          <p:spTgt spid="13"/>
+                                          <p:spTgt spid="14"/>
                                         </p:tgtEl>
+                                        <p:attrNameLst>
+                                          <p:attrName>style.visibility</p:attrName>
+                                        </p:attrNameLst>
                                       </p:cBhvr>
-                                    </p:animEffect>
+                                      <p:to>
+                                        <p:strVal val="visible"/>
+                                      </p:to>
+                                    </p:set>
                                   </p:childTnLst>
                                 </p:cTn>
                               </p:par>
@@ -31014,9 +29071,10 @@
       </p:par>
     </p:tnLst>
     <p:bldLst>
-      <p:bldP spid="15" grpId="0" animBg="1"/>
       <p:bldP spid="16" grpId="0" animBg="1"/>
+      <p:bldP spid="9" grpId="0" animBg="1"/>
       <p:bldP spid="13" grpId="0" animBg="1"/>
+      <p:bldP spid="14" grpId="0" animBg="1"/>
     </p:bldLst>
   </p:timing>
 </p:sld>
